--- a/docs/presentations/ascr_stage3_weekly_report.pptx
+++ b/docs/presentations/ascr_stage3_weekly_report.pptx
@@ -18,6 +18,7 @@
     <p:sldId id="266" r:id="rId17"/>
     <p:sldId id="267" r:id="rId18"/>
     <p:sldId id="268" r:id="rId19"/>
+    <p:sldId id="269" r:id="rId20"/>
   </p:sldIdLst>
   <p:sldSz cx="12191695" cy="6858000" type="screen4x3"/>
   <p:notesSz cx="6858000" cy="9144000"/>
@@ -3663,7 +3664,7 @@
                 </a:solidFill>
                 <a:latin typeface="Aptos"/>
               </a:rPr>
-              <a:t>Only after a useful selector or LoRA localizer</a:t>
+              <a:t>Engineering loop now runs; localizer quality is the bottleneck</a:t>
             </a:r>
           </a:p>
         </p:txBody>
@@ -4186,7 +4187,7 @@
             <a:avLst/>
           </a:prstGeom>
           <a:solidFill>
-            <a:srgbClr val="426792"/>
+            <a:srgbClr val="588760"/>
           </a:solidFill>
           <a:ln>
             <a:noFill/>
@@ -4243,7 +4244,7 @@
                 </a:solidFill>
                 <a:latin typeface="Aptos"/>
               </a:rPr>
-              <a:t>Initial policy</a:t>
+              <a:t>New evidence</a:t>
             </a:r>
           </a:p>
           <a:p>
@@ -4259,7 +4260,7 @@
               </a:defRPr>
             </a:pPr>
             <a:r>
-              <a:t>If mask empty: stop</a:t>
+              <a:t>Single-sample smoke completed: 161923</a:t>
             </a:r>
           </a:p>
           <a:p>
@@ -4275,7 +4276,7 @@
               </a:defRPr>
             </a:pPr>
             <a:r>
-              <a:t>If mask nonempty: reopen selected cells</a:t>
+              <a:t>2-sample benchmark completed: 161943</a:t>
             </a:r>
           </a:p>
           <a:p>
@@ -4291,7 +4292,7 @@
               </a:defRPr>
             </a:pPr>
             <a:r>
-              <a:t>Add scorer only after nontrivial masks</a:t>
+              <a:t>ok_count=2, error_count=0</a:t>
             </a:r>
           </a:p>
         </p:txBody>
@@ -4356,7 +4357,7 @@
             <a:avLst/>
           </a:prstGeom>
           <a:solidFill>
-            <a:srgbClr val="4E817C"/>
+            <a:srgbClr val="9E5B5B"/>
           </a:solidFill>
           <a:ln>
             <a:noFill/>
@@ -4413,7 +4414,7 @@
                 </a:solidFill>
                 <a:latin typeface="Aptos"/>
               </a:rPr>
-              <a:t>Artifacts to keep</a:t>
+              <a:t>But localizer failed</a:t>
             </a:r>
           </a:p>
           <a:p>
@@ -4429,7 +4430,7 @@
               </a:defRPr>
             </a:pPr>
             <a:r>
-              <a:t>Trace and selected indices</a:t>
+              <a:t>target=B5 in both samples</a:t>
             </a:r>
           </a:p>
           <a:p>
@@ -4445,7 +4446,7 @@
               </a:defRPr>
             </a:pPr>
             <a:r>
-              <a:t>Selected token/cell count</a:t>
+              <a:t>LoRA predicted D/F/G rows</a:t>
             </a:r>
           </a:p>
           <a:p>
@@ -4461,23 +4462,7 @@
               </a:defRPr>
             </a:pPr>
             <a:r>
-              <a:t>Decoded before/after images</a:t>
-            </a:r>
-          </a:p>
-          <a:p>
-            <a:pPr>
-              <a:spcBef>
-                <a:spcPts val="600"/>
-              </a:spcBef>
-              <a:defRPr sz="1100">
-                <a:solidFill>
-                  <a:srgbClr val="465260"/>
-                </a:solidFill>
-                <a:latin typeface="Aptos"/>
-              </a:defRPr>
-            </a:pPr>
-            <a:r>
-              <a:t>Final summary metrics</a:t>
+              <a:t>hit_any=0/2 despite reopen_changed=1.0</a:t>
             </a:r>
           </a:p>
         </p:txBody>
@@ -4573,7 +4558,7 @@
                 </a:solidFill>
                 <a:latin typeface="Aptos"/>
               </a:rPr>
-              <a:t>This Week's Deliverables / 本周完成</a:t>
+              <a:t>Stage-5 Result: Working Loop, Failed Native Localizer</a:t>
             </a:r>
           </a:p>
         </p:txBody>
@@ -4608,7 +4593,7 @@
                 </a:solidFill>
                 <a:latin typeface="Aptos"/>
               </a:rPr>
-              <a:t>Evidence-backed summary</a:t>
+              <a:t>The result is useful as a negative baseline, not as the final selector</a:t>
             </a:r>
           </a:p>
         </p:txBody>
@@ -4664,8 +4649,8 @@
         </p:nvSpPr>
         <p:spPr>
           <a:xfrm>
-            <a:off x="731520" y="1417320"/>
-            <a:ext cx="3383280" cy="3108960"/>
+            <a:off x="731520" y="1325880"/>
+            <a:ext cx="3383280" cy="3246120"/>
           </a:xfrm>
           <a:prstGeom prst="roundRect">
             <a:avLst/>
@@ -4709,14 +4694,14 @@
         </p:nvSpPr>
         <p:spPr>
           <a:xfrm>
-            <a:off x="731520" y="1417320"/>
-            <a:ext cx="73152" cy="3108960"/>
+            <a:off x="731520" y="1325880"/>
+            <a:ext cx="73152" cy="3246120"/>
           </a:xfrm>
           <a:prstGeom prst="rect">
             <a:avLst/>
           </a:prstGeom>
           <a:solidFill>
-            <a:srgbClr val="426792"/>
+            <a:srgbClr val="588760"/>
           </a:solidFill>
           <a:ln>
             <a:noFill/>
@@ -4752,8 +4737,8 @@
         </p:nvSpPr>
         <p:spPr>
           <a:xfrm>
-            <a:off x="932688" y="1581912"/>
-            <a:ext cx="2999232" cy="2880360"/>
+            <a:off x="932688" y="1490472"/>
+            <a:ext cx="2999232" cy="3017520"/>
           </a:xfrm>
           <a:prstGeom prst="rect">
             <a:avLst/>
@@ -4773,7 +4758,7 @@
                 </a:solidFill>
                 <a:latin typeface="Aptos"/>
               </a:rPr>
-              <a:t>Research design</a:t>
+              <a:t>What succeeded</a:t>
             </a:r>
           </a:p>
           <a:p>
@@ -4789,7 +4774,7 @@
               </a:defRPr>
             </a:pPr>
             <a:r>
-              <a:t>Stage 3 scoped to discrete-token corruption</a:t>
+              <a:t>clean/corrupt/reopen/decode path runs</a:t>
             </a:r>
           </a:p>
           <a:p>
@@ -4805,7 +4790,7 @@
               </a:defRPr>
             </a:pPr>
             <a:r>
-              <a:t>Phase 0-5 roadmap clarified</a:t>
+              <a:t>LoRA answer path no longer crashes</a:t>
             </a:r>
           </a:p>
           <a:p>
@@ -4821,7 +4806,7 @@
               </a:defRPr>
             </a:pPr>
             <a:r>
-              <a:t>Training labels defined from token masks</a:t>
+              <a:t>Artifacts: trace, masks, before/after images</a:t>
             </a:r>
           </a:p>
         </p:txBody>
@@ -4834,8 +4819,8 @@
         </p:nvSpPr>
         <p:spPr>
           <a:xfrm>
-            <a:off x="4434840" y="1417320"/>
-            <a:ext cx="3383280" cy="3108960"/>
+            <a:off x="4434840" y="1325880"/>
+            <a:ext cx="3383280" cy="3246120"/>
           </a:xfrm>
           <a:prstGeom prst="roundRect">
             <a:avLst/>
@@ -4879,14 +4864,14 @@
         </p:nvSpPr>
         <p:spPr>
           <a:xfrm>
-            <a:off x="4434840" y="1417320"/>
-            <a:ext cx="73152" cy="3108960"/>
+            <a:off x="4434840" y="1325880"/>
+            <a:ext cx="73152" cy="3246120"/>
           </a:xfrm>
           <a:prstGeom prst="rect">
             <a:avLst/>
           </a:prstGeom>
           <a:solidFill>
-            <a:srgbClr val="4E817C"/>
+            <a:srgbClr val="9E5B5B"/>
           </a:solidFill>
           <a:ln>
             <a:noFill/>
@@ -4922,8 +4907,8 @@
         </p:nvSpPr>
         <p:spPr>
           <a:xfrm>
-            <a:off x="4636008" y="1581912"/>
-            <a:ext cx="2999232" cy="2880360"/>
+            <a:off x="4636008" y="1490472"/>
+            <a:ext cx="2999232" cy="3017520"/>
           </a:xfrm>
           <a:prstGeom prst="rect">
             <a:avLst/>
@@ -4943,7 +4928,7 @@
                 </a:solidFill>
                 <a:latin typeface="Aptos"/>
               </a:rPr>
-              <a:t>Pipeline</a:t>
+              <a:t>What failed</a:t>
             </a:r>
           </a:p>
           <a:p>
@@ -4959,7 +4944,7 @@
               </a:defRPr>
             </a:pPr>
             <a:r>
-              <a:t>Clean-token generation path</a:t>
+              <a:t>raw MMU text is malformed/repetitive</a:t>
             </a:r>
           </a:p>
           <a:p>
@@ -4975,7 +4960,7 @@
               </a:defRPr>
             </a:pPr>
             <a:r>
-              <a:t>Repair dataset config: 40k rows target</a:t>
+              <a:t>parser recovers cells but not meaning</a:t>
             </a:r>
           </a:p>
           <a:p>
@@ -4991,7 +4976,7 @@
               </a:defRPr>
             </a:pPr>
             <a:r>
-              <a:t>SFT conversion and LoRA runners</a:t>
+              <a:t>selected cells miss true target</a:t>
             </a:r>
           </a:p>
         </p:txBody>
@@ -5004,8 +4989,8 @@
         </p:nvSpPr>
         <p:spPr>
           <a:xfrm>
-            <a:off x="8138160" y="1417320"/>
-            <a:ext cx="3383280" cy="3108960"/>
+            <a:off x="8138160" y="1325880"/>
+            <a:ext cx="3383280" cy="3246120"/>
           </a:xfrm>
           <a:prstGeom prst="roundRect">
             <a:avLst/>
@@ -5049,8 +5034,8 @@
         </p:nvSpPr>
         <p:spPr>
           <a:xfrm>
-            <a:off x="8138160" y="1417320"/>
-            <a:ext cx="73152" cy="3108960"/>
+            <a:off x="8138160" y="1325880"/>
+            <a:ext cx="73152" cy="3246120"/>
           </a:xfrm>
           <a:prstGeom prst="rect">
             <a:avLst/>
@@ -5092,8 +5077,8 @@
         </p:nvSpPr>
         <p:spPr>
           <a:xfrm>
-            <a:off x="8339328" y="1581912"/>
-            <a:ext cx="2999232" cy="2880360"/>
+            <a:off x="8339328" y="1490472"/>
+            <a:ext cx="2999232" cy="3017520"/>
           </a:xfrm>
           <a:prstGeom prst="rect">
             <a:avLst/>
@@ -5113,7 +5098,7 @@
                 </a:solidFill>
                 <a:latin typeface="Aptos"/>
               </a:rPr>
-              <a:t>Validation gates</a:t>
+              <a:t>How to report it</a:t>
             </a:r>
           </a:p>
           <a:p>
@@ -5129,7 +5114,7 @@
               </a:defRPr>
             </a:pPr>
             <a:r>
-              <a:t>Locality smoke passed</a:t>
+              <a:t>Current LoRA = failed baseline</a:t>
             </a:r>
           </a:p>
           <a:p>
@@ -5145,7 +5130,7 @@
               </a:defRPr>
             </a:pPr>
             <a:r>
-              <a:t>Hard64 selector baseline gate cleared</a:t>
+              <a:t>Do not claim repair quality yet</a:t>
             </a:r>
           </a:p>
           <a:p>
@@ -5161,7 +5146,7 @@
               </a:defRPr>
             </a:pPr>
             <a:r>
-              <a:t>Phase 4 not yet fully cleared</a:t>
+              <a:t>Use as evidence for stronger supervision</a:t>
             </a:r>
           </a:p>
         </p:txBody>
@@ -5174,8 +5159,8 @@
         </p:nvSpPr>
         <p:spPr>
           <a:xfrm>
-            <a:off x="914400" y="5074920"/>
-            <a:ext cx="10058400" cy="502920"/>
+            <a:off x="822960" y="4983480"/>
+            <a:ext cx="10607040" cy="640080"/>
           </a:xfrm>
           <a:prstGeom prst="rect">
             <a:avLst/>
@@ -5192,11 +5177,11 @@
             <a:r>
               <a:rPr sz="1300" b="0">
                 <a:solidFill>
-                  <a:srgbClr val="697380"/>
+                  <a:srgbClr val="203044"/>
                 </a:solidFill>
                 <a:latin typeface="Aptos"/>
               </a:rPr>
-              <a:t>No formal before/after image-quality result is claimed here unless already recorded in the repository.</a:t>
+              <a:t>Interpretation: Stage 5 infrastructure is validated; Stage 4 native localizer is the research bottleneck.</a:t>
             </a:r>
           </a:p>
         </p:txBody>
@@ -5292,7 +5277,7 @@
                 </a:solidFill>
                 <a:latin typeface="Aptos"/>
               </a:rPr>
-              <a:t>Next Actions / 下一步</a:t>
+              <a:t>Decision Point: Add Oracle + Stage-2 Image-Space Teacher</a:t>
             </a:r>
           </a:p>
         </p:txBody>
@@ -5327,7 +5312,7 @@
                 </a:solidFill>
                 <a:latin typeface="Aptos"/>
               </a:rPr>
-              <a:t>Concrete server continuation</a:t>
+              <a:t>Do not abandon Stage 3 yet; isolate whether the bottleneck is localizer or reopen</a:t>
             </a:r>
           </a:p>
         </p:txBody>
@@ -5384,7 +5369,7 @@
         <p:spPr>
           <a:xfrm>
             <a:off x="731520" y="1325880"/>
-            <a:ext cx="5120640" cy="2011680"/>
+            <a:ext cx="5120640" cy="2194560"/>
           </a:xfrm>
           <a:prstGeom prst="roundRect">
             <a:avLst/>
@@ -5429,7 +5414,7 @@
         <p:spPr>
           <a:xfrm>
             <a:off x="731520" y="1325880"/>
-            <a:ext cx="73152" cy="2011680"/>
+            <a:ext cx="73152" cy="2194560"/>
           </a:xfrm>
           <a:prstGeom prst="rect">
             <a:avLst/>
@@ -5472,7 +5457,7 @@
         <p:spPr>
           <a:xfrm>
             <a:off x="932688" y="1490472"/>
-            <a:ext cx="4736592" cy="1783080"/>
+            <a:ext cx="4736592" cy="1965960"/>
           </a:xfrm>
           <a:prstGeom prst="rect">
             <a:avLst/>
@@ -5492,7 +5477,7 @@
                 </a:solidFill>
                 <a:latin typeface="Aptos"/>
               </a:rPr>
-              <a:t>Short-term</a:t>
+              <a:t>Oracle upper bound</a:t>
             </a:r>
           </a:p>
           <a:p>
@@ -5508,7 +5493,7 @@
               </a:defRPr>
             </a:pPr>
             <a:r>
-              <a:t>Generate/verify clean tokens</a:t>
+              <a:t>Use true target_cells directly</a:t>
             </a:r>
           </a:p>
           <a:p>
@@ -5524,7 +5509,7 @@
               </a:defRPr>
             </a:pPr>
             <a:r>
-              <a:t>Build repair_cells_40k dataset</a:t>
+              <a:t>Same prompt/corruption/reopen path</a:t>
             </a:r>
           </a:p>
           <a:p>
@@ -5540,7 +5525,23 @@
               </a:defRPr>
             </a:pPr>
             <a:r>
-              <a:t>Prepare SFT and convert Lumina JSONL</a:t>
+              <a:t>If oracle fails: generator/reopen problem</a:t>
+            </a:r>
+          </a:p>
+          <a:p>
+            <a:pPr>
+              <a:spcBef>
+                <a:spcPts val="600"/>
+              </a:spcBef>
+              <a:defRPr sz="1100">
+                <a:solidFill>
+                  <a:srgbClr val="465260"/>
+                </a:solidFill>
+                <a:latin typeface="Aptos"/>
+              </a:defRPr>
+            </a:pPr>
+            <a:r>
+              <a:t>If oracle works: localizer problem</a:t>
             </a:r>
           </a:p>
         </p:txBody>
@@ -5554,7 +5555,7 @@
         <p:spPr>
           <a:xfrm>
             <a:off x="6309360" y="1325880"/>
-            <a:ext cx="5120640" cy="2011680"/>
+            <a:ext cx="5120640" cy="2194560"/>
           </a:xfrm>
           <a:prstGeom prst="roundRect">
             <a:avLst/>
@@ -5599,7 +5600,7 @@
         <p:spPr>
           <a:xfrm>
             <a:off x="6309360" y="1325880"/>
-            <a:ext cx="73152" cy="2011680"/>
+            <a:ext cx="73152" cy="2194560"/>
           </a:xfrm>
           <a:prstGeom prst="rect">
             <a:avLst/>
@@ -5642,7 +5643,7 @@
         <p:spPr>
           <a:xfrm>
             <a:off x="6510528" y="1490472"/>
-            <a:ext cx="4736592" cy="1783080"/>
+            <a:ext cx="4736592" cy="1965960"/>
           </a:xfrm>
           <a:prstGeom prst="rect">
             <a:avLst/>
@@ -5662,7 +5663,7 @@
                 </a:solidFill>
                 <a:latin typeface="Aptos"/>
               </a:rPr>
-              <a:t>Training gate</a:t>
+              <a:t>Stage-2 style branch</a:t>
             </a:r>
           </a:p>
           <a:p>
@@ -5678,7 +5679,7 @@
               </a:defRPr>
             </a:pPr>
             <a:r>
-              <a:t>Train one authoritative LoRA adapter</a:t>
+              <a:t>External API analyzes decoded images</a:t>
             </a:r>
           </a:p>
           <a:p>
@@ -5694,7 +5695,7 @@
               </a:defRPr>
             </a:pPr>
             <a:r>
-              <a:t>Probe parse_rate first</a:t>
+              <a:t>Image-space evaluator/localizer, not VQ-token input</a:t>
             </a:r>
           </a:p>
           <a:p>
@@ -5710,7 +5711,23 @@
               </a:defRPr>
             </a:pPr>
             <a:r>
-              <a:t>Only interpret hit_any / IoU after parse is reliable</a:t>
+              <a:t>Use as teacher/control loop</a:t>
+            </a:r>
+          </a:p>
+          <a:p>
+            <a:pPr>
+              <a:spcBef>
+                <a:spcPts val="600"/>
+              </a:spcBef>
+              <a:defRPr sz="1100">
+                <a:solidFill>
+                  <a:srgbClr val="465260"/>
+                </a:solidFill>
+                <a:latin typeface="Aptos"/>
+              </a:defRPr>
+            </a:pPr>
+            <a:r>
+              <a:t>Compare to native LoRA selector</a:t>
             </a:r>
           </a:p>
         </p:txBody>
@@ -5723,8 +5740,8 @@
         </p:nvSpPr>
         <p:spPr>
           <a:xfrm>
-            <a:off x="731520" y="3794760"/>
-            <a:ext cx="10698480" cy="1325880"/>
+            <a:off x="731520" y="4069080"/>
+            <a:ext cx="10698480" cy="1051560"/>
           </a:xfrm>
           <a:prstGeom prst="roundRect">
             <a:avLst/>
@@ -5768,8 +5785,8 @@
         </p:nvSpPr>
         <p:spPr>
           <a:xfrm>
-            <a:off x="731520" y="3794760"/>
-            <a:ext cx="73152" cy="1325880"/>
+            <a:off x="731520" y="4069080"/>
+            <a:ext cx="73152" cy="1051560"/>
           </a:xfrm>
           <a:prstGeom prst="rect">
             <a:avLst/>
@@ -5811,8 +5828,8 @@
         </p:nvSpPr>
         <p:spPr>
           <a:xfrm>
-            <a:off x="932688" y="3959352"/>
-            <a:ext cx="10314432" cy="1097280"/>
+            <a:off x="932688" y="4233672"/>
+            <a:ext cx="10314432" cy="822960"/>
           </a:xfrm>
           <a:prstGeom prst="rect">
             <a:avLst/>
@@ -5832,7 +5849,7 @@
                 </a:solidFill>
                 <a:latin typeface="Aptos"/>
               </a:rPr>
-              <a:t>Open risk</a:t>
+              <a:t>Recommendation</a:t>
             </a:r>
           </a:p>
           <a:p>
@@ -5848,7 +5865,7 @@
               </a:defRPr>
             </a:pPr>
             <a:r>
-              <a:t>If 8-GPU 1024px LoRA OOMs, inspect DDP log and use H200/L40S fallback profiles; do not train many independent adapters and merge them.</a:t>
+              <a:t>Keep token-repair Stage 3 as main experimental scaffold, but add image-space external-teacher loop as an upper-bound/control path before more native-localizer training.</a:t>
             </a:r>
           </a:p>
         </p:txBody>
@@ -5944,7 +5961,7 @@
                 </a:solidFill>
                 <a:latin typeface="Aptos"/>
               </a:rPr>
-              <a:t>Evidence Sources / 依据文件</a:t>
+              <a:t>Next Actions / 下一步</a:t>
             </a:r>
           </a:p>
         </p:txBody>
@@ -5979,7 +5996,7 @@
                 </a:solidFill>
                 <a:latin typeface="Aptos"/>
               </a:rPr>
-              <a:t>Repository files used to avoid unsupported claims</a:t>
+              <a:t>Concrete server continuation</a:t>
             </a:r>
           </a:p>
         </p:txBody>
@@ -6036,7 +6053,7 @@
         <p:spPr>
           <a:xfrm>
             <a:off x="731520" y="1325880"/>
-            <a:ext cx="10698480" cy="3886200"/>
+            <a:ext cx="5120640" cy="2011680"/>
           </a:xfrm>
           <a:prstGeom prst="roundRect">
             <a:avLst/>
@@ -6081,6 +6098,658 @@
         <p:spPr>
           <a:xfrm>
             <a:off x="731520" y="1325880"/>
+            <a:ext cx="73152" cy="2011680"/>
+          </a:xfrm>
+          <a:prstGeom prst="rect">
+            <a:avLst/>
+          </a:prstGeom>
+          <a:solidFill>
+            <a:srgbClr val="426792"/>
+          </a:solidFill>
+          <a:ln>
+            <a:noFill/>
+          </a:ln>
+        </p:spPr>
+        <p:style>
+          <a:lnRef idx="1">
+            <a:schemeClr val="accent1"/>
+          </a:lnRef>
+          <a:fillRef idx="3">
+            <a:schemeClr val="accent1"/>
+          </a:fillRef>
+          <a:effectRef idx="2">
+            <a:schemeClr val="accent1"/>
+          </a:effectRef>
+          <a:fontRef idx="minor">
+            <a:schemeClr val="lt1"/>
+          </a:fontRef>
+        </p:style>
+        <p:txBody>
+          <a:bodyPr rtlCol="0" anchor="ctr"/>
+          <a:lstStyle/>
+          <a:p>
+            <a:pPr algn="ctr"/>
+          </a:p>
+        </p:txBody>
+      </p:sp>
+      <p:sp>
+        <p:nvSpPr>
+          <p:cNvPr id="7" name="TextBox 6"/>
+          <p:cNvSpPr txBox="1"/>
+          <p:nvPr/>
+        </p:nvSpPr>
+        <p:spPr>
+          <a:xfrm>
+            <a:off x="932688" y="1490472"/>
+            <a:ext cx="4736592" cy="1783080"/>
+          </a:xfrm>
+          <a:prstGeom prst="rect">
+            <a:avLst/>
+          </a:prstGeom>
+          <a:noFill/>
+        </p:spPr>
+        <p:txBody>
+          <a:bodyPr wrap="none">
+            <a:spAutoFit/>
+          </a:bodyPr>
+          <a:lstStyle/>
+          <a:p>
+            <a:r>
+              <a:rPr sz="1400" b="1">
+                <a:solidFill>
+                  <a:srgbClr val="203044"/>
+                </a:solidFill>
+                <a:latin typeface="Aptos"/>
+              </a:rPr>
+              <a:t>Short-term</a:t>
+            </a:r>
+          </a:p>
+          <a:p>
+            <a:pPr>
+              <a:spcBef>
+                <a:spcPts val="600"/>
+              </a:spcBef>
+              <a:defRPr sz="1100">
+                <a:solidFill>
+                  <a:srgbClr val="465260"/>
+                </a:solidFill>
+                <a:latin typeface="Aptos"/>
+              </a:defRPr>
+            </a:pPr>
+            <a:r>
+              <a:t>Implement oracle selector mode</a:t>
+            </a:r>
+          </a:p>
+          <a:p>
+            <a:pPr>
+              <a:spcBef>
+                <a:spcPts val="600"/>
+              </a:spcBef>
+              <a:defRPr sz="1100">
+                <a:solidFill>
+                  <a:srgbClr val="465260"/>
+                </a:solidFill>
+                <a:latin typeface="Aptos"/>
+              </a:defRPr>
+            </a:pPr>
+            <a:r>
+              <a:t>Run oracle vs LoRA on same prompts/seeds</a:t>
+            </a:r>
+          </a:p>
+          <a:p>
+            <a:pPr>
+              <a:spcBef>
+                <a:spcPts val="600"/>
+              </a:spcBef>
+              <a:defRPr sz="1100">
+                <a:solidFill>
+                  <a:srgbClr val="465260"/>
+                </a:solidFill>
+                <a:latin typeface="Aptos"/>
+              </a:defRPr>
+            </a:pPr>
+            <a:r>
+              <a:t>Summarize hit_any, mask size, reopen_changed</a:t>
+            </a:r>
+          </a:p>
+        </p:txBody>
+      </p:sp>
+      <p:sp>
+        <p:nvSpPr>
+          <p:cNvPr id="8" name="Rounded Rectangle 7"/>
+          <p:cNvSpPr/>
+          <p:nvPr/>
+        </p:nvSpPr>
+        <p:spPr>
+          <a:xfrm>
+            <a:off x="6309360" y="1325880"/>
+            <a:ext cx="5120640" cy="2011680"/>
+          </a:xfrm>
+          <a:prstGeom prst="roundRect">
+            <a:avLst/>
+          </a:prstGeom>
+          <a:solidFill>
+            <a:srgbClr val="FFFFFF"/>
+          </a:solidFill>
+          <a:ln w="10160">
+            <a:solidFill>
+              <a:srgbClr val="CDD3DB"/>
+            </a:solidFill>
+          </a:ln>
+        </p:spPr>
+        <p:style>
+          <a:lnRef idx="1">
+            <a:schemeClr val="accent1"/>
+          </a:lnRef>
+          <a:fillRef idx="3">
+            <a:schemeClr val="accent1"/>
+          </a:fillRef>
+          <a:effectRef idx="2">
+            <a:schemeClr val="accent1"/>
+          </a:effectRef>
+          <a:fontRef idx="minor">
+            <a:schemeClr val="lt1"/>
+          </a:fontRef>
+        </p:style>
+        <p:txBody>
+          <a:bodyPr rtlCol="0" anchor="ctr"/>
+          <a:lstStyle/>
+          <a:p>
+            <a:pPr algn="ctr"/>
+          </a:p>
+        </p:txBody>
+      </p:sp>
+      <p:sp>
+        <p:nvSpPr>
+          <p:cNvPr id="9" name="Rectangle 8"/>
+          <p:cNvSpPr/>
+          <p:nvPr/>
+        </p:nvSpPr>
+        <p:spPr>
+          <a:xfrm>
+            <a:off x="6309360" y="1325880"/>
+            <a:ext cx="73152" cy="2011680"/>
+          </a:xfrm>
+          <a:prstGeom prst="rect">
+            <a:avLst/>
+          </a:prstGeom>
+          <a:solidFill>
+            <a:srgbClr val="4E817C"/>
+          </a:solidFill>
+          <a:ln>
+            <a:noFill/>
+          </a:ln>
+        </p:spPr>
+        <p:style>
+          <a:lnRef idx="1">
+            <a:schemeClr val="accent1"/>
+          </a:lnRef>
+          <a:fillRef idx="3">
+            <a:schemeClr val="accent1"/>
+          </a:fillRef>
+          <a:effectRef idx="2">
+            <a:schemeClr val="accent1"/>
+          </a:effectRef>
+          <a:fontRef idx="minor">
+            <a:schemeClr val="lt1"/>
+          </a:fontRef>
+        </p:style>
+        <p:txBody>
+          <a:bodyPr rtlCol="0" anchor="ctr"/>
+          <a:lstStyle/>
+          <a:p>
+            <a:pPr algn="ctr"/>
+          </a:p>
+        </p:txBody>
+      </p:sp>
+      <p:sp>
+        <p:nvSpPr>
+          <p:cNvPr id="10" name="TextBox 9"/>
+          <p:cNvSpPr txBox="1"/>
+          <p:nvPr/>
+        </p:nvSpPr>
+        <p:spPr>
+          <a:xfrm>
+            <a:off x="6510528" y="1490472"/>
+            <a:ext cx="4736592" cy="1783080"/>
+          </a:xfrm>
+          <a:prstGeom prst="rect">
+            <a:avLst/>
+          </a:prstGeom>
+          <a:noFill/>
+        </p:spPr>
+        <p:txBody>
+          <a:bodyPr wrap="none">
+            <a:spAutoFit/>
+          </a:bodyPr>
+          <a:lstStyle/>
+          <a:p>
+            <a:r>
+              <a:rPr sz="1400" b="1">
+                <a:solidFill>
+                  <a:srgbClr val="203044"/>
+                </a:solidFill>
+                <a:latin typeface="Aptos"/>
+              </a:rPr>
+              <a:t>Image-space control</a:t>
+            </a:r>
+          </a:p>
+          <a:p>
+            <a:pPr>
+              <a:spcBef>
+                <a:spcPts val="600"/>
+              </a:spcBef>
+              <a:defRPr sz="1100">
+                <a:solidFill>
+                  <a:srgbClr val="465260"/>
+                </a:solidFill>
+                <a:latin typeface="Aptos"/>
+              </a:defRPr>
+            </a:pPr>
+            <a:r>
+              <a:t>Prototype external API evaluator on decoded corrupted images</a:t>
+            </a:r>
+          </a:p>
+          <a:p>
+            <a:pPr>
+              <a:spcBef>
+                <a:spcPts val="600"/>
+              </a:spcBef>
+              <a:defRPr sz="1100">
+                <a:solidFill>
+                  <a:srgbClr val="465260"/>
+                </a:solidFill>
+                <a:latin typeface="Aptos"/>
+              </a:defRPr>
+            </a:pPr>
+            <a:r>
+              <a:t>Keep outputs clearly labeled as teacher/API branch</a:t>
+            </a:r>
+          </a:p>
+          <a:p>
+            <a:pPr>
+              <a:spcBef>
+                <a:spcPts val="600"/>
+              </a:spcBef>
+              <a:defRPr sz="1100">
+                <a:solidFill>
+                  <a:srgbClr val="465260"/>
+                </a:solidFill>
+                <a:latin typeface="Aptos"/>
+              </a:defRPr>
+            </a:pPr>
+            <a:r>
+              <a:t>Do not mix teacher labels into Stage-3 self-supervision</a:t>
+            </a:r>
+          </a:p>
+        </p:txBody>
+      </p:sp>
+      <p:sp>
+        <p:nvSpPr>
+          <p:cNvPr id="11" name="Rounded Rectangle 10"/>
+          <p:cNvSpPr/>
+          <p:nvPr/>
+        </p:nvSpPr>
+        <p:spPr>
+          <a:xfrm>
+            <a:off x="731520" y="3794760"/>
+            <a:ext cx="10698480" cy="1325880"/>
+          </a:xfrm>
+          <a:prstGeom prst="roundRect">
+            <a:avLst/>
+          </a:prstGeom>
+          <a:solidFill>
+            <a:srgbClr val="FFFFFF"/>
+          </a:solidFill>
+          <a:ln w="10160">
+            <a:solidFill>
+              <a:srgbClr val="CDD3DB"/>
+            </a:solidFill>
+          </a:ln>
+        </p:spPr>
+        <p:style>
+          <a:lnRef idx="1">
+            <a:schemeClr val="accent1"/>
+          </a:lnRef>
+          <a:fillRef idx="3">
+            <a:schemeClr val="accent1"/>
+          </a:fillRef>
+          <a:effectRef idx="2">
+            <a:schemeClr val="accent1"/>
+          </a:effectRef>
+          <a:fontRef idx="minor">
+            <a:schemeClr val="lt1"/>
+          </a:fontRef>
+        </p:style>
+        <p:txBody>
+          <a:bodyPr rtlCol="0" anchor="ctr"/>
+          <a:lstStyle/>
+          <a:p>
+            <a:pPr algn="ctr"/>
+          </a:p>
+        </p:txBody>
+      </p:sp>
+      <p:sp>
+        <p:nvSpPr>
+          <p:cNvPr id="12" name="Rectangle 11"/>
+          <p:cNvSpPr/>
+          <p:nvPr/>
+        </p:nvSpPr>
+        <p:spPr>
+          <a:xfrm>
+            <a:off x="731520" y="3794760"/>
+            <a:ext cx="73152" cy="1325880"/>
+          </a:xfrm>
+          <a:prstGeom prst="rect">
+            <a:avLst/>
+          </a:prstGeom>
+          <a:solidFill>
+            <a:srgbClr val="9C7A3F"/>
+          </a:solidFill>
+          <a:ln>
+            <a:noFill/>
+          </a:ln>
+        </p:spPr>
+        <p:style>
+          <a:lnRef idx="1">
+            <a:schemeClr val="accent1"/>
+          </a:lnRef>
+          <a:fillRef idx="3">
+            <a:schemeClr val="accent1"/>
+          </a:fillRef>
+          <a:effectRef idx="2">
+            <a:schemeClr val="accent1"/>
+          </a:effectRef>
+          <a:fontRef idx="minor">
+            <a:schemeClr val="lt1"/>
+          </a:fontRef>
+        </p:style>
+        <p:txBody>
+          <a:bodyPr rtlCol="0" anchor="ctr"/>
+          <a:lstStyle/>
+          <a:p>
+            <a:pPr algn="ctr"/>
+          </a:p>
+        </p:txBody>
+      </p:sp>
+      <p:sp>
+        <p:nvSpPr>
+          <p:cNvPr id="13" name="TextBox 12"/>
+          <p:cNvSpPr txBox="1"/>
+          <p:nvPr/>
+        </p:nvSpPr>
+        <p:spPr>
+          <a:xfrm>
+            <a:off x="932688" y="3959352"/>
+            <a:ext cx="10314432" cy="1097280"/>
+          </a:xfrm>
+          <a:prstGeom prst="rect">
+            <a:avLst/>
+          </a:prstGeom>
+          <a:noFill/>
+        </p:spPr>
+        <p:txBody>
+          <a:bodyPr wrap="none">
+            <a:spAutoFit/>
+          </a:bodyPr>
+          <a:lstStyle/>
+          <a:p>
+            <a:r>
+              <a:rPr sz="1400" b="1">
+                <a:solidFill>
+                  <a:srgbClr val="203044"/>
+                </a:solidFill>
+                <a:latin typeface="Aptos"/>
+              </a:rPr>
+              <a:t>Training implication</a:t>
+            </a:r>
+          </a:p>
+          <a:p>
+            <a:pPr>
+              <a:spcBef>
+                <a:spcPts val="600"/>
+              </a:spcBef>
+              <a:defRPr sz="1100">
+                <a:solidFill>
+                  <a:srgbClr val="465260"/>
+                </a:solidFill>
+                <a:latin typeface="Aptos"/>
+              </a:defRPr>
+            </a:pPr>
+            <a:r>
+              <a:t>Only retrain native localizer after the oracle branch shows the reopen mechanism can produce meaningful improvements.</a:t>
+            </a:r>
+          </a:p>
+        </p:txBody>
+      </p:sp>
+      <p:sp>
+        <p:nvSpPr>
+          <p:cNvPr id="14" name="TextBox 13"/>
+          <p:cNvSpPr txBox="1"/>
+          <p:nvPr/>
+        </p:nvSpPr>
+        <p:spPr>
+          <a:xfrm>
+            <a:off x="502920" y="6446520"/>
+            <a:ext cx="10789920" cy="228600"/>
+          </a:xfrm>
+          <a:prstGeom prst="rect">
+            <a:avLst/>
+          </a:prstGeom>
+          <a:noFill/>
+        </p:spPr>
+        <p:txBody>
+          <a:bodyPr wrap="none">
+            <a:spAutoFit/>
+          </a:bodyPr>
+          <a:lstStyle/>
+          <a:p>
+            <a:pPr algn="l"/>
+            <a:r>
+              <a:rPr sz="800" b="0">
+                <a:solidFill>
+                  <a:srgbClr val="697380"/>
+                </a:solidFill>
+                <a:latin typeface="Aptos"/>
+              </a:rPr>
+              <a:t>ASCR Stage 3 weekly update | Page 13</a:t>
+            </a:r>
+          </a:p>
+        </p:txBody>
+      </p:sp>
+    </p:spTree>
+  </p:cSld>
+  <p:clrMapOvr>
+    <a:masterClrMapping/>
+  </p:clrMapOvr>
+</p:sld>
+</file>
+
+<file path=ppt/slides/slide14.xml><?xml version="1.0" encoding="utf-8"?>
+<p:sld xmlns:a="http://schemas.openxmlformats.org/drawingml/2006/main" xmlns:p="http://schemas.openxmlformats.org/presentationml/2006/main" xmlns:r="http://schemas.openxmlformats.org/officeDocument/2006/relationships">
+  <p:cSld>
+    <p:bg>
+      <p:bgPr>
+        <a:solidFill>
+          <a:srgbClr val="F7F8FA"/>
+        </a:solidFill>
+        <a:effectLst/>
+      </p:bgPr>
+    </p:bg>
+    <p:spTree>
+      <p:nvGrpSpPr>
+        <p:cNvPr id="1" name=""/>
+        <p:cNvGrpSpPr/>
+        <p:nvPr/>
+      </p:nvGrpSpPr>
+      <p:grpSpPr/>
+      <p:sp>
+        <p:nvSpPr>
+          <p:cNvPr id="2" name="TextBox 1"/>
+          <p:cNvSpPr txBox="1"/>
+          <p:nvPr/>
+        </p:nvSpPr>
+        <p:spPr>
+          <a:xfrm>
+            <a:off x="502920" y="320040"/>
+            <a:ext cx="11155680" cy="548640"/>
+          </a:xfrm>
+          <a:prstGeom prst="rect">
+            <a:avLst/>
+          </a:prstGeom>
+          <a:noFill/>
+        </p:spPr>
+        <p:txBody>
+          <a:bodyPr wrap="none">
+            <a:spAutoFit/>
+          </a:bodyPr>
+          <a:lstStyle/>
+          <a:p>
+            <a:pPr algn="l"/>
+            <a:r>
+              <a:rPr sz="2400" b="1">
+                <a:solidFill>
+                  <a:srgbClr val="203044"/>
+                </a:solidFill>
+                <a:latin typeface="Aptos"/>
+              </a:rPr>
+              <a:t>Evidence Sources / 依据文件</a:t>
+            </a:r>
+          </a:p>
+        </p:txBody>
+      </p:sp>
+      <p:sp>
+        <p:nvSpPr>
+          <p:cNvPr id="3" name="TextBox 2"/>
+          <p:cNvSpPr txBox="1"/>
+          <p:nvPr/>
+        </p:nvSpPr>
+        <p:spPr>
+          <a:xfrm>
+            <a:off x="521207" y="804672"/>
+            <a:ext cx="11064240" cy="292608"/>
+          </a:xfrm>
+          <a:prstGeom prst="rect">
+            <a:avLst/>
+          </a:prstGeom>
+          <a:noFill/>
+        </p:spPr>
+        <p:txBody>
+          <a:bodyPr wrap="none">
+            <a:spAutoFit/>
+          </a:bodyPr>
+          <a:lstStyle/>
+          <a:p>
+            <a:pPr algn="l"/>
+            <a:r>
+              <a:rPr sz="1000" b="0">
+                <a:solidFill>
+                  <a:srgbClr val="697380"/>
+                </a:solidFill>
+                <a:latin typeface="Aptos"/>
+              </a:rPr>
+              <a:t>Repository files used to avoid unsupported claims</a:t>
+            </a:r>
+          </a:p>
+        </p:txBody>
+      </p:sp>
+      <p:sp>
+        <p:nvSpPr>
+          <p:cNvPr id="4" name="Rectangle 3"/>
+          <p:cNvSpPr/>
+          <p:nvPr/>
+        </p:nvSpPr>
+        <p:spPr>
+          <a:xfrm>
+            <a:off x="502920" y="1097280"/>
+            <a:ext cx="11155680" cy="18288"/>
+          </a:xfrm>
+          <a:prstGeom prst="rect">
+            <a:avLst/>
+          </a:prstGeom>
+          <a:solidFill>
+            <a:srgbClr val="CDD3DB"/>
+          </a:solidFill>
+          <a:ln>
+            <a:noFill/>
+          </a:ln>
+        </p:spPr>
+        <p:style>
+          <a:lnRef idx="1">
+            <a:schemeClr val="accent1"/>
+          </a:lnRef>
+          <a:fillRef idx="3">
+            <a:schemeClr val="accent1"/>
+          </a:fillRef>
+          <a:effectRef idx="2">
+            <a:schemeClr val="accent1"/>
+          </a:effectRef>
+          <a:fontRef idx="minor">
+            <a:schemeClr val="lt1"/>
+          </a:fontRef>
+        </p:style>
+        <p:txBody>
+          <a:bodyPr rtlCol="0" anchor="ctr"/>
+          <a:lstStyle/>
+          <a:p>
+            <a:pPr algn="ctr"/>
+          </a:p>
+        </p:txBody>
+      </p:sp>
+      <p:sp>
+        <p:nvSpPr>
+          <p:cNvPr id="5" name="Rounded Rectangle 4"/>
+          <p:cNvSpPr/>
+          <p:nvPr/>
+        </p:nvSpPr>
+        <p:spPr>
+          <a:xfrm>
+            <a:off x="731520" y="1325880"/>
+            <a:ext cx="10698480" cy="3886200"/>
+          </a:xfrm>
+          <a:prstGeom prst="roundRect">
+            <a:avLst/>
+          </a:prstGeom>
+          <a:solidFill>
+            <a:srgbClr val="FFFFFF"/>
+          </a:solidFill>
+          <a:ln w="10160">
+            <a:solidFill>
+              <a:srgbClr val="CDD3DB"/>
+            </a:solidFill>
+          </a:ln>
+        </p:spPr>
+        <p:style>
+          <a:lnRef idx="1">
+            <a:schemeClr val="accent1"/>
+          </a:lnRef>
+          <a:fillRef idx="3">
+            <a:schemeClr val="accent1"/>
+          </a:fillRef>
+          <a:effectRef idx="2">
+            <a:schemeClr val="accent1"/>
+          </a:effectRef>
+          <a:fontRef idx="minor">
+            <a:schemeClr val="lt1"/>
+          </a:fontRef>
+        </p:style>
+        <p:txBody>
+          <a:bodyPr rtlCol="0" anchor="ctr"/>
+          <a:lstStyle/>
+          <a:p>
+            <a:pPr algn="ctr"/>
+          </a:p>
+        </p:txBody>
+      </p:sp>
+      <p:sp>
+        <p:nvSpPr>
+          <p:cNvPr id="6" name="Rectangle 5"/>
+          <p:cNvSpPr/>
+          <p:nvPr/>
+        </p:nvSpPr>
+        <p:spPr>
+          <a:xfrm>
+            <a:off x="731520" y="1325880"/>
             <a:ext cx="73152" cy="3886200"/>
           </a:xfrm>
           <a:prstGeom prst="rect">
@@ -6259,6 +6928,38 @@
               <a:t>configs/stage4/self_corrupt/mmu_sft_token_repair_8x8.yaml</a:t>
             </a:r>
           </a:p>
+          <a:p>
+            <a:pPr>
+              <a:spcBef>
+                <a:spcPts val="600"/>
+              </a:spcBef>
+              <a:defRPr sz="1100">
+                <a:solidFill>
+                  <a:srgbClr val="465260"/>
+                </a:solidFill>
+                <a:latin typeface="Aptos"/>
+              </a:defRPr>
+            </a:pPr>
+            <a:r>
+              <a:t>outputs/stage5_self_corrupt/token_repair_8x8_bench2_peftfix_1h/summary.json</a:t>
+            </a:r>
+          </a:p>
+          <a:p>
+            <a:pPr>
+              <a:spcBef>
+                <a:spcPts val="600"/>
+              </a:spcBef>
+              <a:defRPr sz="1100">
+                <a:solidFill>
+                  <a:srgbClr val="465260"/>
+                </a:solidFill>
+                <a:latin typeface="Aptos"/>
+              </a:defRPr>
+            </a:pPr>
+            <a:r>
+              <a:t>outputs/stage5_self_corrupt/token_repair_8x8_bench2_peftfix_1h/comparison/stage5_loop_comparison.json</a:t>
+            </a:r>
+          </a:p>
         </p:txBody>
       </p:sp>
       <p:sp>
@@ -6291,7 +6992,7 @@
                 </a:solidFill>
                 <a:latin typeface="Aptos"/>
               </a:rPr>
-              <a:t>ASCR Stage 3 weekly update | Page 13</a:t>
+              <a:t>ASCR Stage 3 weekly update | Page 14</a:t>
             </a:r>
           </a:p>
         </p:txBody>
@@ -7649,7 +8350,7 @@
             <a:avLst/>
           </a:prstGeom>
           <a:solidFill>
-            <a:srgbClr val="465260"/>
+            <a:srgbClr val="588760"/>
           </a:solidFill>
           <a:ln>
             <a:noFill/>
@@ -7682,7 +8383,7 @@
                 <a:latin typeface="Aptos"/>
               </a:rPr>
               <a:t>P5
-ASCR loop</a:t>
+Loop wired</a:t>
             </a:r>
           </a:p>
         </p:txBody>
@@ -8006,7 +8707,7 @@
               </a:defRPr>
             </a:pPr>
             <a:r>
-              <a:t>P4 repair_cells SFT + LoRA pipeline</a:t>
+              <a:t>P4 repair_cells LoRA is runnable</a:t>
             </a:r>
           </a:p>
           <a:p>
@@ -8022,7 +8723,7 @@
               </a:defRPr>
             </a:pPr>
             <a:r>
-              <a:t>1024px H200/L40S training profiles</a:t>
+              <a:t>Format still unstable</a:t>
             </a:r>
           </a:p>
           <a:p>
@@ -8038,7 +8739,7 @@
               </a:defRPr>
             </a:pPr>
             <a:r>
-              <a:t>Parse-rate-first evaluation</a:t>
+              <a:t>Localization quality is the blocker</a:t>
             </a:r>
           </a:p>
         </p:txBody>
@@ -8176,7 +8877,7 @@
               </a:defRPr>
             </a:pPr>
             <a:r>
-              <a:t>P5 loop integration after useful selector</a:t>
+              <a:t>P5 loop engineering verified</a:t>
             </a:r>
           </a:p>
           <a:p>
@@ -8192,7 +8893,7 @@
               </a:defRPr>
             </a:pPr>
             <a:r>
-              <a:t>Synthetic localization + image-quality evaluation</a:t>
+              <a:t>Run oracle upper bound</a:t>
             </a:r>
           </a:p>
           <a:p>
@@ -8208,7 +8909,7 @@
               </a:defRPr>
             </a:pPr>
             <a:r>
-              <a:t>No claims beyond current evidence</a:t>
+              <a:t>Compare image-space teacher loop</a:t>
             </a:r>
           </a:p>
         </p:txBody>

--- a/docs/presentations/ascr_stage3_weekly_report.pptx
+++ b/docs/presentations/ascr_stage3_weekly_report.pptx
@@ -1,26 +1,25 @@
 
 <file path=ppt/presentation.xml><?xml version="1.0" encoding="utf-8"?>
-<p:presentation xmlns:a="http://schemas.openxmlformats.org/drawingml/2006/main" xmlns:r="http://schemas.openxmlformats.org/officeDocument/2006/relationships" xmlns:p="http://schemas.openxmlformats.org/presentationml/2006/main" saveSubsetFonts="1" autoCompressPictures="0">
+<p:presentation xmlns:a="http://schemas.openxmlformats.org/drawingml/2006/main" xmlns:r="http://schemas.openxmlformats.org/officeDocument/2006/relationships" xmlns:p="http://schemas.openxmlformats.org/presentationml/2006/main" autoCompressPictures="0">
   <p:sldMasterIdLst>
     <p:sldMasterId id="2147483648" r:id="rId1"/>
   </p:sldMasterIdLst>
   <p:sldIdLst>
-    <p:sldId id="256" r:id="rId7"/>
-    <p:sldId id="257" r:id="rId8"/>
-    <p:sldId id="258" r:id="rId9"/>
-    <p:sldId id="259" r:id="rId10"/>
-    <p:sldId id="260" r:id="rId11"/>
-    <p:sldId id="261" r:id="rId12"/>
-    <p:sldId id="262" r:id="rId13"/>
-    <p:sldId id="263" r:id="rId14"/>
-    <p:sldId id="264" r:id="rId15"/>
-    <p:sldId id="265" r:id="rId16"/>
-    <p:sldId id="266" r:id="rId17"/>
-    <p:sldId id="267" r:id="rId18"/>
-    <p:sldId id="268" r:id="rId19"/>
-    <p:sldId id="269" r:id="rId20"/>
+    <p:sldId id="256" r:id="rId3"/>
+    <p:sldId id="257" r:id="rId4"/>
+    <p:sldId id="258" r:id="rId5"/>
+    <p:sldId id="259" r:id="rId6"/>
+    <p:sldId id="260" r:id="rId7"/>
+    <p:sldId id="261" r:id="rId8"/>
+    <p:sldId id="262" r:id="rId9"/>
+    <p:sldId id="263" r:id="rId10"/>
+    <p:sldId id="264" r:id="rId11"/>
+    <p:sldId id="265" r:id="rId12"/>
+    <p:sldId id="266" r:id="rId13"/>
+    <p:sldId id="267" r:id="rId14"/>
+    <p:sldId id="268" r:id="rId15"/>
   </p:sldIdLst>
-  <p:sldSz cx="12191695" cy="6858000" type="screen4x3"/>
+  <p:sldSz cx="12191365" cy="6858000" type="screen4x3"/>
   <p:notesSz cx="6858000" cy="9144000"/>
   <p:defaultTextStyle>
     <a:defPPr>
@@ -117,6 +116,22 @@
       </a:defRPr>
     </a:lvl9pPr>
   </p:defaultTextStyle>
+  <p:extLst>
+    <p:ext uri="{EFAFB233-063F-42B5-8137-9DF3F51BA10A}">
+      <p15:sldGuideLst xmlns:p15="http://schemas.microsoft.com/office/powerpoint/2012/main">
+        <p15:guide id="1" orient="horz" pos="2160" userDrawn="1">
+          <p15:clr>
+            <a:srgbClr val="A4A3A4"/>
+          </p15:clr>
+        </p15:guide>
+        <p15:guide id="2" pos="2880" userDrawn="1">
+          <p15:clr>
+            <a:srgbClr val="A4A3A4"/>
+          </p15:clr>
+        </p15:guide>
+      </p15:sldGuideLst>
+    </p:ext>
+  </p:extLst>
 </p:presentation>
 </file>
 
@@ -301,7 +316,6 @@
           <a:p>
             <a:fld id="{5BCAD085-E8A6-8845-BD4E-CB4CCA059FC4}" type="datetimeFigureOut">
               <a:rPr lang="en-US" smtClean="0"/>
-              <a:t>1/27/13</a:t>
             </a:fld>
             <a:endParaRPr lang="en-US"/>
           </a:p>
@@ -343,18 +357,12 @@
           <a:p>
             <a:fld id="{C1FF6DA9-008F-8B48-92A6-B652298478BF}" type="slidenum">
               <a:rPr lang="en-US" smtClean="0"/>
-              <a:t>‹#›</a:t>
             </a:fld>
             <a:endParaRPr lang="en-US"/>
           </a:p>
         </p:txBody>
       </p:sp>
     </p:spTree>
-    <p:extLst>
-      <p:ext uri="{BB962C8B-B14F-4D97-AF65-F5344CB8AC3E}">
-        <p14:creationId xmlns:p14="http://schemas.microsoft.com/office/powerpoint/2010/main" val="3168075583"/>
-      </p:ext>
-    </p:extLst>
   </p:cSld>
   <p:clrMapOvr>
     <a:masterClrMapping/>
@@ -422,6 +430,7 @@
               <a:rPr lang="en-US" smtClean="0"/>
               <a:t>Click to edit Master text styles</a:t>
             </a:r>
+            <a:endParaRPr lang="en-US" smtClean="0"/>
           </a:p>
           <a:p>
             <a:pPr lvl="1"/>
@@ -429,6 +438,7 @@
               <a:rPr lang="en-US" smtClean="0"/>
               <a:t>Second level</a:t>
             </a:r>
+            <a:endParaRPr lang="en-US" smtClean="0"/>
           </a:p>
           <a:p>
             <a:pPr lvl="2"/>
@@ -436,6 +446,7 @@
               <a:rPr lang="en-US" smtClean="0"/>
               <a:t>Third level</a:t>
             </a:r>
+            <a:endParaRPr lang="en-US" smtClean="0"/>
           </a:p>
           <a:p>
             <a:pPr lvl="3"/>
@@ -443,6 +454,7 @@
               <a:rPr lang="en-US" smtClean="0"/>
               <a:t>Fourth level</a:t>
             </a:r>
+            <a:endParaRPr lang="en-US" smtClean="0"/>
           </a:p>
           <a:p>
             <a:pPr lvl="4"/>
@@ -471,7 +483,6 @@
           <a:p>
             <a:fld id="{5BCAD085-E8A6-8845-BD4E-CB4CCA059FC4}" type="datetimeFigureOut">
               <a:rPr lang="en-US" smtClean="0"/>
-              <a:t>1/27/13</a:t>
             </a:fld>
             <a:endParaRPr lang="en-US"/>
           </a:p>
@@ -513,18 +524,12 @@
           <a:p>
             <a:fld id="{C1FF6DA9-008F-8B48-92A6-B652298478BF}" type="slidenum">
               <a:rPr lang="en-US" smtClean="0"/>
-              <a:t>‹#›</a:t>
             </a:fld>
             <a:endParaRPr lang="en-US"/>
           </a:p>
         </p:txBody>
       </p:sp>
     </p:spTree>
-    <p:extLst>
-      <p:ext uri="{BB962C8B-B14F-4D97-AF65-F5344CB8AC3E}">
-        <p14:creationId xmlns:p14="http://schemas.microsoft.com/office/powerpoint/2010/main" val="2910927964"/>
-      </p:ext>
-    </p:extLst>
   </p:cSld>
   <p:clrMapOvr>
     <a:masterClrMapping/>
@@ -602,6 +607,7 @@
               <a:rPr lang="en-US" smtClean="0"/>
               <a:t>Click to edit Master text styles</a:t>
             </a:r>
+            <a:endParaRPr lang="en-US" smtClean="0"/>
           </a:p>
           <a:p>
             <a:pPr lvl="1"/>
@@ -609,6 +615,7 @@
               <a:rPr lang="en-US" smtClean="0"/>
               <a:t>Second level</a:t>
             </a:r>
+            <a:endParaRPr lang="en-US" smtClean="0"/>
           </a:p>
           <a:p>
             <a:pPr lvl="2"/>
@@ -616,6 +623,7 @@
               <a:rPr lang="en-US" smtClean="0"/>
               <a:t>Third level</a:t>
             </a:r>
+            <a:endParaRPr lang="en-US" smtClean="0"/>
           </a:p>
           <a:p>
             <a:pPr lvl="3"/>
@@ -623,6 +631,7 @@
               <a:rPr lang="en-US" smtClean="0"/>
               <a:t>Fourth level</a:t>
             </a:r>
+            <a:endParaRPr lang="en-US" smtClean="0"/>
           </a:p>
           <a:p>
             <a:pPr lvl="4"/>
@@ -651,7 +660,6 @@
           <a:p>
             <a:fld id="{5BCAD085-E8A6-8845-BD4E-CB4CCA059FC4}" type="datetimeFigureOut">
               <a:rPr lang="en-US" smtClean="0"/>
-              <a:t>1/27/13</a:t>
             </a:fld>
             <a:endParaRPr lang="en-US"/>
           </a:p>
@@ -693,18 +701,12 @@
           <a:p>
             <a:fld id="{C1FF6DA9-008F-8B48-92A6-B652298478BF}" type="slidenum">
               <a:rPr lang="en-US" smtClean="0"/>
-              <a:t>‹#›</a:t>
             </a:fld>
             <a:endParaRPr lang="en-US"/>
           </a:p>
         </p:txBody>
       </p:sp>
     </p:spTree>
-    <p:extLst>
-      <p:ext uri="{BB962C8B-B14F-4D97-AF65-F5344CB8AC3E}">
-        <p14:creationId xmlns:p14="http://schemas.microsoft.com/office/powerpoint/2010/main" val="3612223792"/>
-      </p:ext>
-    </p:extLst>
   </p:cSld>
   <p:clrMapOvr>
     <a:masterClrMapping/>
@@ -772,6 +774,7 @@
               <a:rPr lang="en-US" smtClean="0"/>
               <a:t>Click to edit Master text styles</a:t>
             </a:r>
+            <a:endParaRPr lang="en-US" smtClean="0"/>
           </a:p>
           <a:p>
             <a:pPr lvl="1"/>
@@ -779,6 +782,7 @@
               <a:rPr lang="en-US" smtClean="0"/>
               <a:t>Second level</a:t>
             </a:r>
+            <a:endParaRPr lang="en-US" smtClean="0"/>
           </a:p>
           <a:p>
             <a:pPr lvl="2"/>
@@ -786,6 +790,7 @@
               <a:rPr lang="en-US" smtClean="0"/>
               <a:t>Third level</a:t>
             </a:r>
+            <a:endParaRPr lang="en-US" smtClean="0"/>
           </a:p>
           <a:p>
             <a:pPr lvl="3"/>
@@ -793,6 +798,7 @@
               <a:rPr lang="en-US" smtClean="0"/>
               <a:t>Fourth level</a:t>
             </a:r>
+            <a:endParaRPr lang="en-US" smtClean="0"/>
           </a:p>
           <a:p>
             <a:pPr lvl="4"/>
@@ -821,7 +827,6 @@
           <a:p>
             <a:fld id="{5BCAD085-E8A6-8845-BD4E-CB4CCA059FC4}" type="datetimeFigureOut">
               <a:rPr lang="en-US" smtClean="0"/>
-              <a:t>1/27/13</a:t>
             </a:fld>
             <a:endParaRPr lang="en-US"/>
           </a:p>
@@ -863,18 +868,12 @@
           <a:p>
             <a:fld id="{C1FF6DA9-008F-8B48-92A6-B652298478BF}" type="slidenum">
               <a:rPr lang="en-US" smtClean="0"/>
-              <a:t>‹#›</a:t>
             </a:fld>
             <a:endParaRPr lang="en-US"/>
           </a:p>
         </p:txBody>
       </p:sp>
     </p:spTree>
-    <p:extLst>
-      <p:ext uri="{BB962C8B-B14F-4D97-AF65-F5344CB8AC3E}">
-        <p14:creationId xmlns:p14="http://schemas.microsoft.com/office/powerpoint/2010/main" val="2614314258"/>
-      </p:ext>
-    </p:extLst>
   </p:cSld>
   <p:clrMapOvr>
     <a:masterClrMapping/>
@@ -1047,6 +1046,7 @@
               <a:rPr lang="en-US" smtClean="0"/>
               <a:t>Click to edit Master text styles</a:t>
             </a:r>
+            <a:endParaRPr lang="en-US" smtClean="0"/>
           </a:p>
         </p:txBody>
       </p:sp>
@@ -1067,7 +1067,6 @@
           <a:p>
             <a:fld id="{5BCAD085-E8A6-8845-BD4E-CB4CCA059FC4}" type="datetimeFigureOut">
               <a:rPr lang="en-US" smtClean="0"/>
-              <a:t>1/27/13</a:t>
             </a:fld>
             <a:endParaRPr lang="en-US"/>
           </a:p>
@@ -1109,18 +1108,12 @@
           <a:p>
             <a:fld id="{C1FF6DA9-008F-8B48-92A6-B652298478BF}" type="slidenum">
               <a:rPr lang="en-US" smtClean="0"/>
-              <a:t>‹#›</a:t>
             </a:fld>
             <a:endParaRPr lang="en-US"/>
           </a:p>
         </p:txBody>
       </p:sp>
     </p:spTree>
-    <p:extLst>
-      <p:ext uri="{BB962C8B-B14F-4D97-AF65-F5344CB8AC3E}">
-        <p14:creationId xmlns:p14="http://schemas.microsoft.com/office/powerpoint/2010/main" val="960648375"/>
-      </p:ext>
-    </p:extLst>
   </p:cSld>
   <p:clrMapOvr>
     <a:masterClrMapping/>
@@ -1221,6 +1214,7 @@
               <a:rPr lang="en-US" smtClean="0"/>
               <a:t>Click to edit Master text styles</a:t>
             </a:r>
+            <a:endParaRPr lang="en-US" smtClean="0"/>
           </a:p>
           <a:p>
             <a:pPr lvl="1"/>
@@ -1228,6 +1222,7 @@
               <a:rPr lang="en-US" smtClean="0"/>
               <a:t>Second level</a:t>
             </a:r>
+            <a:endParaRPr lang="en-US" smtClean="0"/>
           </a:p>
           <a:p>
             <a:pPr lvl="2"/>
@@ -1235,6 +1230,7 @@
               <a:rPr lang="en-US" smtClean="0"/>
               <a:t>Third level</a:t>
             </a:r>
+            <a:endParaRPr lang="en-US" smtClean="0"/>
           </a:p>
           <a:p>
             <a:pPr lvl="3"/>
@@ -1242,6 +1238,7 @@
               <a:rPr lang="en-US" smtClean="0"/>
               <a:t>Fourth level</a:t>
             </a:r>
+            <a:endParaRPr lang="en-US" smtClean="0"/>
           </a:p>
           <a:p>
             <a:pPr lvl="4"/>
@@ -1306,6 +1303,7 @@
               <a:rPr lang="en-US" smtClean="0"/>
               <a:t>Click to edit Master text styles</a:t>
             </a:r>
+            <a:endParaRPr lang="en-US" smtClean="0"/>
           </a:p>
           <a:p>
             <a:pPr lvl="1"/>
@@ -1313,6 +1311,7 @@
               <a:rPr lang="en-US" smtClean="0"/>
               <a:t>Second level</a:t>
             </a:r>
+            <a:endParaRPr lang="en-US" smtClean="0"/>
           </a:p>
           <a:p>
             <a:pPr lvl="2"/>
@@ -1320,6 +1319,7 @@
               <a:rPr lang="en-US" smtClean="0"/>
               <a:t>Third level</a:t>
             </a:r>
+            <a:endParaRPr lang="en-US" smtClean="0"/>
           </a:p>
           <a:p>
             <a:pPr lvl="3"/>
@@ -1327,6 +1327,7 @@
               <a:rPr lang="en-US" smtClean="0"/>
               <a:t>Fourth level</a:t>
             </a:r>
+            <a:endParaRPr lang="en-US" smtClean="0"/>
           </a:p>
           <a:p>
             <a:pPr lvl="4"/>
@@ -1355,7 +1356,6 @@
           <a:p>
             <a:fld id="{5BCAD085-E8A6-8845-BD4E-CB4CCA059FC4}" type="datetimeFigureOut">
               <a:rPr lang="en-US" smtClean="0"/>
-              <a:t>1/27/13</a:t>
             </a:fld>
             <a:endParaRPr lang="en-US"/>
           </a:p>
@@ -1397,18 +1397,12 @@
           <a:p>
             <a:fld id="{C1FF6DA9-008F-8B48-92A6-B652298478BF}" type="slidenum">
               <a:rPr lang="en-US" smtClean="0"/>
-              <a:t>‹#›</a:t>
             </a:fld>
             <a:endParaRPr lang="en-US"/>
           </a:p>
         </p:txBody>
       </p:sp>
     </p:spTree>
-    <p:extLst>
-      <p:ext uri="{BB962C8B-B14F-4D97-AF65-F5344CB8AC3E}">
-        <p14:creationId xmlns:p14="http://schemas.microsoft.com/office/powerpoint/2010/main" val="2782244947"/>
-      </p:ext>
-    </p:extLst>
   </p:cSld>
   <p:clrMapOvr>
     <a:masterClrMapping/>
@@ -1522,6 +1516,7 @@
               <a:rPr lang="en-US" smtClean="0"/>
               <a:t>Click to edit Master text styles</a:t>
             </a:r>
+            <a:endParaRPr lang="en-US" smtClean="0"/>
           </a:p>
         </p:txBody>
       </p:sp>
@@ -1578,6 +1573,7 @@
               <a:rPr lang="en-US" smtClean="0"/>
               <a:t>Click to edit Master text styles</a:t>
             </a:r>
+            <a:endParaRPr lang="en-US" smtClean="0"/>
           </a:p>
           <a:p>
             <a:pPr lvl="1"/>
@@ -1585,6 +1581,7 @@
               <a:rPr lang="en-US" smtClean="0"/>
               <a:t>Second level</a:t>
             </a:r>
+            <a:endParaRPr lang="en-US" smtClean="0"/>
           </a:p>
           <a:p>
             <a:pPr lvl="2"/>
@@ -1592,6 +1589,7 @@
               <a:rPr lang="en-US" smtClean="0"/>
               <a:t>Third level</a:t>
             </a:r>
+            <a:endParaRPr lang="en-US" smtClean="0"/>
           </a:p>
           <a:p>
             <a:pPr lvl="3"/>
@@ -1599,6 +1597,7 @@
               <a:rPr lang="en-US" smtClean="0"/>
               <a:t>Fourth level</a:t>
             </a:r>
+            <a:endParaRPr lang="en-US" smtClean="0"/>
           </a:p>
           <a:p>
             <a:pPr lvl="4"/>
@@ -1672,6 +1671,7 @@
               <a:rPr lang="en-US" smtClean="0"/>
               <a:t>Click to edit Master text styles</a:t>
             </a:r>
+            <a:endParaRPr lang="en-US" smtClean="0"/>
           </a:p>
         </p:txBody>
       </p:sp>
@@ -1728,6 +1728,7 @@
               <a:rPr lang="en-US" smtClean="0"/>
               <a:t>Click to edit Master text styles</a:t>
             </a:r>
+            <a:endParaRPr lang="en-US" smtClean="0"/>
           </a:p>
           <a:p>
             <a:pPr lvl="1"/>
@@ -1735,6 +1736,7 @@
               <a:rPr lang="en-US" smtClean="0"/>
               <a:t>Second level</a:t>
             </a:r>
+            <a:endParaRPr lang="en-US" smtClean="0"/>
           </a:p>
           <a:p>
             <a:pPr lvl="2"/>
@@ -1742,6 +1744,7 @@
               <a:rPr lang="en-US" smtClean="0"/>
               <a:t>Third level</a:t>
             </a:r>
+            <a:endParaRPr lang="en-US" smtClean="0"/>
           </a:p>
           <a:p>
             <a:pPr lvl="3"/>
@@ -1749,6 +1752,7 @@
               <a:rPr lang="en-US" smtClean="0"/>
               <a:t>Fourth level</a:t>
             </a:r>
+            <a:endParaRPr lang="en-US" smtClean="0"/>
           </a:p>
           <a:p>
             <a:pPr lvl="4"/>
@@ -1777,7 +1781,6 @@
           <a:p>
             <a:fld id="{5BCAD085-E8A6-8845-BD4E-CB4CCA059FC4}" type="datetimeFigureOut">
               <a:rPr lang="en-US" smtClean="0"/>
-              <a:t>1/27/13</a:t>
             </a:fld>
             <a:endParaRPr lang="en-US"/>
           </a:p>
@@ -1819,18 +1822,12 @@
           <a:p>
             <a:fld id="{C1FF6DA9-008F-8B48-92A6-B652298478BF}" type="slidenum">
               <a:rPr lang="en-US" smtClean="0"/>
-              <a:t>‹#›</a:t>
             </a:fld>
             <a:endParaRPr lang="en-US"/>
           </a:p>
         </p:txBody>
       </p:sp>
     </p:spTree>
-    <p:extLst>
-      <p:ext uri="{BB962C8B-B14F-4D97-AF65-F5344CB8AC3E}">
-        <p14:creationId xmlns:p14="http://schemas.microsoft.com/office/powerpoint/2010/main" val="990158736"/>
-      </p:ext>
-    </p:extLst>
   </p:cSld>
   <p:clrMapOvr>
     <a:masterClrMapping/>
@@ -1895,7 +1892,6 @@
           <a:p>
             <a:fld id="{5BCAD085-E8A6-8845-BD4E-CB4CCA059FC4}" type="datetimeFigureOut">
               <a:rPr lang="en-US" smtClean="0"/>
-              <a:t>1/27/13</a:t>
             </a:fld>
             <a:endParaRPr lang="en-US"/>
           </a:p>
@@ -1937,18 +1933,12 @@
           <a:p>
             <a:fld id="{C1FF6DA9-008F-8B48-92A6-B652298478BF}" type="slidenum">
               <a:rPr lang="en-US" smtClean="0"/>
-              <a:t>‹#›</a:t>
             </a:fld>
             <a:endParaRPr lang="en-US"/>
           </a:p>
         </p:txBody>
       </p:sp>
     </p:spTree>
-    <p:extLst>
-      <p:ext uri="{BB962C8B-B14F-4D97-AF65-F5344CB8AC3E}">
-        <p14:creationId xmlns:p14="http://schemas.microsoft.com/office/powerpoint/2010/main" val="727027711"/>
-      </p:ext>
-    </p:extLst>
   </p:cSld>
   <p:clrMapOvr>
     <a:masterClrMapping/>
@@ -1990,7 +1980,6 @@
           <a:p>
             <a:fld id="{5BCAD085-E8A6-8845-BD4E-CB4CCA059FC4}" type="datetimeFigureOut">
               <a:rPr lang="en-US" smtClean="0"/>
-              <a:t>1/27/13</a:t>
             </a:fld>
             <a:endParaRPr lang="en-US"/>
           </a:p>
@@ -2032,18 +2021,12 @@
           <a:p>
             <a:fld id="{C1FF6DA9-008F-8B48-92A6-B652298478BF}" type="slidenum">
               <a:rPr lang="en-US" smtClean="0"/>
-              <a:t>‹#›</a:t>
             </a:fld>
             <a:endParaRPr lang="en-US"/>
           </a:p>
         </p:txBody>
       </p:sp>
     </p:spTree>
-    <p:extLst>
-      <p:ext uri="{BB962C8B-B14F-4D97-AF65-F5344CB8AC3E}">
-        <p14:creationId xmlns:p14="http://schemas.microsoft.com/office/powerpoint/2010/main" val="1212999818"/>
-      </p:ext>
-    </p:extLst>
   </p:cSld>
   <p:clrMapOvr>
     <a:masterClrMapping/>
@@ -2153,6 +2136,7 @@
               <a:rPr lang="en-US" smtClean="0"/>
               <a:t>Click to edit Master text styles</a:t>
             </a:r>
+            <a:endParaRPr lang="en-US" smtClean="0"/>
           </a:p>
           <a:p>
             <a:pPr lvl="1"/>
@@ -2160,6 +2144,7 @@
               <a:rPr lang="en-US" smtClean="0"/>
               <a:t>Second level</a:t>
             </a:r>
+            <a:endParaRPr lang="en-US" smtClean="0"/>
           </a:p>
           <a:p>
             <a:pPr lvl="2"/>
@@ -2167,6 +2152,7 @@
               <a:rPr lang="en-US" smtClean="0"/>
               <a:t>Third level</a:t>
             </a:r>
+            <a:endParaRPr lang="en-US" smtClean="0"/>
           </a:p>
           <a:p>
             <a:pPr lvl="3"/>
@@ -2174,6 +2160,7 @@
               <a:rPr lang="en-US" smtClean="0"/>
               <a:t>Fourth level</a:t>
             </a:r>
+            <a:endParaRPr lang="en-US" smtClean="0"/>
           </a:p>
           <a:p>
             <a:pPr lvl="4"/>
@@ -2247,6 +2234,7 @@
               <a:rPr lang="en-US" smtClean="0"/>
               <a:t>Click to edit Master text styles</a:t>
             </a:r>
+            <a:endParaRPr lang="en-US" smtClean="0"/>
           </a:p>
         </p:txBody>
       </p:sp>
@@ -2267,7 +2255,6 @@
           <a:p>
             <a:fld id="{5BCAD085-E8A6-8845-BD4E-CB4CCA059FC4}" type="datetimeFigureOut">
               <a:rPr lang="en-US" smtClean="0"/>
-              <a:t>1/27/13</a:t>
             </a:fld>
             <a:endParaRPr lang="en-US"/>
           </a:p>
@@ -2309,18 +2296,12 @@
           <a:p>
             <a:fld id="{C1FF6DA9-008F-8B48-92A6-B652298478BF}" type="slidenum">
               <a:rPr lang="en-US" smtClean="0"/>
-              <a:t>‹#›</a:t>
             </a:fld>
             <a:endParaRPr lang="en-US"/>
           </a:p>
         </p:txBody>
       </p:sp>
     </p:spTree>
-    <p:extLst>
-      <p:ext uri="{BB962C8B-B14F-4D97-AF65-F5344CB8AC3E}">
-        <p14:creationId xmlns:p14="http://schemas.microsoft.com/office/powerpoint/2010/main" val="1840726560"/>
-      </p:ext>
-    </p:extLst>
   </p:cSld>
   <p:clrMapOvr>
     <a:masterClrMapping/>
@@ -2500,6 +2481,7 @@
               <a:rPr lang="en-US" smtClean="0"/>
               <a:t>Click to edit Master text styles</a:t>
             </a:r>
+            <a:endParaRPr lang="en-US" smtClean="0"/>
           </a:p>
         </p:txBody>
       </p:sp>
@@ -2520,7 +2502,6 @@
           <a:p>
             <a:fld id="{5BCAD085-E8A6-8845-BD4E-CB4CCA059FC4}" type="datetimeFigureOut">
               <a:rPr lang="en-US" smtClean="0"/>
-              <a:t>1/27/13</a:t>
             </a:fld>
             <a:endParaRPr lang="en-US"/>
           </a:p>
@@ -2562,18 +2543,12 @@
           <a:p>
             <a:fld id="{C1FF6DA9-008F-8B48-92A6-B652298478BF}" type="slidenum">
               <a:rPr lang="en-US" smtClean="0"/>
-              <a:t>‹#›</a:t>
             </a:fld>
             <a:endParaRPr lang="en-US"/>
           </a:p>
         </p:txBody>
       </p:sp>
     </p:spTree>
-    <p:extLst>
-      <p:ext uri="{BB962C8B-B14F-4D97-AF65-F5344CB8AC3E}">
-        <p14:creationId xmlns:p14="http://schemas.microsoft.com/office/powerpoint/2010/main" val="3889236939"/>
-      </p:ext>
-    </p:extLst>
   </p:cSld>
   <p:clrMapOvr>
     <a:masterClrMapping/>
@@ -2666,6 +2641,7 @@
               <a:rPr lang="en-US" smtClean="0"/>
               <a:t>Click to edit Master text styles</a:t>
             </a:r>
+            <a:endParaRPr lang="en-US" smtClean="0"/>
           </a:p>
           <a:p>
             <a:pPr lvl="1"/>
@@ -2673,6 +2649,7 @@
               <a:rPr lang="en-US" smtClean="0"/>
               <a:t>Second level</a:t>
             </a:r>
+            <a:endParaRPr lang="en-US" smtClean="0"/>
           </a:p>
           <a:p>
             <a:pPr lvl="2"/>
@@ -2680,6 +2657,7 @@
               <a:rPr lang="en-US" smtClean="0"/>
               <a:t>Third level</a:t>
             </a:r>
+            <a:endParaRPr lang="en-US" smtClean="0"/>
           </a:p>
           <a:p>
             <a:pPr lvl="3"/>
@@ -2687,6 +2665,7 @@
               <a:rPr lang="en-US" smtClean="0"/>
               <a:t>Fourth level</a:t>
             </a:r>
+            <a:endParaRPr lang="en-US" smtClean="0"/>
           </a:p>
           <a:p>
             <a:pPr lvl="4"/>
@@ -2733,7 +2712,6 @@
           <a:p>
             <a:fld id="{5BCAD085-E8A6-8845-BD4E-CB4CCA059FC4}" type="datetimeFigureOut">
               <a:rPr lang="en-US" smtClean="0"/>
-              <a:t>1/27/13</a:t>
             </a:fld>
             <a:endParaRPr lang="en-US"/>
           </a:p>
@@ -2811,18 +2789,12 @@
           <a:p>
             <a:fld id="{C1FF6DA9-008F-8B48-92A6-B652298478BF}" type="slidenum">
               <a:rPr lang="en-US" smtClean="0"/>
-              <a:t>‹#›</a:t>
             </a:fld>
             <a:endParaRPr lang="en-US"/>
           </a:p>
         </p:txBody>
       </p:sp>
     </p:spTree>
-    <p:extLst>
-      <p:ext uri="{BB962C8B-B14F-4D97-AF65-F5344CB8AC3E}">
-        <p14:creationId xmlns:p14="http://schemas.microsoft.com/office/powerpoint/2010/main" val="2209977519"/>
-      </p:ext>
-    </p:extLst>
   </p:cSld>
   <p:clrMap bg1="lt1" tx1="dk1" bg2="lt2" tx2="dk2" accent1="accent1" accent2="accent2" accent3="accent3" accent4="accent4" accent5="accent5" accent6="accent6" hlink="hlink" folHlink="folHlink"/>
   <p:sldLayoutIdLst>
@@ -2860,7 +2832,7 @@
         <a:spcBef>
           <a:spcPct val="20000"/>
         </a:spcBef>
-        <a:buFont typeface="Arial"/>
+        <a:buFont typeface="Arial" panose="020B0604020202020204"/>
         <a:buChar char="•"/>
         <a:defRPr sz="3200" kern="1200">
           <a:solidFill>
@@ -2875,7 +2847,7 @@
         <a:spcBef>
           <a:spcPct val="20000"/>
         </a:spcBef>
-        <a:buFont typeface="Arial"/>
+        <a:buFont typeface="Arial" panose="020B0604020202020204"/>
         <a:buChar char="–"/>
         <a:defRPr sz="2800" kern="1200">
           <a:solidFill>
@@ -2890,7 +2862,7 @@
         <a:spcBef>
           <a:spcPct val="20000"/>
         </a:spcBef>
-        <a:buFont typeface="Arial"/>
+        <a:buFont typeface="Arial" panose="020B0604020202020204"/>
         <a:buChar char="•"/>
         <a:defRPr sz="2400" kern="1200">
           <a:solidFill>
@@ -2905,7 +2877,7 @@
         <a:spcBef>
           <a:spcPct val="20000"/>
         </a:spcBef>
-        <a:buFont typeface="Arial"/>
+        <a:buFont typeface="Arial" panose="020B0604020202020204"/>
         <a:buChar char="–"/>
         <a:defRPr sz="2000" kern="1200">
           <a:solidFill>
@@ -2920,7 +2892,7 @@
         <a:spcBef>
           <a:spcPct val="20000"/>
         </a:spcBef>
-        <a:buFont typeface="Arial"/>
+        <a:buFont typeface="Arial" panose="020B0604020202020204"/>
         <a:buChar char="»"/>
         <a:defRPr sz="2000" kern="1200">
           <a:solidFill>
@@ -2935,7 +2907,7 @@
         <a:spcBef>
           <a:spcPct val="20000"/>
         </a:spcBef>
-        <a:buFont typeface="Arial"/>
+        <a:buFont typeface="Arial" panose="020B0604020202020204"/>
         <a:buChar char="•"/>
         <a:defRPr sz="2000" kern="1200">
           <a:solidFill>
@@ -2950,7 +2922,7 @@
         <a:spcBef>
           <a:spcPct val="20000"/>
         </a:spcBef>
-        <a:buFont typeface="Arial"/>
+        <a:buFont typeface="Arial" panose="020B0604020202020204"/>
         <a:buChar char="•"/>
         <a:defRPr sz="2000" kern="1200">
           <a:solidFill>
@@ -2965,7 +2937,7 @@
         <a:spcBef>
           <a:spcPct val="20000"/>
         </a:spcBef>
-        <a:buFont typeface="Arial"/>
+        <a:buFont typeface="Arial" panose="020B0604020202020204"/>
         <a:buChar char="•"/>
         <a:defRPr sz="2000" kern="1200">
           <a:solidFill>
@@ -2980,7 +2952,7 @@
         <a:spcBef>
           <a:spcPct val="20000"/>
         </a:spcBef>
-        <a:buFont typeface="Arial"/>
+        <a:buFont typeface="Arial" panose="020B0604020202020204"/>
         <a:buChar char="•"/>
         <a:defRPr sz="2000" kern="1200">
           <a:solidFill>
@@ -3092,7 +3064,7 @@
 </file>
 
 <file path=ppt/slides/slide1.xml><?xml version="1.0" encoding="utf-8"?>
-<p:sld xmlns:a="http://schemas.openxmlformats.org/drawingml/2006/main" xmlns:p="http://schemas.openxmlformats.org/presentationml/2006/main" xmlns:r="http://schemas.openxmlformats.org/officeDocument/2006/relationships">
+<p:sld xmlns:a="http://schemas.openxmlformats.org/drawingml/2006/main" xmlns:r="http://schemas.openxmlformats.org/officeDocument/2006/relationships" xmlns:p="http://schemas.openxmlformats.org/presentationml/2006/main">
   <p:cSld>
     <p:bg>
       <p:bgPr>
@@ -3141,6 +3113,12 @@
               </a:rPr>
               <a:t>PhD weekly report / 组会汇报</a:t>
             </a:r>
+            <a:endParaRPr sz="1000" b="0">
+              <a:solidFill>
+                <a:srgbClr val="697380"/>
+              </a:solidFill>
+              <a:latin typeface="Aptos"/>
+            </a:endParaRPr>
           </a:p>
         </p:txBody>
       </p:sp>
@@ -3176,6 +3154,12 @@
               </a:rPr>
               <a:t>Stage 3: Self-Corrupted Token Repair</a:t>
             </a:r>
+            <a:endParaRPr sz="3400" b="1">
+              <a:solidFill>
+                <a:srgbClr val="203044"/>
+              </a:solidFill>
+              <a:latin typeface="Aptos"/>
+            </a:endParaRPr>
           </a:p>
         </p:txBody>
       </p:sp>
@@ -3211,6 +3195,12 @@
               </a:rPr>
               <a:t>Discrete-token corruption → clean-token/image recovery → SFT pairs → Lumina repair behavior</a:t>
             </a:r>
+            <a:endParaRPr sz="1700" b="0">
+              <a:solidFill>
+                <a:srgbClr val="465260"/>
+              </a:solidFill>
+              <a:latin typeface="Aptos"/>
+            </a:endParaRPr>
           </a:p>
         </p:txBody>
       </p:sp>
@@ -3310,8 +3300,8 @@
         </p:nvSpPr>
         <p:spPr>
           <a:xfrm>
-            <a:off x="859536" y="3136392"/>
-            <a:ext cx="4828032" cy="1417320"/>
+            <a:off x="859790" y="3136265"/>
+            <a:ext cx="3977640" cy="1045210"/>
           </a:xfrm>
           <a:prstGeom prst="rect">
             <a:avLst/>
@@ -3319,7 +3309,7 @@
           <a:noFill/>
         </p:spPr>
         <p:txBody>
-          <a:bodyPr wrap="none">
+          <a:bodyPr wrap="square">
             <a:spAutoFit/>
           </a:bodyPr>
           <a:lstStyle/>
@@ -3331,8 +3321,14 @@
                 </a:solidFill>
                 <a:latin typeface="Aptos"/>
               </a:rPr>
-              <a:t>本周汇报范围</a:t>
-            </a:r>
+              <a:t>汇报范围</a:t>
+            </a:r>
+            <a:endParaRPr sz="1400" b="1">
+              <a:solidFill>
+                <a:srgbClr val="203044"/>
+              </a:solidFill>
+              <a:latin typeface="Aptos"/>
+            </a:endParaRPr>
           </a:p>
           <a:p>
             <a:pPr>
@@ -3347,7 +3343,7 @@
               </a:defRPr>
             </a:pPr>
             <a:r>
-              <a:t>Only Stage 3, Phase 0-5</a:t>
+              <a:t>Only Stage 3 </a:t>
             </a:r>
           </a:p>
           <a:p>
@@ -3363,7 +3359,7 @@
               </a:defRPr>
             </a:pPr>
             <a:r>
-              <a:t>不展开 Stage 1/2 细节</a:t>
+              <a:t>Phase 0-5</a:t>
             </a:r>
           </a:p>
           <a:p>
@@ -3378,9 +3374,6 @@
                 <a:latin typeface="Aptos"/>
               </a:defRPr>
             </a:pPr>
-            <a:r>
-              <a:t>不编造未记录实验结果</a:t>
-            </a:r>
           </a:p>
         </p:txBody>
       </p:sp>
@@ -3503,6 +3496,12 @@
               </a:rPr>
               <a:t>Core claim / 核心问题</a:t>
             </a:r>
+            <a:endParaRPr sz="1400" b="1">
+              <a:solidFill>
+                <a:srgbClr val="203044"/>
+              </a:solidFill>
+              <a:latin typeface="Aptos"/>
+            </a:endParaRPr>
           </a:p>
           <a:p>
             <a:pPr>
@@ -3570,6 +3569,12 @@
               </a:rPr>
               <a:t>ASCR Stage 3 weekly update | Page 1</a:t>
             </a:r>
+            <a:endParaRPr sz="800" b="0">
+              <a:solidFill>
+                <a:srgbClr val="697380"/>
+              </a:solidFill>
+              <a:latin typeface="Aptos"/>
+            </a:endParaRPr>
           </a:p>
         </p:txBody>
       </p:sp>
@@ -3582,7 +3587,7 @@
 </file>
 
 <file path=ppt/slides/slide10.xml><?xml version="1.0" encoding="utf-8"?>
-<p:sld xmlns:a="http://schemas.openxmlformats.org/drawingml/2006/main" xmlns:p="http://schemas.openxmlformats.org/presentationml/2006/main" xmlns:r="http://schemas.openxmlformats.org/officeDocument/2006/relationships">
+<p:sld xmlns:a="http://schemas.openxmlformats.org/drawingml/2006/main" xmlns:r="http://schemas.openxmlformats.org/officeDocument/2006/relationships" xmlns:p="http://schemas.openxmlformats.org/presentationml/2006/main">
   <p:cSld>
     <p:bg>
       <p:bgPr>
@@ -3631,6 +3636,12 @@
               </a:rPr>
               <a:t>Phase 5: ASCR Loop Integration / 闭环修复</a:t>
             </a:r>
+            <a:endParaRPr sz="2400" b="1">
+              <a:solidFill>
+                <a:srgbClr val="203044"/>
+              </a:solidFill>
+              <a:latin typeface="Aptos"/>
+            </a:endParaRPr>
           </a:p>
         </p:txBody>
       </p:sp>
@@ -3666,6 +3677,12 @@
               </a:rPr>
               <a:t>Engineering loop now runs; localizer quality is the bottleneck</a:t>
             </a:r>
+            <a:endParaRPr sz="1000" b="0">
+              <a:solidFill>
+                <a:srgbClr val="697380"/>
+              </a:solidFill>
+              <a:latin typeface="Aptos"/>
+            </a:endParaRPr>
           </a:p>
         </p:txBody>
       </p:sp>
@@ -3764,6 +3781,12 @@
               <a:t>Lumina
 baseline image</a:t>
             </a:r>
+            <a:endParaRPr sz="1200" b="1">
+              <a:solidFill>
+                <a:srgbClr val="426792"/>
+              </a:solidFill>
+              <a:latin typeface="Aptos"/>
+            </a:endParaRPr>
           </a:p>
         </p:txBody>
       </p:sp>
@@ -3854,6 +3877,12 @@
               <a:t>Predict
 repair cells</a:t>
             </a:r>
+            <a:endParaRPr sz="1200" b="1">
+              <a:solidFill>
+                <a:srgbClr val="4E817C"/>
+              </a:solidFill>
+              <a:latin typeface="Aptos"/>
+            </a:endParaRPr>
           </a:p>
         </p:txBody>
       </p:sp>
@@ -3944,6 +3973,12 @@
               <a:t>Reopen selected
 VQ tokens</a:t>
             </a:r>
+            <a:endParaRPr sz="1200" b="1">
+              <a:solidFill>
+                <a:srgbClr val="9C7A3F"/>
+              </a:solidFill>
+              <a:latin typeface="Aptos"/>
+            </a:endParaRPr>
           </a:p>
         </p:txBody>
       </p:sp>
@@ -4034,6 +4069,12 @@
               <a:t>Decode repaired
 image</a:t>
             </a:r>
+            <a:endParaRPr sz="1200" b="1">
+              <a:solidFill>
+                <a:srgbClr val="588760"/>
+              </a:solidFill>
+              <a:latin typeface="Aptos"/>
+            </a:endParaRPr>
           </a:p>
         </p:txBody>
       </p:sp>
@@ -4124,6 +4165,12 @@
               <a:t>Optional
 accept/reject</a:t>
             </a:r>
+            <a:endParaRPr sz="1200" b="1">
+              <a:solidFill>
+                <a:srgbClr val="465260"/>
+              </a:solidFill>
+              <a:latin typeface="Aptos"/>
+            </a:endParaRPr>
           </a:p>
         </p:txBody>
       </p:sp>
@@ -4246,6 +4293,12 @@
               </a:rPr>
               <a:t>New evidence</a:t>
             </a:r>
+            <a:endParaRPr sz="1400" b="1">
+              <a:solidFill>
+                <a:srgbClr val="203044"/>
+              </a:solidFill>
+              <a:latin typeface="Aptos"/>
+            </a:endParaRPr>
           </a:p>
           <a:p>
             <a:pPr>
@@ -4416,6 +4469,12 @@
               </a:rPr>
               <a:t>But localizer failed</a:t>
             </a:r>
+            <a:endParaRPr sz="1400" b="1">
+              <a:solidFill>
+                <a:srgbClr val="203044"/>
+              </a:solidFill>
+              <a:latin typeface="Aptos"/>
+            </a:endParaRPr>
           </a:p>
           <a:p>
             <a:pPr>
@@ -4499,6 +4558,12 @@
               </a:rPr>
               <a:t>ASCR Stage 3 weekly update | Page 10</a:t>
             </a:r>
+            <a:endParaRPr sz="800" b="0">
+              <a:solidFill>
+                <a:srgbClr val="697380"/>
+              </a:solidFill>
+              <a:latin typeface="Aptos"/>
+            </a:endParaRPr>
           </a:p>
         </p:txBody>
       </p:sp>
@@ -4511,7 +4576,7 @@
 </file>
 
 <file path=ppt/slides/slide11.xml><?xml version="1.0" encoding="utf-8"?>
-<p:sld xmlns:a="http://schemas.openxmlformats.org/drawingml/2006/main" xmlns:p="http://schemas.openxmlformats.org/presentationml/2006/main" xmlns:r="http://schemas.openxmlformats.org/officeDocument/2006/relationships">
+<p:sld xmlns:a="http://schemas.openxmlformats.org/drawingml/2006/main" xmlns:r="http://schemas.openxmlformats.org/officeDocument/2006/relationships" xmlns:p="http://schemas.openxmlformats.org/presentationml/2006/main">
   <p:cSld>
     <p:bg>
       <p:bgPr>
@@ -4560,6 +4625,12 @@
               </a:rPr>
               <a:t>Stage-5 Result: Working Loop, Failed Native Localizer</a:t>
             </a:r>
+            <a:endParaRPr sz="2400" b="1">
+              <a:solidFill>
+                <a:srgbClr val="203044"/>
+              </a:solidFill>
+              <a:latin typeface="Aptos"/>
+            </a:endParaRPr>
           </a:p>
         </p:txBody>
       </p:sp>
@@ -4595,6 +4666,12 @@
               </a:rPr>
               <a:t>The result is useful as a negative baseline, not as the final selector</a:t>
             </a:r>
+            <a:endParaRPr sz="1000" b="0">
+              <a:solidFill>
+                <a:srgbClr val="697380"/>
+              </a:solidFill>
+              <a:latin typeface="Aptos"/>
+            </a:endParaRPr>
           </a:p>
         </p:txBody>
       </p:sp>
@@ -4760,6 +4837,12 @@
               </a:rPr>
               <a:t>What succeeded</a:t>
             </a:r>
+            <a:endParaRPr sz="1400" b="1">
+              <a:solidFill>
+                <a:srgbClr val="203044"/>
+              </a:solidFill>
+              <a:latin typeface="Aptos"/>
+            </a:endParaRPr>
           </a:p>
           <a:p>
             <a:pPr>
@@ -4930,6 +5013,12 @@
               </a:rPr>
               <a:t>What failed</a:t>
             </a:r>
+            <a:endParaRPr sz="1400" b="1">
+              <a:solidFill>
+                <a:srgbClr val="203044"/>
+              </a:solidFill>
+              <a:latin typeface="Aptos"/>
+            </a:endParaRPr>
           </a:p>
           <a:p>
             <a:pPr>
@@ -5100,6 +5189,12 @@
               </a:rPr>
               <a:t>How to report it</a:t>
             </a:r>
+            <a:endParaRPr sz="1400" b="1">
+              <a:solidFill>
+                <a:srgbClr val="203044"/>
+              </a:solidFill>
+              <a:latin typeface="Aptos"/>
+            </a:endParaRPr>
           </a:p>
           <a:p>
             <a:pPr>
@@ -5153,14 +5248,14 @@
       </p:sp>
       <p:sp>
         <p:nvSpPr>
-          <p:cNvPr id="14" name="TextBox 13"/>
+          <p:cNvPr id="15" name="TextBox 14"/>
           <p:cNvSpPr txBox="1"/>
           <p:nvPr/>
         </p:nvSpPr>
         <p:spPr>
           <a:xfrm>
-            <a:off x="822960" y="4983480"/>
-            <a:ext cx="10607040" cy="640080"/>
+            <a:off x="502920" y="6446520"/>
+            <a:ext cx="10789920" cy="228600"/>
           </a:xfrm>
           <a:prstGeom prst="rect">
             <a:avLst/>
@@ -5173,41 +5268,6 @@
           </a:bodyPr>
           <a:lstStyle/>
           <a:p>
-            <a:pPr algn="ctr"/>
-            <a:r>
-              <a:rPr sz="1300" b="0">
-                <a:solidFill>
-                  <a:srgbClr val="203044"/>
-                </a:solidFill>
-                <a:latin typeface="Aptos"/>
-              </a:rPr>
-              <a:t>Interpretation: Stage 5 infrastructure is validated; Stage 4 native localizer is the research bottleneck.</a:t>
-            </a:r>
-          </a:p>
-        </p:txBody>
-      </p:sp>
-      <p:sp>
-        <p:nvSpPr>
-          <p:cNvPr id="15" name="TextBox 14"/>
-          <p:cNvSpPr txBox="1"/>
-          <p:nvPr/>
-        </p:nvSpPr>
-        <p:spPr>
-          <a:xfrm>
-            <a:off x="502920" y="6446520"/>
-            <a:ext cx="10789920" cy="228600"/>
-          </a:xfrm>
-          <a:prstGeom prst="rect">
-            <a:avLst/>
-          </a:prstGeom>
-          <a:noFill/>
-        </p:spPr>
-        <p:txBody>
-          <a:bodyPr wrap="none">
-            <a:spAutoFit/>
-          </a:bodyPr>
-          <a:lstStyle/>
-          <a:p>
             <a:pPr algn="l"/>
             <a:r>
               <a:rPr sz="800" b="0">
@@ -5218,6 +5278,12 @@
               </a:rPr>
               <a:t>ASCR Stage 3 weekly update | Page 11</a:t>
             </a:r>
+            <a:endParaRPr sz="800" b="0">
+              <a:solidFill>
+                <a:srgbClr val="697380"/>
+              </a:solidFill>
+              <a:latin typeface="Aptos"/>
+            </a:endParaRPr>
           </a:p>
         </p:txBody>
       </p:sp>
@@ -5230,7 +5296,7 @@
 </file>
 
 <file path=ppt/slides/slide12.xml><?xml version="1.0" encoding="utf-8"?>
-<p:sld xmlns:a="http://schemas.openxmlformats.org/drawingml/2006/main" xmlns:p="http://schemas.openxmlformats.org/presentationml/2006/main" xmlns:r="http://schemas.openxmlformats.org/officeDocument/2006/relationships">
+<p:sld xmlns:a="http://schemas.openxmlformats.org/drawingml/2006/main" xmlns:r="http://schemas.openxmlformats.org/officeDocument/2006/relationships" xmlns:p="http://schemas.openxmlformats.org/presentationml/2006/main">
   <p:cSld>
     <p:bg>
       <p:bgPr>
@@ -5279,41 +5345,12 @@
               </a:rPr>
               <a:t>Decision Point: Add Oracle + Stage-2 Image-Space Teacher</a:t>
             </a:r>
-          </a:p>
-        </p:txBody>
-      </p:sp>
-      <p:sp>
-        <p:nvSpPr>
-          <p:cNvPr id="3" name="TextBox 2"/>
-          <p:cNvSpPr txBox="1"/>
-          <p:nvPr/>
-        </p:nvSpPr>
-        <p:spPr>
-          <a:xfrm>
-            <a:off x="521207" y="804672"/>
-            <a:ext cx="11064240" cy="292608"/>
-          </a:xfrm>
-          <a:prstGeom prst="rect">
-            <a:avLst/>
-          </a:prstGeom>
-          <a:noFill/>
-        </p:spPr>
-        <p:txBody>
-          <a:bodyPr wrap="none">
-            <a:spAutoFit/>
-          </a:bodyPr>
-          <a:lstStyle/>
-          <a:p>
-            <a:pPr algn="l"/>
-            <a:r>
-              <a:rPr sz="1000" b="0">
-                <a:solidFill>
-                  <a:srgbClr val="697380"/>
-                </a:solidFill>
-                <a:latin typeface="Aptos"/>
-              </a:rPr>
-              <a:t>Do not abandon Stage 3 yet; isolate whether the bottleneck is localizer or reopen</a:t>
-            </a:r>
+            <a:endParaRPr sz="2400" b="1">
+              <a:solidFill>
+                <a:srgbClr val="203044"/>
+              </a:solidFill>
+              <a:latin typeface="Aptos"/>
+            </a:endParaRPr>
           </a:p>
         </p:txBody>
       </p:sp>
@@ -5479,6 +5516,12 @@
               </a:rPr>
               <a:t>Oracle upper bound</a:t>
             </a:r>
+            <a:endParaRPr sz="1400" b="1">
+              <a:solidFill>
+                <a:srgbClr val="203044"/>
+              </a:solidFill>
+              <a:latin typeface="Aptos"/>
+            </a:endParaRPr>
           </a:p>
           <a:p>
             <a:pPr>
@@ -5665,6 +5708,12 @@
               </a:rPr>
               <a:t>Stage-2 style branch</a:t>
             </a:r>
+            <a:endParaRPr sz="1400" b="1">
+              <a:solidFill>
+                <a:srgbClr val="203044"/>
+              </a:solidFill>
+              <a:latin typeface="Aptos"/>
+            </a:endParaRPr>
           </a:p>
           <a:p>
             <a:pPr>
@@ -5734,102 +5783,14 @@
       </p:sp>
       <p:sp>
         <p:nvSpPr>
-          <p:cNvPr id="11" name="Rounded Rectangle 10"/>
-          <p:cNvSpPr/>
-          <p:nvPr/>
-        </p:nvSpPr>
-        <p:spPr>
-          <a:xfrm>
-            <a:off x="731520" y="4069080"/>
-            <a:ext cx="10698480" cy="1051560"/>
-          </a:xfrm>
-          <a:prstGeom prst="roundRect">
-            <a:avLst/>
-          </a:prstGeom>
-          <a:solidFill>
-            <a:srgbClr val="FFFFFF"/>
-          </a:solidFill>
-          <a:ln w="10160">
-            <a:solidFill>
-              <a:srgbClr val="CDD3DB"/>
-            </a:solidFill>
-          </a:ln>
-        </p:spPr>
-        <p:style>
-          <a:lnRef idx="1">
-            <a:schemeClr val="accent1"/>
-          </a:lnRef>
-          <a:fillRef idx="3">
-            <a:schemeClr val="accent1"/>
-          </a:fillRef>
-          <a:effectRef idx="2">
-            <a:schemeClr val="accent1"/>
-          </a:effectRef>
-          <a:fontRef idx="minor">
-            <a:schemeClr val="lt1"/>
-          </a:fontRef>
-        </p:style>
-        <p:txBody>
-          <a:bodyPr rtlCol="0" anchor="ctr"/>
-          <a:lstStyle/>
-          <a:p>
-            <a:pPr algn="ctr"/>
-          </a:p>
-        </p:txBody>
-      </p:sp>
-      <p:sp>
-        <p:nvSpPr>
-          <p:cNvPr id="12" name="Rectangle 11"/>
-          <p:cNvSpPr/>
-          <p:nvPr/>
-        </p:nvSpPr>
-        <p:spPr>
-          <a:xfrm>
-            <a:off x="731520" y="4069080"/>
-            <a:ext cx="73152" cy="1051560"/>
-          </a:xfrm>
-          <a:prstGeom prst="rect">
-            <a:avLst/>
-          </a:prstGeom>
-          <a:solidFill>
-            <a:srgbClr val="9C7A3F"/>
-          </a:solidFill>
-          <a:ln>
-            <a:noFill/>
-          </a:ln>
-        </p:spPr>
-        <p:style>
-          <a:lnRef idx="1">
-            <a:schemeClr val="accent1"/>
-          </a:lnRef>
-          <a:fillRef idx="3">
-            <a:schemeClr val="accent1"/>
-          </a:fillRef>
-          <a:effectRef idx="2">
-            <a:schemeClr val="accent1"/>
-          </a:effectRef>
-          <a:fontRef idx="minor">
-            <a:schemeClr val="lt1"/>
-          </a:fontRef>
-        </p:style>
-        <p:txBody>
-          <a:bodyPr rtlCol="0" anchor="ctr"/>
-          <a:lstStyle/>
-          <a:p>
-            <a:pPr algn="ctr"/>
-          </a:p>
-        </p:txBody>
-      </p:sp>
-      <p:sp>
-        <p:nvSpPr>
-          <p:cNvPr id="13" name="TextBox 12"/>
+          <p:cNvPr id="14" name="TextBox 13"/>
           <p:cNvSpPr txBox="1"/>
           <p:nvPr/>
         </p:nvSpPr>
         <p:spPr>
           <a:xfrm>
-            <a:off x="932688" y="4233672"/>
-            <a:ext cx="10314432" cy="822960"/>
+            <a:off x="502920" y="6446520"/>
+            <a:ext cx="10789920" cy="228600"/>
           </a:xfrm>
           <a:prstGeom prst="rect">
             <a:avLst/>
@@ -5842,56 +5803,6 @@
           </a:bodyPr>
           <a:lstStyle/>
           <a:p>
-            <a:r>
-              <a:rPr sz="1400" b="1">
-                <a:solidFill>
-                  <a:srgbClr val="203044"/>
-                </a:solidFill>
-                <a:latin typeface="Aptos"/>
-              </a:rPr>
-              <a:t>Recommendation</a:t>
-            </a:r>
-          </a:p>
-          <a:p>
-            <a:pPr>
-              <a:spcBef>
-                <a:spcPts val="600"/>
-              </a:spcBef>
-              <a:defRPr sz="1100">
-                <a:solidFill>
-                  <a:srgbClr val="465260"/>
-                </a:solidFill>
-                <a:latin typeface="Aptos"/>
-              </a:defRPr>
-            </a:pPr>
-            <a:r>
-              <a:t>Keep token-repair Stage 3 as main experimental scaffold, but add image-space external-teacher loop as an upper-bound/control path before more native-localizer training.</a:t>
-            </a:r>
-          </a:p>
-        </p:txBody>
-      </p:sp>
-      <p:sp>
-        <p:nvSpPr>
-          <p:cNvPr id="14" name="TextBox 13"/>
-          <p:cNvSpPr txBox="1"/>
-          <p:nvPr/>
-        </p:nvSpPr>
-        <p:spPr>
-          <a:xfrm>
-            <a:off x="502920" y="6446520"/>
-            <a:ext cx="10789920" cy="228600"/>
-          </a:xfrm>
-          <a:prstGeom prst="rect">
-            <a:avLst/>
-          </a:prstGeom>
-          <a:noFill/>
-        </p:spPr>
-        <p:txBody>
-          <a:bodyPr wrap="none">
-            <a:spAutoFit/>
-          </a:bodyPr>
-          <a:lstStyle/>
-          <a:p>
             <a:pPr algn="l"/>
             <a:r>
               <a:rPr sz="800" b="0">
@@ -5902,6 +5813,12 @@
               </a:rPr>
               <a:t>ASCR Stage 3 weekly update | Page 12</a:t>
             </a:r>
+            <a:endParaRPr sz="800" b="0">
+              <a:solidFill>
+                <a:srgbClr val="697380"/>
+              </a:solidFill>
+              <a:latin typeface="Aptos"/>
+            </a:endParaRPr>
           </a:p>
         </p:txBody>
       </p:sp>
@@ -5914,7 +5831,7 @@
 </file>
 
 <file path=ppt/slides/slide13.xml><?xml version="1.0" encoding="utf-8"?>
-<p:sld xmlns:a="http://schemas.openxmlformats.org/drawingml/2006/main" xmlns:p="http://schemas.openxmlformats.org/presentationml/2006/main" xmlns:r="http://schemas.openxmlformats.org/officeDocument/2006/relationships">
+<p:sld xmlns:a="http://schemas.openxmlformats.org/drawingml/2006/main" xmlns:r="http://schemas.openxmlformats.org/officeDocument/2006/relationships" xmlns:p="http://schemas.openxmlformats.org/presentationml/2006/main">
   <p:cSld>
     <p:bg>
       <p:bgPr>
@@ -5963,41 +5880,12 @@
               </a:rPr>
               <a:t>Next Actions / 下一步</a:t>
             </a:r>
-          </a:p>
-        </p:txBody>
-      </p:sp>
-      <p:sp>
-        <p:nvSpPr>
-          <p:cNvPr id="3" name="TextBox 2"/>
-          <p:cNvSpPr txBox="1"/>
-          <p:nvPr/>
-        </p:nvSpPr>
-        <p:spPr>
-          <a:xfrm>
-            <a:off x="521207" y="804672"/>
-            <a:ext cx="11064240" cy="292608"/>
-          </a:xfrm>
-          <a:prstGeom prst="rect">
-            <a:avLst/>
-          </a:prstGeom>
-          <a:noFill/>
-        </p:spPr>
-        <p:txBody>
-          <a:bodyPr wrap="none">
-            <a:spAutoFit/>
-          </a:bodyPr>
-          <a:lstStyle/>
-          <a:p>
-            <a:pPr algn="l"/>
-            <a:r>
-              <a:rPr sz="1000" b="0">
-                <a:solidFill>
-                  <a:srgbClr val="697380"/>
-                </a:solidFill>
-                <a:latin typeface="Aptos"/>
-              </a:rPr>
-              <a:t>Concrete server continuation</a:t>
-            </a:r>
+            <a:endParaRPr sz="2400" b="1">
+              <a:solidFill>
+                <a:srgbClr val="203044"/>
+              </a:solidFill>
+              <a:latin typeface="Aptos"/>
+            </a:endParaRPr>
           </a:p>
         </p:txBody>
       </p:sp>
@@ -6163,6 +6051,12 @@
               </a:rPr>
               <a:t>Short-term</a:t>
             </a:r>
+            <a:endParaRPr sz="1400" b="1">
+              <a:solidFill>
+                <a:srgbClr val="203044"/>
+              </a:solidFill>
+              <a:latin typeface="Aptos"/>
+            </a:endParaRPr>
           </a:p>
           <a:p>
             <a:pPr>
@@ -6333,6 +6227,12 @@
               </a:rPr>
               <a:t>Image-space control</a:t>
             </a:r>
+            <a:endParaRPr sz="1400" b="1">
+              <a:solidFill>
+                <a:srgbClr val="203044"/>
+              </a:solidFill>
+              <a:latin typeface="Aptos"/>
+            </a:endParaRPr>
           </a:p>
           <a:p>
             <a:pPr>
@@ -6503,6 +6403,12 @@
               </a:rPr>
               <a:t>Training implication</a:t>
             </a:r>
+            <a:endParaRPr sz="1400" b="1">
+              <a:solidFill>
+                <a:srgbClr val="203044"/>
+              </a:solidFill>
+              <a:latin typeface="Aptos"/>
+            </a:endParaRPr>
           </a:p>
           <a:p>
             <a:pPr>
@@ -6554,6 +6460,12 @@
               </a:rPr>
               <a:t>ASCR Stage 3 weekly update | Page 13</a:t>
             </a:r>
+            <a:endParaRPr sz="800" b="0">
+              <a:solidFill>
+                <a:srgbClr val="697380"/>
+              </a:solidFill>
+              <a:latin typeface="Aptos"/>
+            </a:endParaRPr>
           </a:p>
         </p:txBody>
       </p:sp>
@@ -6565,8 +6477,8 @@
 </p:sld>
 </file>
 
-<file path=ppt/slides/slide14.xml><?xml version="1.0" encoding="utf-8"?>
-<p:sld xmlns:a="http://schemas.openxmlformats.org/drawingml/2006/main" xmlns:p="http://schemas.openxmlformats.org/presentationml/2006/main" xmlns:r="http://schemas.openxmlformats.org/officeDocument/2006/relationships">
+<file path=ppt/slides/slide2.xml><?xml version="1.0" encoding="utf-8"?>
+<p:sld xmlns:a="http://schemas.openxmlformats.org/drawingml/2006/main" xmlns:r="http://schemas.openxmlformats.org/officeDocument/2006/relationships" xmlns:p="http://schemas.openxmlformats.org/presentationml/2006/main">
   <p:cSld>
     <p:bg>
       <p:bgPr>
@@ -6613,8 +6525,14 @@
                 </a:solidFill>
                 <a:latin typeface="Aptos"/>
               </a:rPr>
-              <a:t>Evidence Sources / 依据文件</a:t>
-            </a:r>
+              <a:t>Stage 3 Objective / 目标</a:t>
+            </a:r>
+            <a:endParaRPr sz="2400" b="1">
+              <a:solidFill>
+                <a:srgbClr val="203044"/>
+              </a:solidFill>
+              <a:latin typeface="Aptos"/>
+            </a:endParaRPr>
           </a:p>
         </p:txBody>
       </p:sp>
@@ -6648,8 +6566,14 @@
                 </a:solidFill>
                 <a:latin typeface="Aptos"/>
               </a:rPr>
-              <a:t>Repository files used to avoid unsupported claims</a:t>
-            </a:r>
+              <a:t>From controlled token corruption to supervised repair behavior</a:t>
+            </a:r>
+            <a:endParaRPr sz="1000" b="0">
+              <a:solidFill>
+                <a:srgbClr val="697380"/>
+              </a:solidFill>
+              <a:latin typeface="Aptos"/>
+            </a:endParaRPr>
           </a:p>
         </p:txBody>
       </p:sp>
@@ -6704,8 +6628,453 @@
         </p:nvSpPr>
         <p:spPr>
           <a:xfrm>
-            <a:off x="731520" y="1325880"/>
-            <a:ext cx="10698480" cy="3886200"/>
+            <a:off x="685800" y="2011680"/>
+            <a:ext cx="1691640" cy="749808"/>
+          </a:xfrm>
+          <a:prstGeom prst="roundRect">
+            <a:avLst/>
+          </a:prstGeom>
+          <a:solidFill>
+            <a:srgbClr val="FFFFFF"/>
+          </a:solidFill>
+          <a:ln w="11430">
+            <a:solidFill>
+              <a:srgbClr val="CDD3DB"/>
+            </a:solidFill>
+          </a:ln>
+        </p:spPr>
+        <p:style>
+          <a:lnRef idx="1">
+            <a:schemeClr val="accent1"/>
+          </a:lnRef>
+          <a:fillRef idx="3">
+            <a:schemeClr val="accent1"/>
+          </a:fillRef>
+          <a:effectRef idx="2">
+            <a:schemeClr val="accent1"/>
+          </a:effectRef>
+          <a:fontRef idx="minor">
+            <a:schemeClr val="lt1"/>
+          </a:fontRef>
+        </p:style>
+        <p:txBody>
+          <a:bodyPr rtlCol="0" anchor="ctr"/>
+          <a:lstStyle/>
+          <a:p>
+            <a:pPr algn="ctr"/>
+            <a:r>
+              <a:rPr sz="1200" b="1">
+                <a:solidFill>
+                  <a:srgbClr val="426792"/>
+                </a:solidFill>
+                <a:latin typeface="Aptos"/>
+              </a:rPr>
+              <a:t>Clean 64×64
+VQ tokens</a:t>
+            </a:r>
+            <a:endParaRPr sz="1200" b="1">
+              <a:solidFill>
+                <a:srgbClr val="426792"/>
+              </a:solidFill>
+              <a:latin typeface="Aptos"/>
+            </a:endParaRPr>
+          </a:p>
+        </p:txBody>
+      </p:sp>
+      <p:cxnSp>
+        <p:nvCxnSpPr>
+          <p:cNvPr id="6" name="Connector 5"/>
+          <p:cNvCxnSpPr/>
+          <p:nvPr/>
+        </p:nvCxnSpPr>
+        <p:spPr>
+          <a:xfrm>
+            <a:off x="2377440" y="2386584"/>
+            <a:ext cx="457200" cy="0"/>
+          </a:xfrm>
+          <a:prstGeom prst="line">
+            <a:avLst/>
+          </a:prstGeom>
+          <a:ln w="20320">
+            <a:solidFill>
+              <a:srgbClr val="465260"/>
+            </a:solidFill>
+          </a:ln>
+        </p:spPr>
+        <p:style>
+          <a:lnRef idx="2">
+            <a:schemeClr val="accent1"/>
+          </a:lnRef>
+          <a:fillRef idx="0">
+            <a:schemeClr val="accent1"/>
+          </a:fillRef>
+          <a:effectRef idx="1">
+            <a:schemeClr val="accent1"/>
+          </a:effectRef>
+          <a:fontRef idx="minor">
+            <a:schemeClr val="tx1"/>
+          </a:fontRef>
+        </p:style>
+      </p:cxnSp>
+      <p:sp>
+        <p:nvSpPr>
+          <p:cNvPr id="7" name="Rounded Rectangle 6"/>
+          <p:cNvSpPr/>
+          <p:nvPr/>
+        </p:nvSpPr>
+        <p:spPr>
+          <a:xfrm>
+            <a:off x="2926080" y="2011680"/>
+            <a:ext cx="1691640" cy="749808"/>
+          </a:xfrm>
+          <a:prstGeom prst="roundRect">
+            <a:avLst/>
+          </a:prstGeom>
+          <a:solidFill>
+            <a:srgbClr val="FFFFFF"/>
+          </a:solidFill>
+          <a:ln w="11430">
+            <a:solidFill>
+              <a:srgbClr val="CDD3DB"/>
+            </a:solidFill>
+          </a:ln>
+        </p:spPr>
+        <p:style>
+          <a:lnRef idx="1">
+            <a:schemeClr val="accent1"/>
+          </a:lnRef>
+          <a:fillRef idx="3">
+            <a:schemeClr val="accent1"/>
+          </a:fillRef>
+          <a:effectRef idx="2">
+            <a:schemeClr val="accent1"/>
+          </a:effectRef>
+          <a:fontRef idx="minor">
+            <a:schemeClr val="lt1"/>
+          </a:fontRef>
+        </p:style>
+        <p:txBody>
+          <a:bodyPr rtlCol="0" anchor="ctr"/>
+          <a:lstStyle/>
+          <a:p>
+            <a:pPr algn="ctr"/>
+            <a:r>
+              <a:rPr sz="1200" b="1">
+                <a:solidFill>
+                  <a:srgbClr val="9C7A3F"/>
+                </a:solidFill>
+                <a:latin typeface="Aptos"/>
+              </a:rPr>
+              <a:t>Controlled
+corruption</a:t>
+            </a:r>
+            <a:endParaRPr sz="1200" b="1">
+              <a:solidFill>
+                <a:srgbClr val="9C7A3F"/>
+              </a:solidFill>
+              <a:latin typeface="Aptos"/>
+            </a:endParaRPr>
+          </a:p>
+        </p:txBody>
+      </p:sp>
+      <p:cxnSp>
+        <p:nvCxnSpPr>
+          <p:cNvPr id="8" name="Connector 7"/>
+          <p:cNvCxnSpPr/>
+          <p:nvPr/>
+        </p:nvCxnSpPr>
+        <p:spPr>
+          <a:xfrm>
+            <a:off x="4617720" y="2386584"/>
+            <a:ext cx="457200" cy="0"/>
+          </a:xfrm>
+          <a:prstGeom prst="line">
+            <a:avLst/>
+          </a:prstGeom>
+          <a:ln w="20320">
+            <a:solidFill>
+              <a:srgbClr val="465260"/>
+            </a:solidFill>
+          </a:ln>
+        </p:spPr>
+        <p:style>
+          <a:lnRef idx="2">
+            <a:schemeClr val="accent1"/>
+          </a:lnRef>
+          <a:fillRef idx="0">
+            <a:schemeClr val="accent1"/>
+          </a:fillRef>
+          <a:effectRef idx="1">
+            <a:schemeClr val="accent1"/>
+          </a:effectRef>
+          <a:fontRef idx="minor">
+            <a:schemeClr val="tx1"/>
+          </a:fontRef>
+        </p:style>
+      </p:cxnSp>
+      <p:sp>
+        <p:nvSpPr>
+          <p:cNvPr id="9" name="Rounded Rectangle 8"/>
+          <p:cNvSpPr/>
+          <p:nvPr/>
+        </p:nvSpPr>
+        <p:spPr>
+          <a:xfrm>
+            <a:off x="5166360" y="2011680"/>
+            <a:ext cx="1691640" cy="749808"/>
+          </a:xfrm>
+          <a:prstGeom prst="roundRect">
+            <a:avLst/>
+          </a:prstGeom>
+          <a:solidFill>
+            <a:srgbClr val="FFFFFF"/>
+          </a:solidFill>
+          <a:ln w="11430">
+            <a:solidFill>
+              <a:srgbClr val="CDD3DB"/>
+            </a:solidFill>
+          </a:ln>
+        </p:spPr>
+        <p:style>
+          <a:lnRef idx="1">
+            <a:schemeClr val="accent1"/>
+          </a:lnRef>
+          <a:fillRef idx="3">
+            <a:schemeClr val="accent1"/>
+          </a:fillRef>
+          <a:effectRef idx="2">
+            <a:schemeClr val="accent1"/>
+          </a:effectRef>
+          <a:fontRef idx="minor">
+            <a:schemeClr val="lt1"/>
+          </a:fontRef>
+        </p:style>
+        <p:txBody>
+          <a:bodyPr rtlCol="0" anchor="ctr"/>
+          <a:lstStyle/>
+          <a:p>
+            <a:pPr algn="ctr"/>
+            <a:r>
+              <a:rPr sz="1200" b="1">
+                <a:solidFill>
+                  <a:srgbClr val="9E5B5B"/>
+                </a:solidFill>
+                <a:latin typeface="Aptos"/>
+              </a:rPr>
+              <a:t>Corrupted
+VQ tokens</a:t>
+            </a:r>
+            <a:endParaRPr sz="1200" b="1">
+              <a:solidFill>
+                <a:srgbClr val="9E5B5B"/>
+              </a:solidFill>
+              <a:latin typeface="Aptos"/>
+            </a:endParaRPr>
+          </a:p>
+        </p:txBody>
+      </p:sp>
+      <p:cxnSp>
+        <p:nvCxnSpPr>
+          <p:cNvPr id="10" name="Connector 9"/>
+          <p:cNvCxnSpPr/>
+          <p:nvPr/>
+        </p:nvCxnSpPr>
+        <p:spPr>
+          <a:xfrm>
+            <a:off x="6858000" y="2386584"/>
+            <a:ext cx="457200" cy="0"/>
+          </a:xfrm>
+          <a:prstGeom prst="line">
+            <a:avLst/>
+          </a:prstGeom>
+          <a:ln w="20320">
+            <a:solidFill>
+              <a:srgbClr val="465260"/>
+            </a:solidFill>
+          </a:ln>
+        </p:spPr>
+        <p:style>
+          <a:lnRef idx="2">
+            <a:schemeClr val="accent1"/>
+          </a:lnRef>
+          <a:fillRef idx="0">
+            <a:schemeClr val="accent1"/>
+          </a:fillRef>
+          <a:effectRef idx="1">
+            <a:schemeClr val="accent1"/>
+          </a:effectRef>
+          <a:fontRef idx="minor">
+            <a:schemeClr val="tx1"/>
+          </a:fontRef>
+        </p:style>
+      </p:cxnSp>
+      <p:sp>
+        <p:nvSpPr>
+          <p:cNvPr id="11" name="Rounded Rectangle 10"/>
+          <p:cNvSpPr/>
+          <p:nvPr/>
+        </p:nvSpPr>
+        <p:spPr>
+          <a:xfrm>
+            <a:off x="7406640" y="2011680"/>
+            <a:ext cx="1691640" cy="749808"/>
+          </a:xfrm>
+          <a:prstGeom prst="roundRect">
+            <a:avLst/>
+          </a:prstGeom>
+          <a:solidFill>
+            <a:srgbClr val="FFFFFF"/>
+          </a:solidFill>
+          <a:ln w="11430">
+            <a:solidFill>
+              <a:srgbClr val="CDD3DB"/>
+            </a:solidFill>
+          </a:ln>
+        </p:spPr>
+        <p:style>
+          <a:lnRef idx="1">
+            <a:schemeClr val="accent1"/>
+          </a:lnRef>
+          <a:fillRef idx="3">
+            <a:schemeClr val="accent1"/>
+          </a:fillRef>
+          <a:effectRef idx="2">
+            <a:schemeClr val="accent1"/>
+          </a:effectRef>
+          <a:fontRef idx="minor">
+            <a:schemeClr val="lt1"/>
+          </a:fontRef>
+        </p:style>
+        <p:txBody>
+          <a:bodyPr rtlCol="0" anchor="ctr"/>
+          <a:lstStyle/>
+          <a:p>
+            <a:pPr algn="ctr"/>
+            <a:r>
+              <a:rPr sz="1200" b="1">
+                <a:solidFill>
+                  <a:srgbClr val="4E817C"/>
+                </a:solidFill>
+                <a:latin typeface="Aptos"/>
+              </a:rPr>
+              <a:t>Known mask →
+8×8 cells</a:t>
+            </a:r>
+            <a:endParaRPr sz="1200" b="1">
+              <a:solidFill>
+                <a:srgbClr val="4E817C"/>
+              </a:solidFill>
+              <a:latin typeface="Aptos"/>
+            </a:endParaRPr>
+          </a:p>
+        </p:txBody>
+      </p:sp>
+      <p:cxnSp>
+        <p:nvCxnSpPr>
+          <p:cNvPr id="12" name="Connector 11"/>
+          <p:cNvCxnSpPr/>
+          <p:nvPr/>
+        </p:nvCxnSpPr>
+        <p:spPr>
+          <a:xfrm>
+            <a:off x="9098280" y="2386584"/>
+            <a:ext cx="457200" cy="0"/>
+          </a:xfrm>
+          <a:prstGeom prst="line">
+            <a:avLst/>
+          </a:prstGeom>
+          <a:ln w="20320">
+            <a:solidFill>
+              <a:srgbClr val="465260"/>
+            </a:solidFill>
+          </a:ln>
+        </p:spPr>
+        <p:style>
+          <a:lnRef idx="2">
+            <a:schemeClr val="accent1"/>
+          </a:lnRef>
+          <a:fillRef idx="0">
+            <a:schemeClr val="accent1"/>
+          </a:fillRef>
+          <a:effectRef idx="1">
+            <a:schemeClr val="accent1"/>
+          </a:effectRef>
+          <a:fontRef idx="minor">
+            <a:schemeClr val="tx1"/>
+          </a:fontRef>
+        </p:style>
+      </p:cxnSp>
+      <p:sp>
+        <p:nvSpPr>
+          <p:cNvPr id="13" name="Rounded Rectangle 12"/>
+          <p:cNvSpPr/>
+          <p:nvPr/>
+        </p:nvSpPr>
+        <p:spPr>
+          <a:xfrm>
+            <a:off x="9646920" y="2011680"/>
+            <a:ext cx="1691640" cy="749808"/>
+          </a:xfrm>
+          <a:prstGeom prst="roundRect">
+            <a:avLst/>
+          </a:prstGeom>
+          <a:solidFill>
+            <a:srgbClr val="FFFFFF"/>
+          </a:solidFill>
+          <a:ln w="11430">
+            <a:solidFill>
+              <a:srgbClr val="CDD3DB"/>
+            </a:solidFill>
+          </a:ln>
+        </p:spPr>
+        <p:style>
+          <a:lnRef idx="1">
+            <a:schemeClr val="accent1"/>
+          </a:lnRef>
+          <a:fillRef idx="3">
+            <a:schemeClr val="accent1"/>
+          </a:fillRef>
+          <a:effectRef idx="2">
+            <a:schemeClr val="accent1"/>
+          </a:effectRef>
+          <a:fontRef idx="minor">
+            <a:schemeClr val="lt1"/>
+          </a:fontRef>
+        </p:style>
+        <p:txBody>
+          <a:bodyPr rtlCol="0" anchor="ctr"/>
+          <a:lstStyle/>
+          <a:p>
+            <a:pPr algn="ctr"/>
+            <a:r>
+              <a:rPr sz="1200" b="1">
+                <a:solidFill>
+                  <a:srgbClr val="588760"/>
+                </a:solidFill>
+                <a:latin typeface="Aptos"/>
+              </a:rPr>
+              <a:t>SFT target
+{"cells": [...]}</a:t>
+            </a:r>
+            <a:endParaRPr sz="1200" b="1">
+              <a:solidFill>
+                <a:srgbClr val="588760"/>
+              </a:solidFill>
+              <a:latin typeface="Aptos"/>
+            </a:endParaRPr>
+          </a:p>
+        </p:txBody>
+      </p:sp>
+      <p:sp>
+        <p:nvSpPr>
+          <p:cNvPr id="14" name="Rounded Rectangle 13"/>
+          <p:cNvSpPr/>
+          <p:nvPr/>
+        </p:nvSpPr>
+        <p:spPr>
+          <a:xfrm>
+            <a:off x="777240" y="3749039"/>
+            <a:ext cx="10607040" cy="1325880"/>
           </a:xfrm>
           <a:prstGeom prst="roundRect">
             <a:avLst/>
@@ -6743,20 +7112,20 @@
       </p:sp>
       <p:sp>
         <p:nvSpPr>
-          <p:cNvPr id="6" name="Rectangle 5"/>
+          <p:cNvPr id="15" name="Rectangle 14"/>
           <p:cNvSpPr/>
           <p:nvPr/>
         </p:nvSpPr>
         <p:spPr>
           <a:xfrm>
-            <a:off x="731520" y="1325880"/>
-            <a:ext cx="73152" cy="3886200"/>
+            <a:off x="777240" y="3749039"/>
+            <a:ext cx="73152" cy="1325880"/>
           </a:xfrm>
           <a:prstGeom prst="rect">
             <a:avLst/>
           </a:prstGeom>
           <a:solidFill>
-            <a:srgbClr val="465260"/>
+            <a:srgbClr val="426792"/>
           </a:solidFill>
           <a:ln>
             <a:noFill/>
@@ -6786,14 +7155,14 @@
       </p:sp>
       <p:sp>
         <p:nvSpPr>
-          <p:cNvPr id="7" name="TextBox 6"/>
+          <p:cNvPr id="16" name="TextBox 15"/>
           <p:cNvSpPr txBox="1"/>
           <p:nvPr/>
         </p:nvSpPr>
         <p:spPr>
           <a:xfrm>
-            <a:off x="932688" y="1490472"/>
-            <a:ext cx="10314432" cy="3657600"/>
+            <a:off x="978408" y="3913631"/>
+            <a:ext cx="10222992" cy="1097280"/>
           </a:xfrm>
           <a:prstGeom prst="rect">
             <a:avLst/>
@@ -6813,8 +7182,14 @@
                 </a:solidFill>
                 <a:latin typeface="Aptos"/>
               </a:rPr>
-              <a:t>Checked files</a:t>
-            </a:r>
+              <a:t>What Stage 3 is trying to learn</a:t>
+            </a:r>
+            <a:endParaRPr sz="1400" b="1">
+              <a:solidFill>
+                <a:srgbClr val="203044"/>
+              </a:solidFill>
+              <a:latin typeface="Aptos"/>
+            </a:endParaRPr>
           </a:p>
           <a:p>
             <a:pPr>
@@ -6829,7 +7204,7 @@
               </a:defRPr>
             </a:pPr>
             <a:r>
-              <a:t>docs/STAGE3_SELF_CORRUPTED_TOKEN_REPAIR.md</a:t>
+              <a:t>Input: original prompt + corrupted discrete image-token state</a:t>
             </a:r>
           </a:p>
           <a:p>
@@ -6845,7 +7220,7 @@
               </a:defRPr>
             </a:pPr>
             <a:r>
-              <a:t>docs/SERVER_AI_TASK_STAGE3_TOKEN_REPAIR_DATASET_AND_LORA.md</a:t>
+              <a:t>Output: compact repair-cell JSON, e.g. {"cells":["D4","D5"]}</a:t>
             </a:r>
           </a:p>
           <a:p>
@@ -6861,110 +7236,14 @@
               </a:defRPr>
             </a:pPr>
             <a:r>
-              <a:t>docs/SERVER_AI_TASK_STAGE3_SELF_CORRUPT_LOCALITY.md</a:t>
-            </a:r>
-          </a:p>
-          <a:p>
-            <a:pPr>
-              <a:spcBef>
-                <a:spcPts val="600"/>
-              </a:spcBef>
-              <a:defRPr sz="1100">
-                <a:solidFill>
-                  <a:srgbClr val="465260"/>
-                </a:solidFill>
-                <a:latin typeface="Aptos"/>
-              </a:defRPr>
-            </a:pPr>
-            <a:r>
-              <a:t>docs/SERVER_AI_TASK_STAGE3_SELF_CORRUPT_DATASET.md</a:t>
-            </a:r>
-          </a:p>
-          <a:p>
-            <a:pPr>
-              <a:spcBef>
-                <a:spcPts val="600"/>
-              </a:spcBef>
-              <a:defRPr sz="1100">
-                <a:solidFill>
-                  <a:srgbClr val="465260"/>
-                </a:solidFill>
-                <a:latin typeface="Aptos"/>
-              </a:defRPr>
-            </a:pPr>
-            <a:r>
-              <a:t>docs/SERVER_AI_TASK_STAGE3_SELF_CORRUPT_SELECTORS.md</a:t>
-            </a:r>
-          </a:p>
-          <a:p>
-            <a:pPr>
-              <a:spcBef>
-                <a:spcPts val="600"/>
-              </a:spcBef>
-              <a:defRPr sz="1100">
-                <a:solidFill>
-                  <a:srgbClr val="465260"/>
-                </a:solidFill>
-                <a:latin typeface="Aptos"/>
-              </a:defRPr>
-            </a:pPr>
-            <a:r>
-              <a:t>configs/stage3/self_corrupt/token_repair_40k.yaml</a:t>
-            </a:r>
-          </a:p>
-          <a:p>
-            <a:pPr>
-              <a:spcBef>
-                <a:spcPts val="600"/>
-              </a:spcBef>
-              <a:defRPr sz="1100">
-                <a:solidFill>
-                  <a:srgbClr val="465260"/>
-                </a:solidFill>
-                <a:latin typeface="Aptos"/>
-              </a:defRPr>
-            </a:pPr>
-            <a:r>
-              <a:t>configs/stage4/self_corrupt/mmu_sft_token_repair_8x8.yaml</a:t>
-            </a:r>
-          </a:p>
-          <a:p>
-            <a:pPr>
-              <a:spcBef>
-                <a:spcPts val="600"/>
-              </a:spcBef>
-              <a:defRPr sz="1100">
-                <a:solidFill>
-                  <a:srgbClr val="465260"/>
-                </a:solidFill>
-                <a:latin typeface="Aptos"/>
-              </a:defRPr>
-            </a:pPr>
-            <a:r>
-              <a:t>outputs/stage5_self_corrupt/token_repair_8x8_bench2_peftfix_1h/summary.json</a:t>
-            </a:r>
-          </a:p>
-          <a:p>
-            <a:pPr>
-              <a:spcBef>
-                <a:spcPts val="600"/>
-              </a:spcBef>
-              <a:defRPr sz="1100">
-                <a:solidFill>
-                  <a:srgbClr val="465260"/>
-                </a:solidFill>
-                <a:latin typeface="Aptos"/>
-              </a:defRPr>
-            </a:pPr>
-            <a:r>
-              <a:t>outputs/stage5_self_corrupt/token_repair_8x8_bench2_peftfix_1h/comparison/stage5_loop_comparison.json</a:t>
-            </a:r>
-          </a:p>
-        </p:txBody>
-      </p:sp>
-      <p:sp>
-        <p:nvSpPr>
-          <p:cNvPr id="8" name="TextBox 7"/>
+              <a:t>Training signal: corrupted-clean pairs generated inside Lumina token space</a:t>
+            </a:r>
+          </a:p>
+        </p:txBody>
+      </p:sp>
+      <p:sp>
+        <p:nvSpPr>
+          <p:cNvPr id="17" name="TextBox 16"/>
           <p:cNvSpPr txBox="1"/>
           <p:nvPr/>
         </p:nvSpPr>
@@ -6992,8 +7271,14 @@
                 </a:solidFill>
                 <a:latin typeface="Aptos"/>
               </a:rPr>
-              <a:t>ASCR Stage 3 weekly update | Page 14</a:t>
-            </a:r>
+              <a:t>ASCR Stage 3 weekly update | Page 2</a:t>
+            </a:r>
+            <a:endParaRPr sz="800" b="0">
+              <a:solidFill>
+                <a:srgbClr val="697380"/>
+              </a:solidFill>
+              <a:latin typeface="Aptos"/>
+            </a:endParaRPr>
           </a:p>
         </p:txBody>
       </p:sp>
@@ -7005,8 +7290,8 @@
 </p:sld>
 </file>
 
-<file path=ppt/slides/slide2.xml><?xml version="1.0" encoding="utf-8"?>
-<p:sld xmlns:a="http://schemas.openxmlformats.org/drawingml/2006/main" xmlns:p="http://schemas.openxmlformats.org/presentationml/2006/main" xmlns:r="http://schemas.openxmlformats.org/officeDocument/2006/relationships">
+<file path=ppt/slides/slide3.xml><?xml version="1.0" encoding="utf-8"?>
+<p:sld xmlns:a="http://schemas.openxmlformats.org/drawingml/2006/main" xmlns:r="http://schemas.openxmlformats.org/officeDocument/2006/relationships" xmlns:p="http://schemas.openxmlformats.org/presentationml/2006/main">
   <p:cSld>
     <p:bg>
       <p:bgPr>
@@ -7053,8 +7338,14 @@
                 </a:solidFill>
                 <a:latin typeface="Aptos"/>
               </a:rPr>
-              <a:t>Stage 3 Objective / 目标</a:t>
-            </a:r>
+              <a:t>Phase Map / 阶段地图</a:t>
+            </a:r>
+            <a:endParaRPr sz="2400" b="1">
+              <a:solidFill>
+                <a:srgbClr val="203044"/>
+              </a:solidFill>
+              <a:latin typeface="Aptos"/>
+            </a:endParaRPr>
           </a:p>
         </p:txBody>
       </p:sp>
@@ -7088,8 +7379,14 @@
                 </a:solidFill>
                 <a:latin typeface="Aptos"/>
               </a:rPr>
-              <a:t>From controlled token corruption to supervised repair behavior</a:t>
-            </a:r>
+              <a:t>Phase 0-5 only</a:t>
+            </a:r>
+            <a:endParaRPr sz="1000" b="0">
+              <a:solidFill>
+                <a:srgbClr val="697380"/>
+              </a:solidFill>
+              <a:latin typeface="Aptos"/>
+            </a:endParaRPr>
           </a:p>
         </p:txBody>
       </p:sp>
@@ -7144,19 +7441,17 @@
         </p:nvSpPr>
         <p:spPr>
           <a:xfrm>
-            <a:off x="685800" y="2011680"/>
-            <a:ext cx="1691640" cy="749808"/>
+            <a:off x="731520" y="1600200"/>
+            <a:ext cx="1508760" cy="438912"/>
           </a:xfrm>
           <a:prstGeom prst="roundRect">
             <a:avLst/>
           </a:prstGeom>
           <a:solidFill>
-            <a:srgbClr val="FFFFFF"/>
+            <a:srgbClr val="426792"/>
           </a:solidFill>
-          <a:ln w="11430">
-            <a:solidFill>
-              <a:srgbClr val="CDD3DB"/>
-            </a:solidFill>
+          <a:ln>
+            <a:noFill/>
           </a:ln>
         </p:spPr>
         <p:style>
@@ -7179,15 +7474,21 @@
           <a:p>
             <a:pPr algn="ctr"/>
             <a:r>
-              <a:rPr sz="1200" b="1">
-                <a:solidFill>
-                  <a:srgbClr val="426792"/>
+              <a:rPr sz="900" b="1">
+                <a:solidFill>
+                  <a:srgbClr val="FFFFFF"/>
                 </a:solidFill>
                 <a:latin typeface="Aptos"/>
               </a:rPr>
-              <a:t>Clean 64×64
-VQ tokens</a:t>
-            </a:r>
+              <a:t>P0
+Direction reset</a:t>
+            </a:r>
+            <a:endParaRPr sz="900" b="1">
+              <a:solidFill>
+                <a:srgbClr val="FFFFFF"/>
+              </a:solidFill>
+              <a:latin typeface="Aptos"/>
+            </a:endParaRPr>
           </a:p>
         </p:txBody>
       </p:sp>
@@ -7199,15 +7500,15 @@
         </p:nvCxnSpPr>
         <p:spPr>
           <a:xfrm>
-            <a:off x="2377440" y="2386584"/>
-            <a:ext cx="457200" cy="0"/>
+            <a:off x="2240280" y="1819656"/>
+            <a:ext cx="173736" cy="0"/>
           </a:xfrm>
           <a:prstGeom prst="line">
             <a:avLst/>
           </a:prstGeom>
           <a:ln w="20320">
             <a:solidFill>
-              <a:srgbClr val="465260"/>
+              <a:srgbClr val="CDD3DB"/>
             </a:solidFill>
           </a:ln>
         </p:spPr>
@@ -7234,19 +7535,17 @@
         </p:nvSpPr>
         <p:spPr>
           <a:xfrm>
-            <a:off x="2926080" y="2011680"/>
-            <a:ext cx="1691640" cy="749808"/>
+            <a:off x="2487168" y="1600200"/>
+            <a:ext cx="1508760" cy="438912"/>
           </a:xfrm>
           <a:prstGeom prst="roundRect">
             <a:avLst/>
           </a:prstGeom>
           <a:solidFill>
-            <a:srgbClr val="FFFFFF"/>
+            <a:srgbClr val="588760"/>
           </a:solidFill>
-          <a:ln w="11430">
-            <a:solidFill>
-              <a:srgbClr val="CDD3DB"/>
-            </a:solidFill>
+          <a:ln>
+            <a:noFill/>
           </a:ln>
         </p:spPr>
         <p:style>
@@ -7269,15 +7568,21 @@
           <a:p>
             <a:pPr algn="ctr"/>
             <a:r>
-              <a:rPr sz="1200" b="1">
-                <a:solidFill>
-                  <a:srgbClr val="9C7A3F"/>
+              <a:rPr sz="900" b="1">
+                <a:solidFill>
+                  <a:srgbClr val="FFFFFF"/>
                 </a:solidFill>
                 <a:latin typeface="Aptos"/>
               </a:rPr>
-              <a:t>Controlled
-corruption</a:t>
-            </a:r>
+              <a:t>P1
+Locality probe</a:t>
+            </a:r>
+            <a:endParaRPr sz="900" b="1">
+              <a:solidFill>
+                <a:srgbClr val="FFFFFF"/>
+              </a:solidFill>
+              <a:latin typeface="Aptos"/>
+            </a:endParaRPr>
           </a:p>
         </p:txBody>
       </p:sp>
@@ -7289,15 +7594,15 @@
         </p:nvCxnSpPr>
         <p:spPr>
           <a:xfrm>
-            <a:off x="4617720" y="2386584"/>
-            <a:ext cx="457200" cy="0"/>
+            <a:off x="3995928" y="1819656"/>
+            <a:ext cx="173735" cy="0"/>
           </a:xfrm>
           <a:prstGeom prst="line">
             <a:avLst/>
           </a:prstGeom>
           <a:ln w="20320">
             <a:solidFill>
-              <a:srgbClr val="465260"/>
+              <a:srgbClr val="CDD3DB"/>
             </a:solidFill>
           </a:ln>
         </p:spPr>
@@ -7324,19 +7629,17 @@
         </p:nvSpPr>
         <p:spPr>
           <a:xfrm>
-            <a:off x="5166360" y="2011680"/>
-            <a:ext cx="1691640" cy="749808"/>
+            <a:off x="4242816" y="1600200"/>
+            <a:ext cx="1508760" cy="438912"/>
           </a:xfrm>
           <a:prstGeom prst="roundRect">
             <a:avLst/>
           </a:prstGeom>
           <a:solidFill>
-            <a:srgbClr val="FFFFFF"/>
+            <a:srgbClr val="588760"/>
           </a:solidFill>
-          <a:ln w="11430">
-            <a:solidFill>
-              <a:srgbClr val="CDD3DB"/>
-            </a:solidFill>
+          <a:ln>
+            <a:noFill/>
           </a:ln>
         </p:spPr>
         <p:style>
@@ -7359,15 +7662,21 @@
           <a:p>
             <a:pPr algn="ctr"/>
             <a:r>
-              <a:rPr sz="1200" b="1">
-                <a:solidFill>
-                  <a:srgbClr val="9E5B5B"/>
+              <a:rPr sz="900" b="1">
+                <a:solidFill>
+                  <a:srgbClr val="FFFFFF"/>
                 </a:solidFill>
                 <a:latin typeface="Aptos"/>
               </a:rPr>
-              <a:t>Corrupted
-VQ tokens</a:t>
-            </a:r>
+              <a:t>P2
+Dataset build</a:t>
+            </a:r>
+            <a:endParaRPr sz="900" b="1">
+              <a:solidFill>
+                <a:srgbClr val="FFFFFF"/>
+              </a:solidFill>
+              <a:latin typeface="Aptos"/>
+            </a:endParaRPr>
           </a:p>
         </p:txBody>
       </p:sp>
@@ -7379,15 +7688,15 @@
         </p:nvCxnSpPr>
         <p:spPr>
           <a:xfrm>
-            <a:off x="6858000" y="2386584"/>
-            <a:ext cx="457200" cy="0"/>
+            <a:off x="5751575" y="1819656"/>
+            <a:ext cx="173737" cy="0"/>
           </a:xfrm>
           <a:prstGeom prst="line">
             <a:avLst/>
           </a:prstGeom>
           <a:ln w="20320">
             <a:solidFill>
-              <a:srgbClr val="465260"/>
+              <a:srgbClr val="CDD3DB"/>
             </a:solidFill>
           </a:ln>
         </p:spPr>
@@ -7414,19 +7723,17 @@
         </p:nvSpPr>
         <p:spPr>
           <a:xfrm>
-            <a:off x="7406640" y="2011680"/>
-            <a:ext cx="1691640" cy="749808"/>
+            <a:off x="5998464" y="1600200"/>
+            <a:ext cx="1508760" cy="438912"/>
           </a:xfrm>
           <a:prstGeom prst="roundRect">
             <a:avLst/>
           </a:prstGeom>
           <a:solidFill>
-            <a:srgbClr val="FFFFFF"/>
+            <a:srgbClr val="588760"/>
           </a:solidFill>
-          <a:ln w="11430">
-            <a:solidFill>
-              <a:srgbClr val="CDD3DB"/>
-            </a:solidFill>
+          <a:ln>
+            <a:noFill/>
           </a:ln>
         </p:spPr>
         <p:style>
@@ -7449,15 +7756,21 @@
           <a:p>
             <a:pPr algn="ctr"/>
             <a:r>
-              <a:rPr sz="1200" b="1">
-                <a:solidFill>
-                  <a:srgbClr val="4E817C"/>
+              <a:rPr sz="900" b="1">
+                <a:solidFill>
+                  <a:srgbClr val="FFFFFF"/>
                 </a:solidFill>
                 <a:latin typeface="Aptos"/>
               </a:rPr>
-              <a:t>Known mask →
-8×8 cells</a:t>
-            </a:r>
+              <a:t>P3
+Selector baselines</a:t>
+            </a:r>
+            <a:endParaRPr sz="900" b="1">
+              <a:solidFill>
+                <a:srgbClr val="FFFFFF"/>
+              </a:solidFill>
+              <a:latin typeface="Aptos"/>
+            </a:endParaRPr>
           </a:p>
         </p:txBody>
       </p:sp>
@@ -7469,15 +7782,15 @@
         </p:nvCxnSpPr>
         <p:spPr>
           <a:xfrm>
-            <a:off x="9098280" y="2386584"/>
-            <a:ext cx="457200" cy="0"/>
+            <a:off x="7507223" y="1819656"/>
+            <a:ext cx="173737" cy="0"/>
           </a:xfrm>
           <a:prstGeom prst="line">
             <a:avLst/>
           </a:prstGeom>
           <a:ln w="20320">
             <a:solidFill>
-              <a:srgbClr val="465260"/>
+              <a:srgbClr val="CDD3DB"/>
             </a:solidFill>
           </a:ln>
         </p:spPr>
@@ -7504,19 +7817,17 @@
         </p:nvSpPr>
         <p:spPr>
           <a:xfrm>
-            <a:off x="9646920" y="2011680"/>
-            <a:ext cx="1691640" cy="749808"/>
+            <a:off x="7754112" y="1600200"/>
+            <a:ext cx="1508760" cy="438912"/>
           </a:xfrm>
           <a:prstGeom prst="roundRect">
             <a:avLst/>
           </a:prstGeom>
           <a:solidFill>
-            <a:srgbClr val="FFFFFF"/>
+            <a:srgbClr val="9C7A3F"/>
           </a:solidFill>
-          <a:ln w="11430">
-            <a:solidFill>
-              <a:srgbClr val="CDD3DB"/>
-            </a:solidFill>
+          <a:ln>
+            <a:noFill/>
           </a:ln>
         </p:spPr>
         <p:style>
@@ -7539,28 +7850,128 @@
           <a:p>
             <a:pPr algn="ctr"/>
             <a:r>
-              <a:rPr sz="1200" b="1">
-                <a:solidFill>
-                  <a:srgbClr val="588760"/>
+              <a:rPr sz="900" b="1">
+                <a:solidFill>
+                  <a:srgbClr val="FFFFFF"/>
                 </a:solidFill>
                 <a:latin typeface="Aptos"/>
               </a:rPr>
-              <a:t>SFT target
-{"cells": [...]}</a:t>
-            </a:r>
-          </a:p>
-        </p:txBody>
-      </p:sp>
-      <p:sp>
-        <p:nvSpPr>
-          <p:cNvPr id="14" name="Rounded Rectangle 13"/>
+              <a:t>P4
+MMU/LoRA</a:t>
+            </a:r>
+            <a:endParaRPr sz="900" b="1">
+              <a:solidFill>
+                <a:srgbClr val="FFFFFF"/>
+              </a:solidFill>
+              <a:latin typeface="Aptos"/>
+            </a:endParaRPr>
+          </a:p>
+        </p:txBody>
+      </p:sp>
+      <p:cxnSp>
+        <p:nvCxnSpPr>
+          <p:cNvPr id="14" name="Connector 13"/>
+          <p:cNvCxnSpPr/>
+          <p:nvPr/>
+        </p:nvCxnSpPr>
+        <p:spPr>
+          <a:xfrm>
+            <a:off x="9262872" y="1819656"/>
+            <a:ext cx="173736" cy="0"/>
+          </a:xfrm>
+          <a:prstGeom prst="line">
+            <a:avLst/>
+          </a:prstGeom>
+          <a:ln w="20320">
+            <a:solidFill>
+              <a:srgbClr val="CDD3DB"/>
+            </a:solidFill>
+          </a:ln>
+        </p:spPr>
+        <p:style>
+          <a:lnRef idx="2">
+            <a:schemeClr val="accent1"/>
+          </a:lnRef>
+          <a:fillRef idx="0">
+            <a:schemeClr val="accent1"/>
+          </a:fillRef>
+          <a:effectRef idx="1">
+            <a:schemeClr val="accent1"/>
+          </a:effectRef>
+          <a:fontRef idx="minor">
+            <a:schemeClr val="tx1"/>
+          </a:fontRef>
+        </p:style>
+      </p:cxnSp>
+      <p:sp>
+        <p:nvSpPr>
+          <p:cNvPr id="15" name="Rounded Rectangle 14"/>
           <p:cNvSpPr/>
           <p:nvPr/>
         </p:nvSpPr>
         <p:spPr>
           <a:xfrm>
-            <a:off x="777240" y="3749039"/>
-            <a:ext cx="10607040" cy="1325880"/>
+            <a:off x="9509760" y="1600200"/>
+            <a:ext cx="1508760" cy="438912"/>
+          </a:xfrm>
+          <a:prstGeom prst="roundRect">
+            <a:avLst/>
+          </a:prstGeom>
+          <a:solidFill>
+            <a:srgbClr val="588760"/>
+          </a:solidFill>
+          <a:ln>
+            <a:noFill/>
+          </a:ln>
+        </p:spPr>
+        <p:style>
+          <a:lnRef idx="1">
+            <a:schemeClr val="accent1"/>
+          </a:lnRef>
+          <a:fillRef idx="3">
+            <a:schemeClr val="accent1"/>
+          </a:fillRef>
+          <a:effectRef idx="2">
+            <a:schemeClr val="accent1"/>
+          </a:effectRef>
+          <a:fontRef idx="minor">
+            <a:schemeClr val="lt1"/>
+          </a:fontRef>
+        </p:style>
+        <p:txBody>
+          <a:bodyPr rtlCol="0" anchor="ctr"/>
+          <a:lstStyle/>
+          <a:p>
+            <a:pPr algn="ctr"/>
+            <a:r>
+              <a:rPr sz="900" b="1">
+                <a:solidFill>
+                  <a:srgbClr val="FFFFFF"/>
+                </a:solidFill>
+                <a:latin typeface="Aptos"/>
+              </a:rPr>
+              <a:t>P5
+Loop wired</a:t>
+            </a:r>
+            <a:endParaRPr sz="900" b="1">
+              <a:solidFill>
+                <a:srgbClr val="FFFFFF"/>
+              </a:solidFill>
+              <a:latin typeface="Aptos"/>
+            </a:endParaRPr>
+          </a:p>
+        </p:txBody>
+      </p:sp>
+      <p:sp>
+        <p:nvSpPr>
+          <p:cNvPr id="16" name="Rounded Rectangle 15"/>
+          <p:cNvSpPr/>
+          <p:nvPr/>
+        </p:nvSpPr>
+        <p:spPr>
+          <a:xfrm>
+            <a:off x="777240" y="2743200"/>
+            <a:ext cx="3429000" cy="2194560"/>
           </a:xfrm>
           <a:prstGeom prst="roundRect">
             <a:avLst/>
@@ -7598,14 +8009,382 @@
       </p:sp>
       <p:sp>
         <p:nvSpPr>
-          <p:cNvPr id="15" name="Rectangle 14"/>
+          <p:cNvPr id="17" name="Rectangle 16"/>
           <p:cNvSpPr/>
           <p:nvPr/>
         </p:nvSpPr>
         <p:spPr>
           <a:xfrm>
-            <a:off x="777240" y="3749039"/>
-            <a:ext cx="73152" cy="1325880"/>
+            <a:off x="777240" y="2743200"/>
+            <a:ext cx="73152" cy="2194560"/>
+          </a:xfrm>
+          <a:prstGeom prst="rect">
+            <a:avLst/>
+          </a:prstGeom>
+          <a:solidFill>
+            <a:srgbClr val="588760"/>
+          </a:solidFill>
+          <a:ln>
+            <a:noFill/>
+          </a:ln>
+        </p:spPr>
+        <p:style>
+          <a:lnRef idx="1">
+            <a:schemeClr val="accent1"/>
+          </a:lnRef>
+          <a:fillRef idx="3">
+            <a:schemeClr val="accent1"/>
+          </a:fillRef>
+          <a:effectRef idx="2">
+            <a:schemeClr val="accent1"/>
+          </a:effectRef>
+          <a:fontRef idx="minor">
+            <a:schemeClr val="lt1"/>
+          </a:fontRef>
+        </p:style>
+        <p:txBody>
+          <a:bodyPr rtlCol="0" anchor="ctr"/>
+          <a:lstStyle/>
+          <a:p>
+            <a:pPr algn="ctr"/>
+          </a:p>
+        </p:txBody>
+      </p:sp>
+      <p:sp>
+        <p:nvSpPr>
+          <p:cNvPr id="18" name="TextBox 17"/>
+          <p:cNvSpPr txBox="1"/>
+          <p:nvPr/>
+        </p:nvSpPr>
+        <p:spPr>
+          <a:xfrm>
+            <a:off x="978408" y="2907792"/>
+            <a:ext cx="3044952" cy="1965960"/>
+          </a:xfrm>
+          <a:prstGeom prst="rect">
+            <a:avLst/>
+          </a:prstGeom>
+          <a:noFill/>
+        </p:spPr>
+        <p:txBody>
+          <a:bodyPr wrap="none">
+            <a:spAutoFit/>
+          </a:bodyPr>
+          <a:lstStyle/>
+          <a:p>
+            <a:r>
+              <a:rPr sz="1400" b="1">
+                <a:solidFill>
+                  <a:srgbClr val="203044"/>
+                </a:solidFill>
+                <a:latin typeface="Aptos"/>
+              </a:rPr>
+              <a:t>Completed / 已完成</a:t>
+            </a:r>
+            <a:endParaRPr sz="1400" b="1">
+              <a:solidFill>
+                <a:srgbClr val="203044"/>
+              </a:solidFill>
+              <a:latin typeface="Aptos"/>
+            </a:endParaRPr>
+          </a:p>
+          <a:p>
+            <a:pPr>
+              <a:spcBef>
+                <a:spcPts val="600"/>
+              </a:spcBef>
+              <a:defRPr sz="1100">
+                <a:solidFill>
+                  <a:srgbClr val="465260"/>
+                </a:solidFill>
+                <a:latin typeface="Aptos"/>
+              </a:defRPr>
+            </a:pPr>
+            <a:r>
+              <a:t>P0 research direction reset</a:t>
+            </a:r>
+          </a:p>
+          <a:p>
+            <a:pPr>
+              <a:spcBef>
+                <a:spcPts val="600"/>
+              </a:spcBef>
+              <a:defRPr sz="1100">
+                <a:solidFill>
+                  <a:srgbClr val="465260"/>
+                </a:solidFill>
+                <a:latin typeface="Aptos"/>
+              </a:defRPr>
+            </a:pPr>
+            <a:r>
+              <a:t>P1 smoke locality gate</a:t>
+            </a:r>
+          </a:p>
+          <a:p>
+            <a:pPr>
+              <a:spcBef>
+                <a:spcPts val="600"/>
+              </a:spcBef>
+              <a:defRPr sz="1100">
+                <a:solidFill>
+                  <a:srgbClr val="465260"/>
+                </a:solidFill>
+                <a:latin typeface="Aptos"/>
+              </a:defRPr>
+            </a:pPr>
+            <a:r>
+              <a:t>P2 self-corruption dataset tooling</a:t>
+            </a:r>
+          </a:p>
+          <a:p>
+            <a:pPr>
+              <a:spcBef>
+                <a:spcPts val="600"/>
+              </a:spcBef>
+              <a:defRPr sz="1100">
+                <a:solidFill>
+                  <a:srgbClr val="465260"/>
+                </a:solidFill>
+                <a:latin typeface="Aptos"/>
+              </a:defRPr>
+            </a:pPr>
+            <a:r>
+              <a:t>P3 baseline gate on Hard64</a:t>
+            </a:r>
+          </a:p>
+        </p:txBody>
+      </p:sp>
+      <p:sp>
+        <p:nvSpPr>
+          <p:cNvPr id="19" name="Rounded Rectangle 18"/>
+          <p:cNvSpPr/>
+          <p:nvPr/>
+        </p:nvSpPr>
+        <p:spPr>
+          <a:xfrm>
+            <a:off x="4389120" y="2743200"/>
+            <a:ext cx="3429000" cy="2194560"/>
+          </a:xfrm>
+          <a:prstGeom prst="roundRect">
+            <a:avLst/>
+          </a:prstGeom>
+          <a:solidFill>
+            <a:srgbClr val="FFFFFF"/>
+          </a:solidFill>
+          <a:ln w="10160">
+            <a:solidFill>
+              <a:srgbClr val="CDD3DB"/>
+            </a:solidFill>
+          </a:ln>
+        </p:spPr>
+        <p:style>
+          <a:lnRef idx="1">
+            <a:schemeClr val="accent1"/>
+          </a:lnRef>
+          <a:fillRef idx="3">
+            <a:schemeClr val="accent1"/>
+          </a:fillRef>
+          <a:effectRef idx="2">
+            <a:schemeClr val="accent1"/>
+          </a:effectRef>
+          <a:fontRef idx="minor">
+            <a:schemeClr val="lt1"/>
+          </a:fontRef>
+        </p:style>
+        <p:txBody>
+          <a:bodyPr rtlCol="0" anchor="ctr"/>
+          <a:lstStyle/>
+          <a:p>
+            <a:pPr algn="ctr"/>
+          </a:p>
+        </p:txBody>
+      </p:sp>
+      <p:sp>
+        <p:nvSpPr>
+          <p:cNvPr id="20" name="Rectangle 19"/>
+          <p:cNvSpPr/>
+          <p:nvPr/>
+        </p:nvSpPr>
+        <p:spPr>
+          <a:xfrm>
+            <a:off x="4389120" y="2743200"/>
+            <a:ext cx="73152" cy="2194560"/>
+          </a:xfrm>
+          <a:prstGeom prst="rect">
+            <a:avLst/>
+          </a:prstGeom>
+          <a:solidFill>
+            <a:srgbClr val="9C7A3F"/>
+          </a:solidFill>
+          <a:ln>
+            <a:noFill/>
+          </a:ln>
+        </p:spPr>
+        <p:style>
+          <a:lnRef idx="1">
+            <a:schemeClr val="accent1"/>
+          </a:lnRef>
+          <a:fillRef idx="3">
+            <a:schemeClr val="accent1"/>
+          </a:fillRef>
+          <a:effectRef idx="2">
+            <a:schemeClr val="accent1"/>
+          </a:effectRef>
+          <a:fontRef idx="minor">
+            <a:schemeClr val="lt1"/>
+          </a:fontRef>
+        </p:style>
+        <p:txBody>
+          <a:bodyPr rtlCol="0" anchor="ctr"/>
+          <a:lstStyle/>
+          <a:p>
+            <a:pPr algn="ctr"/>
+          </a:p>
+        </p:txBody>
+      </p:sp>
+      <p:sp>
+        <p:nvSpPr>
+          <p:cNvPr id="21" name="TextBox 20"/>
+          <p:cNvSpPr txBox="1"/>
+          <p:nvPr/>
+        </p:nvSpPr>
+        <p:spPr>
+          <a:xfrm>
+            <a:off x="4590288" y="2907792"/>
+            <a:ext cx="3044952" cy="1965960"/>
+          </a:xfrm>
+          <a:prstGeom prst="rect">
+            <a:avLst/>
+          </a:prstGeom>
+          <a:noFill/>
+        </p:spPr>
+        <p:txBody>
+          <a:bodyPr wrap="none">
+            <a:spAutoFit/>
+          </a:bodyPr>
+          <a:lstStyle/>
+          <a:p>
+            <a:r>
+              <a:rPr sz="1400" b="1">
+                <a:solidFill>
+                  <a:srgbClr val="203044"/>
+                </a:solidFill>
+                <a:latin typeface="Aptos"/>
+              </a:rPr>
+              <a:t>In progress / 进行中</a:t>
+            </a:r>
+            <a:endParaRPr sz="1400" b="1">
+              <a:solidFill>
+                <a:srgbClr val="203044"/>
+              </a:solidFill>
+              <a:latin typeface="Aptos"/>
+            </a:endParaRPr>
+          </a:p>
+          <a:p>
+            <a:pPr>
+              <a:spcBef>
+                <a:spcPts val="600"/>
+              </a:spcBef>
+              <a:defRPr sz="1100">
+                <a:solidFill>
+                  <a:srgbClr val="465260"/>
+                </a:solidFill>
+                <a:latin typeface="Aptos"/>
+              </a:defRPr>
+            </a:pPr>
+            <a:r>
+              <a:t>P4 repair_cells LoRA is runnable</a:t>
+            </a:r>
+          </a:p>
+          <a:p>
+            <a:pPr>
+              <a:spcBef>
+                <a:spcPts val="600"/>
+              </a:spcBef>
+              <a:defRPr sz="1100">
+                <a:solidFill>
+                  <a:srgbClr val="465260"/>
+                </a:solidFill>
+                <a:latin typeface="Aptos"/>
+              </a:defRPr>
+            </a:pPr>
+            <a:r>
+              <a:t>Format still unstable</a:t>
+            </a:r>
+          </a:p>
+          <a:p>
+            <a:pPr>
+              <a:spcBef>
+                <a:spcPts val="600"/>
+              </a:spcBef>
+              <a:defRPr sz="1100">
+                <a:solidFill>
+                  <a:srgbClr val="465260"/>
+                </a:solidFill>
+                <a:latin typeface="Aptos"/>
+              </a:defRPr>
+            </a:pPr>
+            <a:r>
+              <a:t>Localization quality is the blocker</a:t>
+            </a:r>
+          </a:p>
+        </p:txBody>
+      </p:sp>
+      <p:sp>
+        <p:nvSpPr>
+          <p:cNvPr id="22" name="Rounded Rectangle 21"/>
+          <p:cNvSpPr/>
+          <p:nvPr/>
+        </p:nvSpPr>
+        <p:spPr>
+          <a:xfrm>
+            <a:off x="8001000" y="2743200"/>
+            <a:ext cx="3429000" cy="2194560"/>
+          </a:xfrm>
+          <a:prstGeom prst="roundRect">
+            <a:avLst/>
+          </a:prstGeom>
+          <a:solidFill>
+            <a:srgbClr val="FFFFFF"/>
+          </a:solidFill>
+          <a:ln w="10160">
+            <a:solidFill>
+              <a:srgbClr val="CDD3DB"/>
+            </a:solidFill>
+          </a:ln>
+        </p:spPr>
+        <p:style>
+          <a:lnRef idx="1">
+            <a:schemeClr val="accent1"/>
+          </a:lnRef>
+          <a:fillRef idx="3">
+            <a:schemeClr val="accent1"/>
+          </a:fillRef>
+          <a:effectRef idx="2">
+            <a:schemeClr val="accent1"/>
+          </a:effectRef>
+          <a:fontRef idx="minor">
+            <a:schemeClr val="lt1"/>
+          </a:fontRef>
+        </p:style>
+        <p:txBody>
+          <a:bodyPr rtlCol="0" anchor="ctr"/>
+          <a:lstStyle/>
+          <a:p>
+            <a:pPr algn="ctr"/>
+          </a:p>
+        </p:txBody>
+      </p:sp>
+      <p:sp>
+        <p:nvSpPr>
+          <p:cNvPr id="23" name="Rectangle 22"/>
+          <p:cNvSpPr/>
+          <p:nvPr/>
+        </p:nvSpPr>
+        <p:spPr>
+          <a:xfrm>
+            <a:off x="8001000" y="2743200"/>
+            <a:ext cx="73152" cy="2194560"/>
           </a:xfrm>
           <a:prstGeom prst="rect">
             <a:avLst/>
@@ -7641,14 +8420,14 @@
       </p:sp>
       <p:sp>
         <p:nvSpPr>
-          <p:cNvPr id="16" name="TextBox 15"/>
+          <p:cNvPr id="24" name="TextBox 23"/>
           <p:cNvSpPr txBox="1"/>
           <p:nvPr/>
         </p:nvSpPr>
         <p:spPr>
           <a:xfrm>
-            <a:off x="978408" y="3913631"/>
-            <a:ext cx="10222992" cy="1097280"/>
+            <a:off x="8202168" y="2907792"/>
+            <a:ext cx="3044952" cy="1965960"/>
           </a:xfrm>
           <a:prstGeom prst="rect">
             <a:avLst/>
@@ -7668,8 +8447,14 @@
                 </a:solidFill>
                 <a:latin typeface="Aptos"/>
               </a:rPr>
-              <a:t>What Stage 3 is trying to learn</a:t>
-            </a:r>
+              <a:t>Next / 下一步</a:t>
+            </a:r>
+            <a:endParaRPr sz="1400" b="1">
+              <a:solidFill>
+                <a:srgbClr val="203044"/>
+              </a:solidFill>
+              <a:latin typeface="Aptos"/>
+            </a:endParaRPr>
           </a:p>
           <a:p>
             <a:pPr>
@@ -7684,7 +8469,7 @@
               </a:defRPr>
             </a:pPr>
             <a:r>
-              <a:t>Input: original prompt + corrupted discrete image-token state</a:t>
+              <a:t>P5 loop engineering verified</a:t>
             </a:r>
           </a:p>
           <a:p>
@@ -7700,7 +8485,7 @@
               </a:defRPr>
             </a:pPr>
             <a:r>
-              <a:t>Output: compact repair-cell JSON, e.g. {"cells":["D4","D5"]}</a:t>
+              <a:t>Run oracle upper bound</a:t>
             </a:r>
           </a:p>
           <a:p>
@@ -7716,14 +8501,14 @@
               </a:defRPr>
             </a:pPr>
             <a:r>
-              <a:t>Training signal: corrupted-clean pairs generated inside Lumina token space</a:t>
-            </a:r>
-          </a:p>
-        </p:txBody>
-      </p:sp>
-      <p:sp>
-        <p:nvSpPr>
-          <p:cNvPr id="17" name="TextBox 16"/>
+              <a:t>Compare image-space teacher loop</a:t>
+            </a:r>
+          </a:p>
+        </p:txBody>
+      </p:sp>
+      <p:sp>
+        <p:nvSpPr>
+          <p:cNvPr id="25" name="TextBox 24"/>
           <p:cNvSpPr txBox="1"/>
           <p:nvPr/>
         </p:nvSpPr>
@@ -7751,8 +8536,14 @@
                 </a:solidFill>
                 <a:latin typeface="Aptos"/>
               </a:rPr>
-              <a:t>ASCR Stage 3 weekly update | Page 2</a:t>
-            </a:r>
+              <a:t>ASCR Stage 3 weekly update | Page 3</a:t>
+            </a:r>
+            <a:endParaRPr sz="800" b="0">
+              <a:solidFill>
+                <a:srgbClr val="697380"/>
+              </a:solidFill>
+              <a:latin typeface="Aptos"/>
+            </a:endParaRPr>
           </a:p>
         </p:txBody>
       </p:sp>
@@ -7764,8 +8555,8 @@
 </p:sld>
 </file>
 
-<file path=ppt/slides/slide3.xml><?xml version="1.0" encoding="utf-8"?>
-<p:sld xmlns:a="http://schemas.openxmlformats.org/drawingml/2006/main" xmlns:p="http://schemas.openxmlformats.org/presentationml/2006/main" xmlns:r="http://schemas.openxmlformats.org/officeDocument/2006/relationships">
+<file path=ppt/slides/slide4.xml><?xml version="1.0" encoding="utf-8"?>
+<p:sld xmlns:a="http://schemas.openxmlformats.org/drawingml/2006/main" xmlns:r="http://schemas.openxmlformats.org/officeDocument/2006/relationships" xmlns:p="http://schemas.openxmlformats.org/presentationml/2006/main">
   <p:cSld>
     <p:bg>
       <p:bgPr>
@@ -7812,8 +8603,14 @@
                 </a:solidFill>
                 <a:latin typeface="Aptos"/>
               </a:rPr>
-              <a:t>Phase Map / 阶段地图</a:t>
-            </a:r>
+              <a:t>Phase 0: Direction Reset / 方向重置</a:t>
+            </a:r>
+            <a:endParaRPr sz="2400" b="1">
+              <a:solidFill>
+                <a:srgbClr val="203044"/>
+              </a:solidFill>
+              <a:latin typeface="Aptos"/>
+            </a:endParaRPr>
           </a:p>
         </p:txBody>
       </p:sp>
@@ -7847,8 +8644,14 @@
                 </a:solidFill>
                 <a:latin typeface="Aptos"/>
               </a:rPr>
-              <a:t>Phase 0-5 only</a:t>
-            </a:r>
+              <a:t>Old cross-model Stage 3 is no longer the mainline</a:t>
+            </a:r>
+            <a:endParaRPr sz="1000" b="0">
+              <a:solidFill>
+                <a:srgbClr val="697380"/>
+              </a:solidFill>
+              <a:latin typeface="Aptos"/>
+            </a:endParaRPr>
           </a:p>
         </p:txBody>
       </p:sp>
@@ -7903,501 +8706,8 @@
         </p:nvSpPr>
         <p:spPr>
           <a:xfrm>
-            <a:off x="731520" y="1600200"/>
-            <a:ext cx="1508760" cy="438912"/>
-          </a:xfrm>
-          <a:prstGeom prst="roundRect">
-            <a:avLst/>
-          </a:prstGeom>
-          <a:solidFill>
-            <a:srgbClr val="426792"/>
-          </a:solidFill>
-          <a:ln>
-            <a:noFill/>
-          </a:ln>
-        </p:spPr>
-        <p:style>
-          <a:lnRef idx="1">
-            <a:schemeClr val="accent1"/>
-          </a:lnRef>
-          <a:fillRef idx="3">
-            <a:schemeClr val="accent1"/>
-          </a:fillRef>
-          <a:effectRef idx="2">
-            <a:schemeClr val="accent1"/>
-          </a:effectRef>
-          <a:fontRef idx="minor">
-            <a:schemeClr val="lt1"/>
-          </a:fontRef>
-        </p:style>
-        <p:txBody>
-          <a:bodyPr rtlCol="0" anchor="ctr"/>
-          <a:lstStyle/>
-          <a:p>
-            <a:pPr algn="ctr"/>
-            <a:r>
-              <a:rPr sz="900" b="1">
-                <a:solidFill>
-                  <a:srgbClr val="FFFFFF"/>
-                </a:solidFill>
-                <a:latin typeface="Aptos"/>
-              </a:rPr>
-              <a:t>P0
-Direction reset</a:t>
-            </a:r>
-          </a:p>
-        </p:txBody>
-      </p:sp>
-      <p:cxnSp>
-        <p:nvCxnSpPr>
-          <p:cNvPr id="6" name="Connector 5"/>
-          <p:cNvCxnSpPr/>
-          <p:nvPr/>
-        </p:nvCxnSpPr>
-        <p:spPr>
-          <a:xfrm>
-            <a:off x="2240280" y="1819656"/>
-            <a:ext cx="173736" cy="0"/>
-          </a:xfrm>
-          <a:prstGeom prst="line">
-            <a:avLst/>
-          </a:prstGeom>
-          <a:ln w="20320">
-            <a:solidFill>
-              <a:srgbClr val="CDD3DB"/>
-            </a:solidFill>
-          </a:ln>
-        </p:spPr>
-        <p:style>
-          <a:lnRef idx="2">
-            <a:schemeClr val="accent1"/>
-          </a:lnRef>
-          <a:fillRef idx="0">
-            <a:schemeClr val="accent1"/>
-          </a:fillRef>
-          <a:effectRef idx="1">
-            <a:schemeClr val="accent1"/>
-          </a:effectRef>
-          <a:fontRef idx="minor">
-            <a:schemeClr val="tx1"/>
-          </a:fontRef>
-        </p:style>
-      </p:cxnSp>
-      <p:sp>
-        <p:nvSpPr>
-          <p:cNvPr id="7" name="Rounded Rectangle 6"/>
-          <p:cNvSpPr/>
-          <p:nvPr/>
-        </p:nvSpPr>
-        <p:spPr>
-          <a:xfrm>
-            <a:off x="2487168" y="1600200"/>
-            <a:ext cx="1508760" cy="438912"/>
-          </a:xfrm>
-          <a:prstGeom prst="roundRect">
-            <a:avLst/>
-          </a:prstGeom>
-          <a:solidFill>
-            <a:srgbClr val="588760"/>
-          </a:solidFill>
-          <a:ln>
-            <a:noFill/>
-          </a:ln>
-        </p:spPr>
-        <p:style>
-          <a:lnRef idx="1">
-            <a:schemeClr val="accent1"/>
-          </a:lnRef>
-          <a:fillRef idx="3">
-            <a:schemeClr val="accent1"/>
-          </a:fillRef>
-          <a:effectRef idx="2">
-            <a:schemeClr val="accent1"/>
-          </a:effectRef>
-          <a:fontRef idx="minor">
-            <a:schemeClr val="lt1"/>
-          </a:fontRef>
-        </p:style>
-        <p:txBody>
-          <a:bodyPr rtlCol="0" anchor="ctr"/>
-          <a:lstStyle/>
-          <a:p>
-            <a:pPr algn="ctr"/>
-            <a:r>
-              <a:rPr sz="900" b="1">
-                <a:solidFill>
-                  <a:srgbClr val="FFFFFF"/>
-                </a:solidFill>
-                <a:latin typeface="Aptos"/>
-              </a:rPr>
-              <a:t>P1
-Locality probe</a:t>
-            </a:r>
-          </a:p>
-        </p:txBody>
-      </p:sp>
-      <p:cxnSp>
-        <p:nvCxnSpPr>
-          <p:cNvPr id="8" name="Connector 7"/>
-          <p:cNvCxnSpPr/>
-          <p:nvPr/>
-        </p:nvCxnSpPr>
-        <p:spPr>
-          <a:xfrm>
-            <a:off x="3995928" y="1819656"/>
-            <a:ext cx="173735" cy="0"/>
-          </a:xfrm>
-          <a:prstGeom prst="line">
-            <a:avLst/>
-          </a:prstGeom>
-          <a:ln w="20320">
-            <a:solidFill>
-              <a:srgbClr val="CDD3DB"/>
-            </a:solidFill>
-          </a:ln>
-        </p:spPr>
-        <p:style>
-          <a:lnRef idx="2">
-            <a:schemeClr val="accent1"/>
-          </a:lnRef>
-          <a:fillRef idx="0">
-            <a:schemeClr val="accent1"/>
-          </a:fillRef>
-          <a:effectRef idx="1">
-            <a:schemeClr val="accent1"/>
-          </a:effectRef>
-          <a:fontRef idx="minor">
-            <a:schemeClr val="tx1"/>
-          </a:fontRef>
-        </p:style>
-      </p:cxnSp>
-      <p:sp>
-        <p:nvSpPr>
-          <p:cNvPr id="9" name="Rounded Rectangle 8"/>
-          <p:cNvSpPr/>
-          <p:nvPr/>
-        </p:nvSpPr>
-        <p:spPr>
-          <a:xfrm>
-            <a:off x="4242816" y="1600200"/>
-            <a:ext cx="1508760" cy="438912"/>
-          </a:xfrm>
-          <a:prstGeom prst="roundRect">
-            <a:avLst/>
-          </a:prstGeom>
-          <a:solidFill>
-            <a:srgbClr val="588760"/>
-          </a:solidFill>
-          <a:ln>
-            <a:noFill/>
-          </a:ln>
-        </p:spPr>
-        <p:style>
-          <a:lnRef idx="1">
-            <a:schemeClr val="accent1"/>
-          </a:lnRef>
-          <a:fillRef idx="3">
-            <a:schemeClr val="accent1"/>
-          </a:fillRef>
-          <a:effectRef idx="2">
-            <a:schemeClr val="accent1"/>
-          </a:effectRef>
-          <a:fontRef idx="minor">
-            <a:schemeClr val="lt1"/>
-          </a:fontRef>
-        </p:style>
-        <p:txBody>
-          <a:bodyPr rtlCol="0" anchor="ctr"/>
-          <a:lstStyle/>
-          <a:p>
-            <a:pPr algn="ctr"/>
-            <a:r>
-              <a:rPr sz="900" b="1">
-                <a:solidFill>
-                  <a:srgbClr val="FFFFFF"/>
-                </a:solidFill>
-                <a:latin typeface="Aptos"/>
-              </a:rPr>
-              <a:t>P2
-Dataset build</a:t>
-            </a:r>
-          </a:p>
-        </p:txBody>
-      </p:sp>
-      <p:cxnSp>
-        <p:nvCxnSpPr>
-          <p:cNvPr id="10" name="Connector 9"/>
-          <p:cNvCxnSpPr/>
-          <p:nvPr/>
-        </p:nvCxnSpPr>
-        <p:spPr>
-          <a:xfrm>
-            <a:off x="5751575" y="1819656"/>
-            <a:ext cx="173737" cy="0"/>
-          </a:xfrm>
-          <a:prstGeom prst="line">
-            <a:avLst/>
-          </a:prstGeom>
-          <a:ln w="20320">
-            <a:solidFill>
-              <a:srgbClr val="CDD3DB"/>
-            </a:solidFill>
-          </a:ln>
-        </p:spPr>
-        <p:style>
-          <a:lnRef idx="2">
-            <a:schemeClr val="accent1"/>
-          </a:lnRef>
-          <a:fillRef idx="0">
-            <a:schemeClr val="accent1"/>
-          </a:fillRef>
-          <a:effectRef idx="1">
-            <a:schemeClr val="accent1"/>
-          </a:effectRef>
-          <a:fontRef idx="minor">
-            <a:schemeClr val="tx1"/>
-          </a:fontRef>
-        </p:style>
-      </p:cxnSp>
-      <p:sp>
-        <p:nvSpPr>
-          <p:cNvPr id="11" name="Rounded Rectangle 10"/>
-          <p:cNvSpPr/>
-          <p:nvPr/>
-        </p:nvSpPr>
-        <p:spPr>
-          <a:xfrm>
-            <a:off x="5998464" y="1600200"/>
-            <a:ext cx="1508760" cy="438912"/>
-          </a:xfrm>
-          <a:prstGeom prst="roundRect">
-            <a:avLst/>
-          </a:prstGeom>
-          <a:solidFill>
-            <a:srgbClr val="588760"/>
-          </a:solidFill>
-          <a:ln>
-            <a:noFill/>
-          </a:ln>
-        </p:spPr>
-        <p:style>
-          <a:lnRef idx="1">
-            <a:schemeClr val="accent1"/>
-          </a:lnRef>
-          <a:fillRef idx="3">
-            <a:schemeClr val="accent1"/>
-          </a:fillRef>
-          <a:effectRef idx="2">
-            <a:schemeClr val="accent1"/>
-          </a:effectRef>
-          <a:fontRef idx="minor">
-            <a:schemeClr val="lt1"/>
-          </a:fontRef>
-        </p:style>
-        <p:txBody>
-          <a:bodyPr rtlCol="0" anchor="ctr"/>
-          <a:lstStyle/>
-          <a:p>
-            <a:pPr algn="ctr"/>
-            <a:r>
-              <a:rPr sz="900" b="1">
-                <a:solidFill>
-                  <a:srgbClr val="FFFFFF"/>
-                </a:solidFill>
-                <a:latin typeface="Aptos"/>
-              </a:rPr>
-              <a:t>P3
-Selector baselines</a:t>
-            </a:r>
-          </a:p>
-        </p:txBody>
-      </p:sp>
-      <p:cxnSp>
-        <p:nvCxnSpPr>
-          <p:cNvPr id="12" name="Connector 11"/>
-          <p:cNvCxnSpPr/>
-          <p:nvPr/>
-        </p:nvCxnSpPr>
-        <p:spPr>
-          <a:xfrm>
-            <a:off x="7507223" y="1819656"/>
-            <a:ext cx="173737" cy="0"/>
-          </a:xfrm>
-          <a:prstGeom prst="line">
-            <a:avLst/>
-          </a:prstGeom>
-          <a:ln w="20320">
-            <a:solidFill>
-              <a:srgbClr val="CDD3DB"/>
-            </a:solidFill>
-          </a:ln>
-        </p:spPr>
-        <p:style>
-          <a:lnRef idx="2">
-            <a:schemeClr val="accent1"/>
-          </a:lnRef>
-          <a:fillRef idx="0">
-            <a:schemeClr val="accent1"/>
-          </a:fillRef>
-          <a:effectRef idx="1">
-            <a:schemeClr val="accent1"/>
-          </a:effectRef>
-          <a:fontRef idx="minor">
-            <a:schemeClr val="tx1"/>
-          </a:fontRef>
-        </p:style>
-      </p:cxnSp>
-      <p:sp>
-        <p:nvSpPr>
-          <p:cNvPr id="13" name="Rounded Rectangle 12"/>
-          <p:cNvSpPr/>
-          <p:nvPr/>
-        </p:nvSpPr>
-        <p:spPr>
-          <a:xfrm>
-            <a:off x="7754112" y="1600200"/>
-            <a:ext cx="1508760" cy="438912"/>
-          </a:xfrm>
-          <a:prstGeom prst="roundRect">
-            <a:avLst/>
-          </a:prstGeom>
-          <a:solidFill>
-            <a:srgbClr val="9C7A3F"/>
-          </a:solidFill>
-          <a:ln>
-            <a:noFill/>
-          </a:ln>
-        </p:spPr>
-        <p:style>
-          <a:lnRef idx="1">
-            <a:schemeClr val="accent1"/>
-          </a:lnRef>
-          <a:fillRef idx="3">
-            <a:schemeClr val="accent1"/>
-          </a:fillRef>
-          <a:effectRef idx="2">
-            <a:schemeClr val="accent1"/>
-          </a:effectRef>
-          <a:fontRef idx="minor">
-            <a:schemeClr val="lt1"/>
-          </a:fontRef>
-        </p:style>
-        <p:txBody>
-          <a:bodyPr rtlCol="0" anchor="ctr"/>
-          <a:lstStyle/>
-          <a:p>
-            <a:pPr algn="ctr"/>
-            <a:r>
-              <a:rPr sz="900" b="1">
-                <a:solidFill>
-                  <a:srgbClr val="FFFFFF"/>
-                </a:solidFill>
-                <a:latin typeface="Aptos"/>
-              </a:rPr>
-              <a:t>P4
-MMU/LoRA</a:t>
-            </a:r>
-          </a:p>
-        </p:txBody>
-      </p:sp>
-      <p:cxnSp>
-        <p:nvCxnSpPr>
-          <p:cNvPr id="14" name="Connector 13"/>
-          <p:cNvCxnSpPr/>
-          <p:nvPr/>
-        </p:nvCxnSpPr>
-        <p:spPr>
-          <a:xfrm>
-            <a:off x="9262872" y="1819656"/>
-            <a:ext cx="173736" cy="0"/>
-          </a:xfrm>
-          <a:prstGeom prst="line">
-            <a:avLst/>
-          </a:prstGeom>
-          <a:ln w="20320">
-            <a:solidFill>
-              <a:srgbClr val="CDD3DB"/>
-            </a:solidFill>
-          </a:ln>
-        </p:spPr>
-        <p:style>
-          <a:lnRef idx="2">
-            <a:schemeClr val="accent1"/>
-          </a:lnRef>
-          <a:fillRef idx="0">
-            <a:schemeClr val="accent1"/>
-          </a:fillRef>
-          <a:effectRef idx="1">
-            <a:schemeClr val="accent1"/>
-          </a:effectRef>
-          <a:fontRef idx="minor">
-            <a:schemeClr val="tx1"/>
-          </a:fontRef>
-        </p:style>
-      </p:cxnSp>
-      <p:sp>
-        <p:nvSpPr>
-          <p:cNvPr id="15" name="Rounded Rectangle 14"/>
-          <p:cNvSpPr/>
-          <p:nvPr/>
-        </p:nvSpPr>
-        <p:spPr>
-          <a:xfrm>
-            <a:off x="9509760" y="1600200"/>
-            <a:ext cx="1508760" cy="438912"/>
-          </a:xfrm>
-          <a:prstGeom prst="roundRect">
-            <a:avLst/>
-          </a:prstGeom>
-          <a:solidFill>
-            <a:srgbClr val="588760"/>
-          </a:solidFill>
-          <a:ln>
-            <a:noFill/>
-          </a:ln>
-        </p:spPr>
-        <p:style>
-          <a:lnRef idx="1">
-            <a:schemeClr val="accent1"/>
-          </a:lnRef>
-          <a:fillRef idx="3">
-            <a:schemeClr val="accent1"/>
-          </a:fillRef>
-          <a:effectRef idx="2">
-            <a:schemeClr val="accent1"/>
-          </a:effectRef>
-          <a:fontRef idx="minor">
-            <a:schemeClr val="lt1"/>
-          </a:fontRef>
-        </p:style>
-        <p:txBody>
-          <a:bodyPr rtlCol="0" anchor="ctr"/>
-          <a:lstStyle/>
-          <a:p>
-            <a:pPr algn="ctr"/>
-            <a:r>
-              <a:rPr sz="900" b="1">
-                <a:solidFill>
-                  <a:srgbClr val="FFFFFF"/>
-                </a:solidFill>
-                <a:latin typeface="Aptos"/>
-              </a:rPr>
-              <a:t>P5
-Loop wired</a:t>
-            </a:r>
-          </a:p>
-        </p:txBody>
-      </p:sp>
-      <p:sp>
-        <p:nvSpPr>
-          <p:cNvPr id="16" name="Rounded Rectangle 15"/>
-          <p:cNvSpPr/>
-          <p:nvPr/>
-        </p:nvSpPr>
-        <p:spPr>
-          <a:xfrm>
-            <a:off x="777240" y="2743200"/>
-            <a:ext cx="3429000" cy="2194560"/>
+            <a:off x="731520" y="1508760"/>
+            <a:ext cx="5120640" cy="1828800"/>
           </a:xfrm>
           <a:prstGeom prst="roundRect">
             <a:avLst/>
@@ -8435,370 +8745,14 @@
       </p:sp>
       <p:sp>
         <p:nvSpPr>
-          <p:cNvPr id="17" name="Rectangle 16"/>
+          <p:cNvPr id="6" name="Rectangle 5"/>
           <p:cNvSpPr/>
           <p:nvPr/>
         </p:nvSpPr>
         <p:spPr>
           <a:xfrm>
-            <a:off x="777240" y="2743200"/>
-            <a:ext cx="73152" cy="2194560"/>
-          </a:xfrm>
-          <a:prstGeom prst="rect">
-            <a:avLst/>
-          </a:prstGeom>
-          <a:solidFill>
-            <a:srgbClr val="588760"/>
-          </a:solidFill>
-          <a:ln>
-            <a:noFill/>
-          </a:ln>
-        </p:spPr>
-        <p:style>
-          <a:lnRef idx="1">
-            <a:schemeClr val="accent1"/>
-          </a:lnRef>
-          <a:fillRef idx="3">
-            <a:schemeClr val="accent1"/>
-          </a:fillRef>
-          <a:effectRef idx="2">
-            <a:schemeClr val="accent1"/>
-          </a:effectRef>
-          <a:fontRef idx="minor">
-            <a:schemeClr val="lt1"/>
-          </a:fontRef>
-        </p:style>
-        <p:txBody>
-          <a:bodyPr rtlCol="0" anchor="ctr"/>
-          <a:lstStyle/>
-          <a:p>
-            <a:pPr algn="ctr"/>
-          </a:p>
-        </p:txBody>
-      </p:sp>
-      <p:sp>
-        <p:nvSpPr>
-          <p:cNvPr id="18" name="TextBox 17"/>
-          <p:cNvSpPr txBox="1"/>
-          <p:nvPr/>
-        </p:nvSpPr>
-        <p:spPr>
-          <a:xfrm>
-            <a:off x="978408" y="2907792"/>
-            <a:ext cx="3044952" cy="1965960"/>
-          </a:xfrm>
-          <a:prstGeom prst="rect">
-            <a:avLst/>
-          </a:prstGeom>
-          <a:noFill/>
-        </p:spPr>
-        <p:txBody>
-          <a:bodyPr wrap="none">
-            <a:spAutoFit/>
-          </a:bodyPr>
-          <a:lstStyle/>
-          <a:p>
-            <a:r>
-              <a:rPr sz="1400" b="1">
-                <a:solidFill>
-                  <a:srgbClr val="203044"/>
-                </a:solidFill>
-                <a:latin typeface="Aptos"/>
-              </a:rPr>
-              <a:t>Completed / 已完成</a:t>
-            </a:r>
-          </a:p>
-          <a:p>
-            <a:pPr>
-              <a:spcBef>
-                <a:spcPts val="600"/>
-              </a:spcBef>
-              <a:defRPr sz="1100">
-                <a:solidFill>
-                  <a:srgbClr val="465260"/>
-                </a:solidFill>
-                <a:latin typeface="Aptos"/>
-              </a:defRPr>
-            </a:pPr>
-            <a:r>
-              <a:t>P0 research direction reset</a:t>
-            </a:r>
-          </a:p>
-          <a:p>
-            <a:pPr>
-              <a:spcBef>
-                <a:spcPts val="600"/>
-              </a:spcBef>
-              <a:defRPr sz="1100">
-                <a:solidFill>
-                  <a:srgbClr val="465260"/>
-                </a:solidFill>
-                <a:latin typeface="Aptos"/>
-              </a:defRPr>
-            </a:pPr>
-            <a:r>
-              <a:t>P1 smoke locality gate</a:t>
-            </a:r>
-          </a:p>
-          <a:p>
-            <a:pPr>
-              <a:spcBef>
-                <a:spcPts val="600"/>
-              </a:spcBef>
-              <a:defRPr sz="1100">
-                <a:solidFill>
-                  <a:srgbClr val="465260"/>
-                </a:solidFill>
-                <a:latin typeface="Aptos"/>
-              </a:defRPr>
-            </a:pPr>
-            <a:r>
-              <a:t>P2 self-corruption dataset tooling</a:t>
-            </a:r>
-          </a:p>
-          <a:p>
-            <a:pPr>
-              <a:spcBef>
-                <a:spcPts val="600"/>
-              </a:spcBef>
-              <a:defRPr sz="1100">
-                <a:solidFill>
-                  <a:srgbClr val="465260"/>
-                </a:solidFill>
-                <a:latin typeface="Aptos"/>
-              </a:defRPr>
-            </a:pPr>
-            <a:r>
-              <a:t>P3 baseline gate on Hard64</a:t>
-            </a:r>
-          </a:p>
-        </p:txBody>
-      </p:sp>
-      <p:sp>
-        <p:nvSpPr>
-          <p:cNvPr id="19" name="Rounded Rectangle 18"/>
-          <p:cNvSpPr/>
-          <p:nvPr/>
-        </p:nvSpPr>
-        <p:spPr>
-          <a:xfrm>
-            <a:off x="4389120" y="2743200"/>
-            <a:ext cx="3429000" cy="2194560"/>
-          </a:xfrm>
-          <a:prstGeom prst="roundRect">
-            <a:avLst/>
-          </a:prstGeom>
-          <a:solidFill>
-            <a:srgbClr val="FFFFFF"/>
-          </a:solidFill>
-          <a:ln w="10160">
-            <a:solidFill>
-              <a:srgbClr val="CDD3DB"/>
-            </a:solidFill>
-          </a:ln>
-        </p:spPr>
-        <p:style>
-          <a:lnRef idx="1">
-            <a:schemeClr val="accent1"/>
-          </a:lnRef>
-          <a:fillRef idx="3">
-            <a:schemeClr val="accent1"/>
-          </a:fillRef>
-          <a:effectRef idx="2">
-            <a:schemeClr val="accent1"/>
-          </a:effectRef>
-          <a:fontRef idx="minor">
-            <a:schemeClr val="lt1"/>
-          </a:fontRef>
-        </p:style>
-        <p:txBody>
-          <a:bodyPr rtlCol="0" anchor="ctr"/>
-          <a:lstStyle/>
-          <a:p>
-            <a:pPr algn="ctr"/>
-          </a:p>
-        </p:txBody>
-      </p:sp>
-      <p:sp>
-        <p:nvSpPr>
-          <p:cNvPr id="20" name="Rectangle 19"/>
-          <p:cNvSpPr/>
-          <p:nvPr/>
-        </p:nvSpPr>
-        <p:spPr>
-          <a:xfrm>
-            <a:off x="4389120" y="2743200"/>
-            <a:ext cx="73152" cy="2194560"/>
-          </a:xfrm>
-          <a:prstGeom prst="rect">
-            <a:avLst/>
-          </a:prstGeom>
-          <a:solidFill>
-            <a:srgbClr val="9C7A3F"/>
-          </a:solidFill>
-          <a:ln>
-            <a:noFill/>
-          </a:ln>
-        </p:spPr>
-        <p:style>
-          <a:lnRef idx="1">
-            <a:schemeClr val="accent1"/>
-          </a:lnRef>
-          <a:fillRef idx="3">
-            <a:schemeClr val="accent1"/>
-          </a:fillRef>
-          <a:effectRef idx="2">
-            <a:schemeClr val="accent1"/>
-          </a:effectRef>
-          <a:fontRef idx="minor">
-            <a:schemeClr val="lt1"/>
-          </a:fontRef>
-        </p:style>
-        <p:txBody>
-          <a:bodyPr rtlCol="0" anchor="ctr"/>
-          <a:lstStyle/>
-          <a:p>
-            <a:pPr algn="ctr"/>
-          </a:p>
-        </p:txBody>
-      </p:sp>
-      <p:sp>
-        <p:nvSpPr>
-          <p:cNvPr id="21" name="TextBox 20"/>
-          <p:cNvSpPr txBox="1"/>
-          <p:nvPr/>
-        </p:nvSpPr>
-        <p:spPr>
-          <a:xfrm>
-            <a:off x="4590288" y="2907792"/>
-            <a:ext cx="3044952" cy="1965960"/>
-          </a:xfrm>
-          <a:prstGeom prst="rect">
-            <a:avLst/>
-          </a:prstGeom>
-          <a:noFill/>
-        </p:spPr>
-        <p:txBody>
-          <a:bodyPr wrap="none">
-            <a:spAutoFit/>
-          </a:bodyPr>
-          <a:lstStyle/>
-          <a:p>
-            <a:r>
-              <a:rPr sz="1400" b="1">
-                <a:solidFill>
-                  <a:srgbClr val="203044"/>
-                </a:solidFill>
-                <a:latin typeface="Aptos"/>
-              </a:rPr>
-              <a:t>In progress / 进行中</a:t>
-            </a:r>
-          </a:p>
-          <a:p>
-            <a:pPr>
-              <a:spcBef>
-                <a:spcPts val="600"/>
-              </a:spcBef>
-              <a:defRPr sz="1100">
-                <a:solidFill>
-                  <a:srgbClr val="465260"/>
-                </a:solidFill>
-                <a:latin typeface="Aptos"/>
-              </a:defRPr>
-            </a:pPr>
-            <a:r>
-              <a:t>P4 repair_cells LoRA is runnable</a:t>
-            </a:r>
-          </a:p>
-          <a:p>
-            <a:pPr>
-              <a:spcBef>
-                <a:spcPts val="600"/>
-              </a:spcBef>
-              <a:defRPr sz="1100">
-                <a:solidFill>
-                  <a:srgbClr val="465260"/>
-                </a:solidFill>
-                <a:latin typeface="Aptos"/>
-              </a:defRPr>
-            </a:pPr>
-            <a:r>
-              <a:t>Format still unstable</a:t>
-            </a:r>
-          </a:p>
-          <a:p>
-            <a:pPr>
-              <a:spcBef>
-                <a:spcPts val="600"/>
-              </a:spcBef>
-              <a:defRPr sz="1100">
-                <a:solidFill>
-                  <a:srgbClr val="465260"/>
-                </a:solidFill>
-                <a:latin typeface="Aptos"/>
-              </a:defRPr>
-            </a:pPr>
-            <a:r>
-              <a:t>Localization quality is the blocker</a:t>
-            </a:r>
-          </a:p>
-        </p:txBody>
-      </p:sp>
-      <p:sp>
-        <p:nvSpPr>
-          <p:cNvPr id="22" name="Rounded Rectangle 21"/>
-          <p:cNvSpPr/>
-          <p:nvPr/>
-        </p:nvSpPr>
-        <p:spPr>
-          <a:xfrm>
-            <a:off x="8001000" y="2743200"/>
-            <a:ext cx="3429000" cy="2194560"/>
-          </a:xfrm>
-          <a:prstGeom prst="roundRect">
-            <a:avLst/>
-          </a:prstGeom>
-          <a:solidFill>
-            <a:srgbClr val="FFFFFF"/>
-          </a:solidFill>
-          <a:ln w="10160">
-            <a:solidFill>
-              <a:srgbClr val="CDD3DB"/>
-            </a:solidFill>
-          </a:ln>
-        </p:spPr>
-        <p:style>
-          <a:lnRef idx="1">
-            <a:schemeClr val="accent1"/>
-          </a:lnRef>
-          <a:fillRef idx="3">
-            <a:schemeClr val="accent1"/>
-          </a:fillRef>
-          <a:effectRef idx="2">
-            <a:schemeClr val="accent1"/>
-          </a:effectRef>
-          <a:fontRef idx="minor">
-            <a:schemeClr val="lt1"/>
-          </a:fontRef>
-        </p:style>
-        <p:txBody>
-          <a:bodyPr rtlCol="0" anchor="ctr"/>
-          <a:lstStyle/>
-          <a:p>
-            <a:pPr algn="ctr"/>
-          </a:p>
-        </p:txBody>
-      </p:sp>
-      <p:sp>
-        <p:nvSpPr>
-          <p:cNvPr id="23" name="Rectangle 22"/>
-          <p:cNvSpPr/>
-          <p:nvPr/>
-        </p:nvSpPr>
-        <p:spPr>
-          <a:xfrm>
-            <a:off x="8001000" y="2743200"/>
-            <a:ext cx="73152" cy="2194560"/>
+            <a:off x="731520" y="1508760"/>
+            <a:ext cx="73152" cy="1828800"/>
           </a:xfrm>
           <a:prstGeom prst="rect">
             <a:avLst/>
@@ -8834,14 +8788,14 @@
       </p:sp>
       <p:sp>
         <p:nvSpPr>
-          <p:cNvPr id="24" name="TextBox 23"/>
+          <p:cNvPr id="7" name="TextBox 6"/>
           <p:cNvSpPr txBox="1"/>
           <p:nvPr/>
         </p:nvSpPr>
         <p:spPr>
           <a:xfrm>
-            <a:off x="8202168" y="2907792"/>
-            <a:ext cx="3044952" cy="1965960"/>
+            <a:off x="932688" y="1673352"/>
+            <a:ext cx="4736592" cy="1600200"/>
           </a:xfrm>
           <a:prstGeom prst="rect">
             <a:avLst/>
@@ -8861,8 +8815,14 @@
                 </a:solidFill>
                 <a:latin typeface="Aptos"/>
               </a:rPr>
-              <a:t>Next / 下一步</a:t>
-            </a:r>
+              <a:t>Research framing</a:t>
+            </a:r>
+            <a:endParaRPr sz="1400" b="1">
+              <a:solidFill>
+                <a:srgbClr val="203044"/>
+              </a:solidFill>
+              <a:latin typeface="Aptos"/>
+            </a:endParaRPr>
           </a:p>
           <a:p>
             <a:pPr>
@@ -8877,7 +8837,7 @@
               </a:defRPr>
             </a:pPr>
             <a:r>
-              <a:t>P5 loop engineering verified</a:t>
+              <a:t>Mainline: self-corrupted token repair</a:t>
             </a:r>
           </a:p>
           <a:p>
@@ -8893,7 +8853,7 @@
               </a:defRPr>
             </a:pPr>
             <a:r>
-              <a:t>Run oracle upper bound</a:t>
+              <a:t>Conservative claim: local repair signal, not general intelligence</a:t>
             </a:r>
           </a:p>
           <a:p>
@@ -8909,14 +8869,267 @@
               </a:defRPr>
             </a:pPr>
             <a:r>
-              <a:t>Compare image-space teacher loop</a:t>
-            </a:r>
-          </a:p>
-        </p:txBody>
-      </p:sp>
-      <p:sp>
-        <p:nvSpPr>
-          <p:cNvPr id="25" name="TextBox 24"/>
+              <a:t>Stage 2 JSON evaluator remains separate</a:t>
+            </a:r>
+          </a:p>
+        </p:txBody>
+      </p:sp>
+      <p:sp>
+        <p:nvSpPr>
+          <p:cNvPr id="11" name="Rounded Rectangle 10"/>
+          <p:cNvSpPr/>
+          <p:nvPr/>
+        </p:nvSpPr>
+        <p:spPr>
+          <a:xfrm>
+            <a:off x="1005840" y="4160520"/>
+            <a:ext cx="2011680" cy="685800"/>
+          </a:xfrm>
+          <a:prstGeom prst="roundRect">
+            <a:avLst/>
+          </a:prstGeom>
+          <a:solidFill>
+            <a:srgbClr val="FFFFFF"/>
+          </a:solidFill>
+          <a:ln w="11430">
+            <a:solidFill>
+              <a:srgbClr val="CDD3DB"/>
+            </a:solidFill>
+          </a:ln>
+        </p:spPr>
+        <p:style>
+          <a:lnRef idx="1">
+            <a:schemeClr val="accent1"/>
+          </a:lnRef>
+          <a:fillRef idx="3">
+            <a:schemeClr val="accent1"/>
+          </a:fillRef>
+          <a:effectRef idx="2">
+            <a:schemeClr val="accent1"/>
+          </a:effectRef>
+          <a:fontRef idx="minor">
+            <a:schemeClr val="lt1"/>
+          </a:fontRef>
+        </p:style>
+        <p:txBody>
+          <a:bodyPr rtlCol="0" anchor="ctr"/>
+          <a:lstStyle/>
+          <a:p>
+            <a:pPr algn="ctr"/>
+            <a:r>
+              <a:rPr sz="1200" b="1">
+                <a:solidFill>
+                  <a:srgbClr val="697380"/>
+                </a:solidFill>
+                <a:latin typeface="Aptos"/>
+              </a:rPr>
+              <a:t>Prompt + image
+Stage 2 path</a:t>
+            </a:r>
+            <a:endParaRPr sz="1200" b="1">
+              <a:solidFill>
+                <a:srgbClr val="697380"/>
+              </a:solidFill>
+              <a:latin typeface="Aptos"/>
+            </a:endParaRPr>
+          </a:p>
+        </p:txBody>
+      </p:sp>
+      <p:sp>
+        <p:nvSpPr>
+          <p:cNvPr id="12" name="Rounded Rectangle 11"/>
+          <p:cNvSpPr/>
+          <p:nvPr/>
+        </p:nvSpPr>
+        <p:spPr>
+          <a:xfrm>
+            <a:off x="5074920" y="4160520"/>
+            <a:ext cx="2011680" cy="685800"/>
+          </a:xfrm>
+          <a:prstGeom prst="roundRect">
+            <a:avLst/>
+          </a:prstGeom>
+          <a:solidFill>
+            <a:srgbClr val="FFFFFF"/>
+          </a:solidFill>
+          <a:ln w="11430">
+            <a:solidFill>
+              <a:srgbClr val="CDD3DB"/>
+            </a:solidFill>
+          </a:ln>
+        </p:spPr>
+        <p:style>
+          <a:lnRef idx="1">
+            <a:schemeClr val="accent1"/>
+          </a:lnRef>
+          <a:fillRef idx="3">
+            <a:schemeClr val="accent1"/>
+          </a:fillRef>
+          <a:effectRef idx="2">
+            <a:schemeClr val="accent1"/>
+          </a:effectRef>
+          <a:fontRef idx="minor">
+            <a:schemeClr val="lt1"/>
+          </a:fontRef>
+        </p:style>
+        <p:txBody>
+          <a:bodyPr rtlCol="0" anchor="ctr"/>
+          <a:lstStyle/>
+          <a:p>
+            <a:pPr algn="ctr"/>
+            <a:r>
+              <a:rPr sz="1200" b="1">
+                <a:solidFill>
+                  <a:srgbClr val="426792"/>
+                </a:solidFill>
+                <a:latin typeface="Aptos"/>
+              </a:rPr>
+              <a:t>Prompt + corrupted
+VQ tokens</a:t>
+            </a:r>
+            <a:endParaRPr sz="1200" b="1">
+              <a:solidFill>
+                <a:srgbClr val="426792"/>
+              </a:solidFill>
+              <a:latin typeface="Aptos"/>
+            </a:endParaRPr>
+          </a:p>
+        </p:txBody>
+      </p:sp>
+      <p:sp>
+        <p:nvSpPr>
+          <p:cNvPr id="13" name="Rounded Rectangle 12"/>
+          <p:cNvSpPr/>
+          <p:nvPr/>
+        </p:nvSpPr>
+        <p:spPr>
+          <a:xfrm>
+            <a:off x="9144000" y="4160520"/>
+            <a:ext cx="2011680" cy="685800"/>
+          </a:xfrm>
+          <a:prstGeom prst="roundRect">
+            <a:avLst/>
+          </a:prstGeom>
+          <a:solidFill>
+            <a:srgbClr val="FFFFFF"/>
+          </a:solidFill>
+          <a:ln w="11430">
+            <a:solidFill>
+              <a:srgbClr val="CDD3DB"/>
+            </a:solidFill>
+          </a:ln>
+        </p:spPr>
+        <p:style>
+          <a:lnRef idx="1">
+            <a:schemeClr val="accent1"/>
+          </a:lnRef>
+          <a:fillRef idx="3">
+            <a:schemeClr val="accent1"/>
+          </a:fillRef>
+          <a:effectRef idx="2">
+            <a:schemeClr val="accent1"/>
+          </a:effectRef>
+          <a:fontRef idx="minor">
+            <a:schemeClr val="lt1"/>
+          </a:fontRef>
+        </p:style>
+        <p:txBody>
+          <a:bodyPr rtlCol="0" anchor="ctr"/>
+          <a:lstStyle/>
+          <a:p>
+            <a:pPr algn="ctr"/>
+            <a:r>
+              <a:rPr sz="1200" b="1">
+                <a:solidFill>
+                  <a:srgbClr val="4E817C"/>
+                </a:solidFill>
+                <a:latin typeface="Aptos"/>
+              </a:rPr>
+              <a:t>TokenReopenMask
+Stage 3 path</a:t>
+            </a:r>
+            <a:endParaRPr sz="1200" b="1">
+              <a:solidFill>
+                <a:srgbClr val="4E817C"/>
+              </a:solidFill>
+              <a:latin typeface="Aptos"/>
+            </a:endParaRPr>
+          </a:p>
+        </p:txBody>
+      </p:sp>
+      <p:cxnSp>
+        <p:nvCxnSpPr>
+          <p:cNvPr id="14" name="Connector 13"/>
+          <p:cNvCxnSpPr/>
+          <p:nvPr/>
+        </p:nvCxnSpPr>
+        <p:spPr>
+          <a:xfrm>
+            <a:off x="3063240" y="4507992"/>
+            <a:ext cx="1920240" cy="0"/>
+          </a:xfrm>
+          <a:prstGeom prst="line">
+            <a:avLst/>
+          </a:prstGeom>
+          <a:ln w="20320">
+            <a:solidFill>
+              <a:srgbClr val="465260"/>
+            </a:solidFill>
+          </a:ln>
+        </p:spPr>
+        <p:style>
+          <a:lnRef idx="2">
+            <a:schemeClr val="accent1"/>
+          </a:lnRef>
+          <a:fillRef idx="0">
+            <a:schemeClr val="accent1"/>
+          </a:fillRef>
+          <a:effectRef idx="1">
+            <a:schemeClr val="accent1"/>
+          </a:effectRef>
+          <a:fontRef idx="minor">
+            <a:schemeClr val="tx1"/>
+          </a:fontRef>
+        </p:style>
+      </p:cxnSp>
+      <p:cxnSp>
+        <p:nvCxnSpPr>
+          <p:cNvPr id="15" name="Connector 14"/>
+          <p:cNvCxnSpPr/>
+          <p:nvPr/>
+        </p:nvCxnSpPr>
+        <p:spPr>
+          <a:xfrm>
+            <a:off x="7132320" y="4507992"/>
+            <a:ext cx="1920240" cy="0"/>
+          </a:xfrm>
+          <a:prstGeom prst="line">
+            <a:avLst/>
+          </a:prstGeom>
+          <a:ln w="20320">
+            <a:solidFill>
+              <a:srgbClr val="465260"/>
+            </a:solidFill>
+          </a:ln>
+        </p:spPr>
+        <p:style>
+          <a:lnRef idx="2">
+            <a:schemeClr val="accent1"/>
+          </a:lnRef>
+          <a:fillRef idx="0">
+            <a:schemeClr val="accent1"/>
+          </a:fillRef>
+          <a:effectRef idx="1">
+            <a:schemeClr val="accent1"/>
+          </a:effectRef>
+          <a:fontRef idx="minor">
+            <a:schemeClr val="tx1"/>
+          </a:fontRef>
+        </p:style>
+      </p:cxnSp>
+      <p:sp>
+        <p:nvSpPr>
+          <p:cNvPr id="16" name="TextBox 15"/>
           <p:cNvSpPr txBox="1"/>
           <p:nvPr/>
         </p:nvSpPr>
@@ -8944,8 +9157,14 @@
                 </a:solidFill>
                 <a:latin typeface="Aptos"/>
               </a:rPr>
-              <a:t>ASCR Stage 3 weekly update | Page 3</a:t>
-            </a:r>
+              <a:t>ASCR Stage 3 weekly update | Page 4</a:t>
+            </a:r>
+            <a:endParaRPr sz="800" b="0">
+              <a:solidFill>
+                <a:srgbClr val="697380"/>
+              </a:solidFill>
+              <a:latin typeface="Aptos"/>
+            </a:endParaRPr>
           </a:p>
         </p:txBody>
       </p:sp>
@@ -8957,8 +9176,8 @@
 </p:sld>
 </file>
 
-<file path=ppt/slides/slide4.xml><?xml version="1.0" encoding="utf-8"?>
-<p:sld xmlns:a="http://schemas.openxmlformats.org/drawingml/2006/main" xmlns:p="http://schemas.openxmlformats.org/presentationml/2006/main" xmlns:r="http://schemas.openxmlformats.org/officeDocument/2006/relationships">
+<file path=ppt/slides/slide5.xml><?xml version="1.0" encoding="utf-8"?>
+<p:sld xmlns:a="http://schemas.openxmlformats.org/drawingml/2006/main" xmlns:r="http://schemas.openxmlformats.org/officeDocument/2006/relationships" xmlns:p="http://schemas.openxmlformats.org/presentationml/2006/main">
   <p:cSld>
     <p:bg>
       <p:bgPr>
@@ -9005,8 +9224,14 @@
                 </a:solidFill>
                 <a:latin typeface="Aptos"/>
               </a:rPr>
-              <a:t>Phase 0: Direction Reset / 方向重置</a:t>
-            </a:r>
+              <a:t>Phase 1: Token Locality Probe / 局部性验证</a:t>
+            </a:r>
+            <a:endParaRPr sz="2400" b="1">
+              <a:solidFill>
+                <a:srgbClr val="203044"/>
+              </a:solidFill>
+              <a:latin typeface="Aptos"/>
+            </a:endParaRPr>
           </a:p>
         </p:txBody>
       </p:sp>
@@ -9040,8 +9265,14 @@
                 </a:solidFill>
                 <a:latin typeface="Aptos"/>
               </a:rPr>
-              <a:t>Old cross-model Stage 3 is no longer the mainline</a:t>
-            </a:r>
+              <a:t>Before training, check whether token corruption has local visual effects</a:t>
+            </a:r>
+            <a:endParaRPr sz="1000" b="0">
+              <a:solidFill>
+                <a:srgbClr val="697380"/>
+              </a:solidFill>
+              <a:latin typeface="Aptos"/>
+            </a:endParaRPr>
           </a:p>
         </p:txBody>
       </p:sp>
@@ -9096,8 +9327,448 @@
         </p:nvSpPr>
         <p:spPr>
           <a:xfrm>
-            <a:off x="731520" y="1508760"/>
-            <a:ext cx="5120640" cy="1828800"/>
+            <a:off x="777240" y="1600200"/>
+            <a:ext cx="1691640" cy="658368"/>
+          </a:xfrm>
+          <a:prstGeom prst="roundRect">
+            <a:avLst/>
+          </a:prstGeom>
+          <a:solidFill>
+            <a:srgbClr val="FFFFFF"/>
+          </a:solidFill>
+          <a:ln w="11430">
+            <a:solidFill>
+              <a:srgbClr val="CDD3DB"/>
+            </a:solidFill>
+          </a:ln>
+        </p:spPr>
+        <p:style>
+          <a:lnRef idx="1">
+            <a:schemeClr val="accent1"/>
+          </a:lnRef>
+          <a:fillRef idx="3">
+            <a:schemeClr val="accent1"/>
+          </a:fillRef>
+          <a:effectRef idx="2">
+            <a:schemeClr val="accent1"/>
+          </a:effectRef>
+          <a:fontRef idx="minor">
+            <a:schemeClr val="lt1"/>
+          </a:fontRef>
+        </p:style>
+        <p:txBody>
+          <a:bodyPr rtlCol="0" anchor="ctr"/>
+          <a:lstStyle/>
+          <a:p>
+            <a:pPr algn="ctr"/>
+            <a:r>
+              <a:rPr sz="1200" b="1">
+                <a:solidFill>
+                  <a:srgbClr val="426792"/>
+                </a:solidFill>
+                <a:latin typeface="Aptos"/>
+              </a:rPr>
+              <a:t>Clean tokens</a:t>
+            </a:r>
+            <a:endParaRPr sz="1200" b="1">
+              <a:solidFill>
+                <a:srgbClr val="426792"/>
+              </a:solidFill>
+              <a:latin typeface="Aptos"/>
+            </a:endParaRPr>
+          </a:p>
+        </p:txBody>
+      </p:sp>
+      <p:cxnSp>
+        <p:nvCxnSpPr>
+          <p:cNvPr id="6" name="Connector 5"/>
+          <p:cNvCxnSpPr/>
+          <p:nvPr/>
+        </p:nvCxnSpPr>
+        <p:spPr>
+          <a:xfrm>
+            <a:off x="2468880" y="1929384"/>
+            <a:ext cx="411480" cy="0"/>
+          </a:xfrm>
+          <a:prstGeom prst="line">
+            <a:avLst/>
+          </a:prstGeom>
+          <a:ln w="20320">
+            <a:solidFill>
+              <a:srgbClr val="465260"/>
+            </a:solidFill>
+          </a:ln>
+        </p:spPr>
+        <p:style>
+          <a:lnRef idx="2">
+            <a:schemeClr val="accent1"/>
+          </a:lnRef>
+          <a:fillRef idx="0">
+            <a:schemeClr val="accent1"/>
+          </a:fillRef>
+          <a:effectRef idx="1">
+            <a:schemeClr val="accent1"/>
+          </a:effectRef>
+          <a:fontRef idx="minor">
+            <a:schemeClr val="tx1"/>
+          </a:fontRef>
+        </p:style>
+      </p:cxnSp>
+      <p:sp>
+        <p:nvSpPr>
+          <p:cNvPr id="7" name="Rounded Rectangle 6"/>
+          <p:cNvSpPr/>
+          <p:nvPr/>
+        </p:nvSpPr>
+        <p:spPr>
+          <a:xfrm>
+            <a:off x="2971800" y="1600200"/>
+            <a:ext cx="1691640" cy="658368"/>
+          </a:xfrm>
+          <a:prstGeom prst="roundRect">
+            <a:avLst/>
+          </a:prstGeom>
+          <a:solidFill>
+            <a:srgbClr val="FFFFFF"/>
+          </a:solidFill>
+          <a:ln w="11430">
+            <a:solidFill>
+              <a:srgbClr val="CDD3DB"/>
+            </a:solidFill>
+          </a:ln>
+        </p:spPr>
+        <p:style>
+          <a:lnRef idx="1">
+            <a:schemeClr val="accent1"/>
+          </a:lnRef>
+          <a:fillRef idx="3">
+            <a:schemeClr val="accent1"/>
+          </a:fillRef>
+          <a:effectRef idx="2">
+            <a:schemeClr val="accent1"/>
+          </a:effectRef>
+          <a:fontRef idx="minor">
+            <a:schemeClr val="lt1"/>
+          </a:fontRef>
+        </p:style>
+        <p:txBody>
+          <a:bodyPr rtlCol="0" anchor="ctr"/>
+          <a:lstStyle/>
+          <a:p>
+            <a:pPr algn="ctr"/>
+            <a:r>
+              <a:rPr sz="1200" b="1">
+                <a:solidFill>
+                  <a:srgbClr val="9C7A3F"/>
+                </a:solidFill>
+                <a:latin typeface="Aptos"/>
+              </a:rPr>
+              <a:t>Corrupt block</a:t>
+            </a:r>
+            <a:endParaRPr sz="1200" b="1">
+              <a:solidFill>
+                <a:srgbClr val="9C7A3F"/>
+              </a:solidFill>
+              <a:latin typeface="Aptos"/>
+            </a:endParaRPr>
+          </a:p>
+        </p:txBody>
+      </p:sp>
+      <p:cxnSp>
+        <p:nvCxnSpPr>
+          <p:cNvPr id="8" name="Connector 7"/>
+          <p:cNvCxnSpPr/>
+          <p:nvPr/>
+        </p:nvCxnSpPr>
+        <p:spPr>
+          <a:xfrm>
+            <a:off x="4663440" y="1929384"/>
+            <a:ext cx="411480" cy="0"/>
+          </a:xfrm>
+          <a:prstGeom prst="line">
+            <a:avLst/>
+          </a:prstGeom>
+          <a:ln w="20320">
+            <a:solidFill>
+              <a:srgbClr val="465260"/>
+            </a:solidFill>
+          </a:ln>
+        </p:spPr>
+        <p:style>
+          <a:lnRef idx="2">
+            <a:schemeClr val="accent1"/>
+          </a:lnRef>
+          <a:fillRef idx="0">
+            <a:schemeClr val="accent1"/>
+          </a:fillRef>
+          <a:effectRef idx="1">
+            <a:schemeClr val="accent1"/>
+          </a:effectRef>
+          <a:fontRef idx="minor">
+            <a:schemeClr val="tx1"/>
+          </a:fontRef>
+        </p:style>
+      </p:cxnSp>
+      <p:sp>
+        <p:nvSpPr>
+          <p:cNvPr id="9" name="Rounded Rectangle 8"/>
+          <p:cNvSpPr/>
+          <p:nvPr/>
+        </p:nvSpPr>
+        <p:spPr>
+          <a:xfrm>
+            <a:off x="5166359" y="1600200"/>
+            <a:ext cx="1691640" cy="658368"/>
+          </a:xfrm>
+          <a:prstGeom prst="roundRect">
+            <a:avLst/>
+          </a:prstGeom>
+          <a:solidFill>
+            <a:srgbClr val="FFFFFF"/>
+          </a:solidFill>
+          <a:ln w="11430">
+            <a:solidFill>
+              <a:srgbClr val="CDD3DB"/>
+            </a:solidFill>
+          </a:ln>
+        </p:spPr>
+        <p:style>
+          <a:lnRef idx="1">
+            <a:schemeClr val="accent1"/>
+          </a:lnRef>
+          <a:fillRef idx="3">
+            <a:schemeClr val="accent1"/>
+          </a:fillRef>
+          <a:effectRef idx="2">
+            <a:schemeClr val="accent1"/>
+          </a:effectRef>
+          <a:fontRef idx="minor">
+            <a:schemeClr val="lt1"/>
+          </a:fontRef>
+        </p:style>
+        <p:txBody>
+          <a:bodyPr rtlCol="0" anchor="ctr"/>
+          <a:lstStyle/>
+          <a:p>
+            <a:pPr algn="ctr"/>
+            <a:r>
+              <a:rPr sz="1200" b="1">
+                <a:solidFill>
+                  <a:srgbClr val="4E817C"/>
+                </a:solidFill>
+                <a:latin typeface="Aptos"/>
+              </a:rPr>
+              <a:t>Decode</a:t>
+            </a:r>
+            <a:endParaRPr sz="1200" b="1">
+              <a:solidFill>
+                <a:srgbClr val="4E817C"/>
+              </a:solidFill>
+              <a:latin typeface="Aptos"/>
+            </a:endParaRPr>
+          </a:p>
+        </p:txBody>
+      </p:sp>
+      <p:cxnSp>
+        <p:nvCxnSpPr>
+          <p:cNvPr id="10" name="Connector 9"/>
+          <p:cNvCxnSpPr/>
+          <p:nvPr/>
+        </p:nvCxnSpPr>
+        <p:spPr>
+          <a:xfrm>
+            <a:off x="6858000" y="1929384"/>
+            <a:ext cx="411479" cy="0"/>
+          </a:xfrm>
+          <a:prstGeom prst="line">
+            <a:avLst/>
+          </a:prstGeom>
+          <a:ln w="20320">
+            <a:solidFill>
+              <a:srgbClr val="465260"/>
+            </a:solidFill>
+          </a:ln>
+        </p:spPr>
+        <p:style>
+          <a:lnRef idx="2">
+            <a:schemeClr val="accent1"/>
+          </a:lnRef>
+          <a:fillRef idx="0">
+            <a:schemeClr val="accent1"/>
+          </a:fillRef>
+          <a:effectRef idx="1">
+            <a:schemeClr val="accent1"/>
+          </a:effectRef>
+          <a:fontRef idx="minor">
+            <a:schemeClr val="tx1"/>
+          </a:fontRef>
+        </p:style>
+      </p:cxnSp>
+      <p:sp>
+        <p:nvSpPr>
+          <p:cNvPr id="11" name="Rounded Rectangle 10"/>
+          <p:cNvSpPr/>
+          <p:nvPr/>
+        </p:nvSpPr>
+        <p:spPr>
+          <a:xfrm>
+            <a:off x="7360919" y="1600200"/>
+            <a:ext cx="1691640" cy="658368"/>
+          </a:xfrm>
+          <a:prstGeom prst="roundRect">
+            <a:avLst/>
+          </a:prstGeom>
+          <a:solidFill>
+            <a:srgbClr val="FFFFFF"/>
+          </a:solidFill>
+          <a:ln w="11430">
+            <a:solidFill>
+              <a:srgbClr val="CDD3DB"/>
+            </a:solidFill>
+          </a:ln>
+        </p:spPr>
+        <p:style>
+          <a:lnRef idx="1">
+            <a:schemeClr val="accent1"/>
+          </a:lnRef>
+          <a:fillRef idx="3">
+            <a:schemeClr val="accent1"/>
+          </a:fillRef>
+          <a:effectRef idx="2">
+            <a:schemeClr val="accent1"/>
+          </a:effectRef>
+          <a:fontRef idx="minor">
+            <a:schemeClr val="lt1"/>
+          </a:fontRef>
+        </p:style>
+        <p:txBody>
+          <a:bodyPr rtlCol="0" anchor="ctr"/>
+          <a:lstStyle/>
+          <a:p>
+            <a:pPr algn="ctr"/>
+            <a:r>
+              <a:rPr sz="1200" b="1">
+                <a:solidFill>
+                  <a:srgbClr val="9E5B5B"/>
+                </a:solidFill>
+                <a:latin typeface="Aptos"/>
+              </a:rPr>
+              <a:t>Difference map</a:t>
+            </a:r>
+            <a:endParaRPr sz="1200" b="1">
+              <a:solidFill>
+                <a:srgbClr val="9E5B5B"/>
+              </a:solidFill>
+              <a:latin typeface="Aptos"/>
+            </a:endParaRPr>
+          </a:p>
+        </p:txBody>
+      </p:sp>
+      <p:cxnSp>
+        <p:nvCxnSpPr>
+          <p:cNvPr id="12" name="Connector 11"/>
+          <p:cNvCxnSpPr/>
+          <p:nvPr/>
+        </p:nvCxnSpPr>
+        <p:spPr>
+          <a:xfrm>
+            <a:off x="9052559" y="1929384"/>
+            <a:ext cx="411481" cy="0"/>
+          </a:xfrm>
+          <a:prstGeom prst="line">
+            <a:avLst/>
+          </a:prstGeom>
+          <a:ln w="20320">
+            <a:solidFill>
+              <a:srgbClr val="465260"/>
+            </a:solidFill>
+          </a:ln>
+        </p:spPr>
+        <p:style>
+          <a:lnRef idx="2">
+            <a:schemeClr val="accent1"/>
+          </a:lnRef>
+          <a:fillRef idx="0">
+            <a:schemeClr val="accent1"/>
+          </a:fillRef>
+          <a:effectRef idx="1">
+            <a:schemeClr val="accent1"/>
+          </a:effectRef>
+          <a:fontRef idx="minor">
+            <a:schemeClr val="tx1"/>
+          </a:fontRef>
+        </p:style>
+      </p:cxnSp>
+      <p:sp>
+        <p:nvSpPr>
+          <p:cNvPr id="13" name="Rounded Rectangle 12"/>
+          <p:cNvSpPr/>
+          <p:nvPr/>
+        </p:nvSpPr>
+        <p:spPr>
+          <a:xfrm>
+            <a:off x="9555480" y="1600200"/>
+            <a:ext cx="1691640" cy="658368"/>
+          </a:xfrm>
+          <a:prstGeom prst="roundRect">
+            <a:avLst/>
+          </a:prstGeom>
+          <a:solidFill>
+            <a:srgbClr val="FFFFFF"/>
+          </a:solidFill>
+          <a:ln w="11430">
+            <a:solidFill>
+              <a:srgbClr val="CDD3DB"/>
+            </a:solidFill>
+          </a:ln>
+        </p:spPr>
+        <p:style>
+          <a:lnRef idx="1">
+            <a:schemeClr val="accent1"/>
+          </a:lnRef>
+          <a:fillRef idx="3">
+            <a:schemeClr val="accent1"/>
+          </a:fillRef>
+          <a:effectRef idx="2">
+            <a:schemeClr val="accent1"/>
+          </a:effectRef>
+          <a:fontRef idx="minor">
+            <a:schemeClr val="lt1"/>
+          </a:fontRef>
+        </p:style>
+        <p:txBody>
+          <a:bodyPr rtlCol="0" anchor="ctr"/>
+          <a:lstStyle/>
+          <a:p>
+            <a:pPr algn="ctr"/>
+            <a:r>
+              <a:rPr sz="1200" b="1">
+                <a:solidFill>
+                  <a:srgbClr val="588760"/>
+                </a:solidFill>
+                <a:latin typeface="Aptos"/>
+              </a:rPr>
+              <a:t>Locality metrics</a:t>
+            </a:r>
+            <a:endParaRPr sz="1200" b="1">
+              <a:solidFill>
+                <a:srgbClr val="588760"/>
+              </a:solidFill>
+              <a:latin typeface="Aptos"/>
+            </a:endParaRPr>
+          </a:p>
+        </p:txBody>
+      </p:sp>
+      <p:sp>
+        <p:nvSpPr>
+          <p:cNvPr id="14" name="Rounded Rectangle 13"/>
+          <p:cNvSpPr/>
+          <p:nvPr/>
+        </p:nvSpPr>
+        <p:spPr>
+          <a:xfrm>
+            <a:off x="777240" y="3063240"/>
+            <a:ext cx="5120640" cy="2103120"/>
           </a:xfrm>
           <a:prstGeom prst="roundRect">
             <a:avLst/>
@@ -9135,14 +9806,14 @@
       </p:sp>
       <p:sp>
         <p:nvSpPr>
-          <p:cNvPr id="6" name="Rectangle 5"/>
+          <p:cNvPr id="15" name="Rectangle 14"/>
           <p:cNvSpPr/>
           <p:nvPr/>
         </p:nvSpPr>
         <p:spPr>
           <a:xfrm>
-            <a:off x="731520" y="1508760"/>
-            <a:ext cx="73152" cy="1828800"/>
+            <a:off x="777240" y="3063240"/>
+            <a:ext cx="73152" cy="2103120"/>
           </a:xfrm>
           <a:prstGeom prst="rect">
             <a:avLst/>
@@ -9178,14 +9849,14 @@
       </p:sp>
       <p:sp>
         <p:nvSpPr>
-          <p:cNvPr id="7" name="TextBox 6"/>
+          <p:cNvPr id="16" name="TextBox 15"/>
           <p:cNvSpPr txBox="1"/>
           <p:nvPr/>
         </p:nvSpPr>
         <p:spPr>
           <a:xfrm>
-            <a:off x="932688" y="1673352"/>
-            <a:ext cx="4736592" cy="1600200"/>
+            <a:off x="978408" y="3227832"/>
+            <a:ext cx="4736592" cy="1874520"/>
           </a:xfrm>
           <a:prstGeom prst="rect">
             <a:avLst/>
@@ -9205,8 +9876,14 @@
                 </a:solidFill>
                 <a:latin typeface="Aptos"/>
               </a:rPr>
-              <a:t>Research framing</a:t>
-            </a:r>
+              <a:t>Implemented</a:t>
+            </a:r>
+            <a:endParaRPr sz="1400" b="1">
+              <a:solidFill>
+                <a:srgbClr val="203044"/>
+              </a:solidFill>
+              <a:latin typeface="Aptos"/>
+            </a:endParaRPr>
           </a:p>
           <a:p>
             <a:pPr>
@@ -9221,7 +9898,7 @@
               </a:defRPr>
             </a:pPr>
             <a:r>
-              <a:t>Mainline: self-corrupted token repair</a:t>
+              <a:t>Corruptors: random_replace, local_shuffle, neighbor_copy, transplant</a:t>
             </a:r>
           </a:p>
           <a:p>
@@ -9237,7 +9914,7 @@
               </a:defRPr>
             </a:pPr>
             <a:r>
-              <a:t>Conservative claim: local repair signal, not general intelligence</a:t>
+              <a:t>Metrics: inside energy, top-1/top-k hit, radius</a:t>
             </a:r>
           </a:p>
           <a:p>
@@ -9253,21 +9930,21 @@
               </a:defRPr>
             </a:pPr>
             <a:r>
-              <a:t>Stage 2 JSON evaluator remains separate</a:t>
-            </a:r>
-          </a:p>
-        </p:txBody>
-      </p:sp>
-      <p:sp>
-        <p:nvSpPr>
-          <p:cNvPr id="8" name="Rounded Rectangle 7"/>
+              <a:t>Outputs: manifest, summary, heatmaps, images, tokens</a:t>
+            </a:r>
+          </a:p>
+        </p:txBody>
+      </p:sp>
+      <p:sp>
+        <p:nvSpPr>
+          <p:cNvPr id="17" name="Rounded Rectangle 16"/>
           <p:cNvSpPr/>
           <p:nvPr/>
         </p:nvSpPr>
         <p:spPr>
           <a:xfrm>
-            <a:off x="6309360" y="1508760"/>
-            <a:ext cx="5120640" cy="1828800"/>
+            <a:off x="6309360" y="3063240"/>
+            <a:ext cx="5120640" cy="2103120"/>
           </a:xfrm>
           <a:prstGeom prst="roundRect">
             <a:avLst/>
@@ -9305,20 +9982,20 @@
       </p:sp>
       <p:sp>
         <p:nvSpPr>
-          <p:cNvPr id="9" name="Rectangle 8"/>
+          <p:cNvPr id="18" name="Rectangle 17"/>
           <p:cNvSpPr/>
           <p:nvPr/>
         </p:nvSpPr>
         <p:spPr>
           <a:xfrm>
-            <a:off x="6309360" y="1508760"/>
-            <a:ext cx="73152" cy="1828800"/>
+            <a:off x="6309360" y="3063240"/>
+            <a:ext cx="73152" cy="2103120"/>
           </a:xfrm>
           <a:prstGeom prst="rect">
             <a:avLst/>
           </a:prstGeom>
           <a:solidFill>
-            <a:srgbClr val="4E817C"/>
+            <a:srgbClr val="588760"/>
           </a:solidFill>
           <a:ln>
             <a:noFill/>
@@ -9348,14 +10025,14 @@
       </p:sp>
       <p:sp>
         <p:nvSpPr>
-          <p:cNvPr id="10" name="TextBox 9"/>
+          <p:cNvPr id="19" name="TextBox 18"/>
           <p:cNvSpPr txBox="1"/>
           <p:nvPr/>
         </p:nvSpPr>
         <p:spPr>
           <a:xfrm>
-            <a:off x="6510528" y="1673352"/>
-            <a:ext cx="4736592" cy="1600200"/>
+            <a:off x="6510528" y="3227832"/>
+            <a:ext cx="4736592" cy="1874520"/>
           </a:xfrm>
           <a:prstGeom prst="rect">
             <a:avLst/>
@@ -9375,8 +10052,14 @@
                 </a:solidFill>
                 <a:latin typeface="Aptos"/>
               </a:rPr>
-              <a:t>Repository artifacts</a:t>
-            </a:r>
+              <a:t>Recorded result</a:t>
+            </a:r>
+            <a:endParaRPr sz="1400" b="1">
+              <a:solidFill>
+                <a:srgbClr val="203044"/>
+              </a:solidFill>
+              <a:latin typeface="Aptos"/>
+            </a:endParaRPr>
           </a:p>
           <a:p>
             <a:pPr>
@@ -9391,7 +10074,7 @@
               </a:defRPr>
             </a:pPr>
             <a:r>
-              <a:t>Design doc updated</a:t>
+              <a:t>Smoke: 8 prompts, 24 corruption rows</a:t>
             </a:r>
           </a:p>
           <a:p>
@@ -9407,7 +10090,7 @@
               </a:defRPr>
             </a:pPr>
             <a:r>
-              <a:t>Server handoff docs added</a:t>
+              <a:t>Generation/decode succeeded for all rows</a:t>
             </a:r>
           </a:p>
           <a:p>
@@ -9423,249 +10106,14 @@
               </a:defRPr>
             </a:pPr>
             <a:r>
-              <a:t>Shared collaboration log records decisions</a:t>
-            </a:r>
-          </a:p>
-        </p:txBody>
-      </p:sp>
-      <p:sp>
-        <p:nvSpPr>
-          <p:cNvPr id="11" name="Rounded Rectangle 10"/>
-          <p:cNvSpPr/>
-          <p:nvPr/>
-        </p:nvSpPr>
-        <p:spPr>
-          <a:xfrm>
-            <a:off x="1005840" y="4160520"/>
-            <a:ext cx="2011680" cy="685800"/>
-          </a:xfrm>
-          <a:prstGeom prst="roundRect">
-            <a:avLst/>
-          </a:prstGeom>
-          <a:solidFill>
-            <a:srgbClr val="FFFFFF"/>
-          </a:solidFill>
-          <a:ln w="11430">
-            <a:solidFill>
-              <a:srgbClr val="CDD3DB"/>
-            </a:solidFill>
-          </a:ln>
-        </p:spPr>
-        <p:style>
-          <a:lnRef idx="1">
-            <a:schemeClr val="accent1"/>
-          </a:lnRef>
-          <a:fillRef idx="3">
-            <a:schemeClr val="accent1"/>
-          </a:fillRef>
-          <a:effectRef idx="2">
-            <a:schemeClr val="accent1"/>
-          </a:effectRef>
-          <a:fontRef idx="minor">
-            <a:schemeClr val="lt1"/>
-          </a:fontRef>
-        </p:style>
-        <p:txBody>
-          <a:bodyPr rtlCol="0" anchor="ctr"/>
-          <a:lstStyle/>
-          <a:p>
-            <a:pPr algn="ctr"/>
-            <a:r>
-              <a:rPr sz="1200" b="1">
-                <a:solidFill>
-                  <a:srgbClr val="697380"/>
-                </a:solidFill>
-                <a:latin typeface="Aptos"/>
-              </a:rPr>
-              <a:t>Prompt + image
-Stage 2 path</a:t>
-            </a:r>
-          </a:p>
-        </p:txBody>
-      </p:sp>
-      <p:sp>
-        <p:nvSpPr>
-          <p:cNvPr id="12" name="Rounded Rectangle 11"/>
-          <p:cNvSpPr/>
-          <p:nvPr/>
-        </p:nvSpPr>
-        <p:spPr>
-          <a:xfrm>
-            <a:off x="5074920" y="4160520"/>
-            <a:ext cx="2011680" cy="685800"/>
-          </a:xfrm>
-          <a:prstGeom prst="roundRect">
-            <a:avLst/>
-          </a:prstGeom>
-          <a:solidFill>
-            <a:srgbClr val="FFFFFF"/>
-          </a:solidFill>
-          <a:ln w="11430">
-            <a:solidFill>
-              <a:srgbClr val="CDD3DB"/>
-            </a:solidFill>
-          </a:ln>
-        </p:spPr>
-        <p:style>
-          <a:lnRef idx="1">
-            <a:schemeClr val="accent1"/>
-          </a:lnRef>
-          <a:fillRef idx="3">
-            <a:schemeClr val="accent1"/>
-          </a:fillRef>
-          <a:effectRef idx="2">
-            <a:schemeClr val="accent1"/>
-          </a:effectRef>
-          <a:fontRef idx="minor">
-            <a:schemeClr val="lt1"/>
-          </a:fontRef>
-        </p:style>
-        <p:txBody>
-          <a:bodyPr rtlCol="0" anchor="ctr"/>
-          <a:lstStyle/>
-          <a:p>
-            <a:pPr algn="ctr"/>
-            <a:r>
-              <a:rPr sz="1200" b="1">
-                <a:solidFill>
-                  <a:srgbClr val="426792"/>
-                </a:solidFill>
-                <a:latin typeface="Aptos"/>
-              </a:rPr>
-              <a:t>Prompt + corrupted
-VQ tokens</a:t>
-            </a:r>
-          </a:p>
-        </p:txBody>
-      </p:sp>
-      <p:sp>
-        <p:nvSpPr>
-          <p:cNvPr id="13" name="Rounded Rectangle 12"/>
-          <p:cNvSpPr/>
-          <p:nvPr/>
-        </p:nvSpPr>
-        <p:spPr>
-          <a:xfrm>
-            <a:off x="9144000" y="4160520"/>
-            <a:ext cx="2011680" cy="685800"/>
-          </a:xfrm>
-          <a:prstGeom prst="roundRect">
-            <a:avLst/>
-          </a:prstGeom>
-          <a:solidFill>
-            <a:srgbClr val="FFFFFF"/>
-          </a:solidFill>
-          <a:ln w="11430">
-            <a:solidFill>
-              <a:srgbClr val="CDD3DB"/>
-            </a:solidFill>
-          </a:ln>
-        </p:spPr>
-        <p:style>
-          <a:lnRef idx="1">
-            <a:schemeClr val="accent1"/>
-          </a:lnRef>
-          <a:fillRef idx="3">
-            <a:schemeClr val="accent1"/>
-          </a:fillRef>
-          <a:effectRef idx="2">
-            <a:schemeClr val="accent1"/>
-          </a:effectRef>
-          <a:fontRef idx="minor">
-            <a:schemeClr val="lt1"/>
-          </a:fontRef>
-        </p:style>
-        <p:txBody>
-          <a:bodyPr rtlCol="0" anchor="ctr"/>
-          <a:lstStyle/>
-          <a:p>
-            <a:pPr algn="ctr"/>
-            <a:r>
-              <a:rPr sz="1200" b="1">
-                <a:solidFill>
-                  <a:srgbClr val="4E817C"/>
-                </a:solidFill>
-                <a:latin typeface="Aptos"/>
-              </a:rPr>
-              <a:t>TokenReopenMask
-Stage 3 path</a:t>
-            </a:r>
-          </a:p>
-        </p:txBody>
-      </p:sp>
-      <p:cxnSp>
-        <p:nvCxnSpPr>
-          <p:cNvPr id="14" name="Connector 13"/>
-          <p:cNvCxnSpPr/>
-          <p:nvPr/>
-        </p:nvCxnSpPr>
-        <p:spPr>
-          <a:xfrm>
-            <a:off x="3063240" y="4507992"/>
-            <a:ext cx="1920240" cy="0"/>
-          </a:xfrm>
-          <a:prstGeom prst="line">
-            <a:avLst/>
-          </a:prstGeom>
-          <a:ln w="20320">
-            <a:solidFill>
-              <a:srgbClr val="465260"/>
-            </a:solidFill>
-          </a:ln>
-        </p:spPr>
-        <p:style>
-          <a:lnRef idx="2">
-            <a:schemeClr val="accent1"/>
-          </a:lnRef>
-          <a:fillRef idx="0">
-            <a:schemeClr val="accent1"/>
-          </a:fillRef>
-          <a:effectRef idx="1">
-            <a:schemeClr val="accent1"/>
-          </a:effectRef>
-          <a:fontRef idx="minor">
-            <a:schemeClr val="tx1"/>
-          </a:fontRef>
-        </p:style>
-      </p:cxnSp>
-      <p:cxnSp>
-        <p:nvCxnSpPr>
-          <p:cNvPr id="15" name="Connector 14"/>
-          <p:cNvCxnSpPr/>
-          <p:nvPr/>
-        </p:nvCxnSpPr>
-        <p:spPr>
-          <a:xfrm>
-            <a:off x="7132320" y="4507992"/>
-            <a:ext cx="1920240" cy="0"/>
-          </a:xfrm>
-          <a:prstGeom prst="line">
-            <a:avLst/>
-          </a:prstGeom>
-          <a:ln w="20320">
-            <a:solidFill>
-              <a:srgbClr val="465260"/>
-            </a:solidFill>
-          </a:ln>
-        </p:spPr>
-        <p:style>
-          <a:lnRef idx="2">
-            <a:schemeClr val="accent1"/>
-          </a:lnRef>
-          <a:fillRef idx="0">
-            <a:schemeClr val="accent1"/>
-          </a:fillRef>
-          <a:effectRef idx="1">
-            <a:schemeClr val="accent1"/>
-          </a:effectRef>
-          <a:fontRef idx="minor">
-            <a:schemeClr val="tx1"/>
-          </a:fontRef>
-        </p:style>
-      </p:cxnSp>
-      <p:sp>
-        <p:nvSpPr>
-          <p:cNvPr id="16" name="TextBox 15"/>
+              <a:t>4×4 random replace and local_shuffle showed clear locality</a:t>
+            </a:r>
+          </a:p>
+        </p:txBody>
+      </p:sp>
+      <p:sp>
+        <p:nvSpPr>
+          <p:cNvPr id="20" name="TextBox 19"/>
           <p:cNvSpPr txBox="1"/>
           <p:nvPr/>
         </p:nvSpPr>
@@ -9693,8 +10141,14 @@
                 </a:solidFill>
                 <a:latin typeface="Aptos"/>
               </a:rPr>
-              <a:t>ASCR Stage 3 weekly update | Page 4</a:t>
-            </a:r>
+              <a:t>ASCR Stage 3 weekly update | Page 5</a:t>
+            </a:r>
+            <a:endParaRPr sz="800" b="0">
+              <a:solidFill>
+                <a:srgbClr val="697380"/>
+              </a:solidFill>
+              <a:latin typeface="Aptos"/>
+            </a:endParaRPr>
           </a:p>
         </p:txBody>
       </p:sp>
@@ -9706,8 +10160,8 @@
 </p:sld>
 </file>
 
-<file path=ppt/slides/slide5.xml><?xml version="1.0" encoding="utf-8"?>
-<p:sld xmlns:a="http://schemas.openxmlformats.org/drawingml/2006/main" xmlns:p="http://schemas.openxmlformats.org/presentationml/2006/main" xmlns:r="http://schemas.openxmlformats.org/officeDocument/2006/relationships">
+<file path=ppt/slides/slide6.xml><?xml version="1.0" encoding="utf-8"?>
+<p:sld xmlns:a="http://schemas.openxmlformats.org/drawingml/2006/main" xmlns:r="http://schemas.openxmlformats.org/officeDocument/2006/relationships" xmlns:p="http://schemas.openxmlformats.org/presentationml/2006/main">
   <p:cSld>
     <p:bg>
       <p:bgPr>
@@ -9754,8 +10208,14 @@
                 </a:solidFill>
                 <a:latin typeface="Aptos"/>
               </a:rPr>
-              <a:t>Phase 1: Token Locality Probe / 局部性验证</a:t>
-            </a:r>
+              <a:t>Phase 2: Self-Corruption Dataset / 数据构造</a:t>
+            </a:r>
+            <a:endParaRPr sz="2400" b="1">
+              <a:solidFill>
+                <a:srgbClr val="203044"/>
+              </a:solidFill>
+              <a:latin typeface="Aptos"/>
+            </a:endParaRPr>
           </a:p>
         </p:txBody>
       </p:sp>
@@ -9789,8 +10249,14 @@
                 </a:solidFill>
                 <a:latin typeface="Aptos"/>
               </a:rPr>
-              <a:t>Before training, check whether token corruption has local visual effects</a:t>
-            </a:r>
+              <a:t>Create corrupted-clean pairs with exact labels</a:t>
+            </a:r>
+            <a:endParaRPr sz="1000" b="0">
+              <a:solidFill>
+                <a:srgbClr val="697380"/>
+              </a:solidFill>
+              <a:latin typeface="Aptos"/>
+            </a:endParaRPr>
           </a:p>
         </p:txBody>
       </p:sp>
@@ -9845,8 +10311,8 @@
         </p:nvSpPr>
         <p:spPr>
           <a:xfrm>
-            <a:off x="777240" y="1600200"/>
-            <a:ext cx="1691640" cy="658368"/>
+            <a:off x="502920" y="1463040"/>
+            <a:ext cx="1444752" cy="621792"/>
           </a:xfrm>
           <a:prstGeom prst="roundRect">
             <a:avLst/>
@@ -9886,8 +10352,15 @@
                 </a:solidFill>
                 <a:latin typeface="Aptos"/>
               </a:rPr>
-              <a:t>Clean tokens</a:t>
-            </a:r>
+              <a:t>clean_vq_ids
+64×64</a:t>
+            </a:r>
+            <a:endParaRPr sz="1200" b="1">
+              <a:solidFill>
+                <a:srgbClr val="426792"/>
+              </a:solidFill>
+              <a:latin typeface="Aptos"/>
+            </a:endParaRPr>
           </a:p>
         </p:txBody>
       </p:sp>
@@ -9899,8 +10372,8 @@
         </p:nvCxnSpPr>
         <p:spPr>
           <a:xfrm>
-            <a:off x="2468880" y="1929384"/>
-            <a:ext cx="411480" cy="0"/>
+            <a:off x="1947672" y="1773936"/>
+            <a:ext cx="384048" cy="0"/>
           </a:xfrm>
           <a:prstGeom prst="line">
             <a:avLst/>
@@ -9934,8 +10407,8 @@
         </p:nvSpPr>
         <p:spPr>
           <a:xfrm>
-            <a:off x="2971800" y="1600200"/>
-            <a:ext cx="1691640" cy="658368"/>
+            <a:off x="2404872" y="1463040"/>
+            <a:ext cx="1444752" cy="621792"/>
           </a:xfrm>
           <a:prstGeom prst="roundRect">
             <a:avLst/>
@@ -9975,8 +10448,15 @@
                 </a:solidFill>
                 <a:latin typeface="Aptos"/>
               </a:rPr>
-              <a:t>Corrupt block</a:t>
-            </a:r>
+              <a:t>mask
+1/2/4/8</a:t>
+            </a:r>
+            <a:endParaRPr sz="1200" b="1">
+              <a:solidFill>
+                <a:srgbClr val="9C7A3F"/>
+              </a:solidFill>
+              <a:latin typeface="Aptos"/>
+            </a:endParaRPr>
           </a:p>
         </p:txBody>
       </p:sp>
@@ -9988,8 +10468,8 @@
         </p:nvCxnSpPr>
         <p:spPr>
           <a:xfrm>
-            <a:off x="4663440" y="1929384"/>
-            <a:ext cx="411480" cy="0"/>
+            <a:off x="3849624" y="1773936"/>
+            <a:ext cx="384048" cy="0"/>
           </a:xfrm>
           <a:prstGeom prst="line">
             <a:avLst/>
@@ -10023,8 +10503,8 @@
         </p:nvSpPr>
         <p:spPr>
           <a:xfrm>
-            <a:off x="5166359" y="1600200"/>
-            <a:ext cx="1691640" cy="658368"/>
+            <a:off x="4306824" y="1463040"/>
+            <a:ext cx="1444752" cy="621792"/>
           </a:xfrm>
           <a:prstGeom prst="roundRect">
             <a:avLst/>
@@ -10060,12 +10540,19 @@
             <a:r>
               <a:rPr sz="1200" b="1">
                 <a:solidFill>
-                  <a:srgbClr val="4E817C"/>
+                  <a:srgbClr val="9C7A3F"/>
                 </a:solidFill>
                 <a:latin typeface="Aptos"/>
               </a:rPr>
-              <a:t>Decode</a:t>
-            </a:r>
+              <a:t>operator
+4 choices</a:t>
+            </a:r>
+            <a:endParaRPr sz="1200" b="1">
+              <a:solidFill>
+                <a:srgbClr val="9C7A3F"/>
+              </a:solidFill>
+              <a:latin typeface="Aptos"/>
+            </a:endParaRPr>
           </a:p>
         </p:txBody>
       </p:sp>
@@ -10077,8 +10564,8 @@
         </p:nvCxnSpPr>
         <p:spPr>
           <a:xfrm>
-            <a:off x="6858000" y="1929384"/>
-            <a:ext cx="411479" cy="0"/>
+            <a:off x="5751576" y="1773936"/>
+            <a:ext cx="384048" cy="0"/>
           </a:xfrm>
           <a:prstGeom prst="line">
             <a:avLst/>
@@ -10112,8 +10599,8 @@
         </p:nvSpPr>
         <p:spPr>
           <a:xfrm>
-            <a:off x="7360919" y="1600200"/>
-            <a:ext cx="1691640" cy="658368"/>
+            <a:off x="6209030" y="1463040"/>
+            <a:ext cx="1511300" cy="621665"/>
           </a:xfrm>
           <a:prstGeom prst="roundRect">
             <a:avLst/>
@@ -10153,8 +10640,14 @@
                 </a:solidFill>
                 <a:latin typeface="Aptos"/>
               </a:rPr>
-              <a:t>Difference map</a:t>
-            </a:r>
+              <a:t>corrupted_vq_ids</a:t>
+            </a:r>
+            <a:endParaRPr sz="1200" b="1">
+              <a:solidFill>
+                <a:srgbClr val="9E5B5B"/>
+              </a:solidFill>
+              <a:latin typeface="Aptos"/>
+            </a:endParaRPr>
           </a:p>
         </p:txBody>
       </p:sp>
@@ -10166,8 +10659,8 @@
         </p:nvCxnSpPr>
         <p:spPr>
           <a:xfrm>
-            <a:off x="9052559" y="1929384"/>
-            <a:ext cx="411481" cy="0"/>
+            <a:off x="7653528" y="1773936"/>
+            <a:ext cx="384047" cy="0"/>
           </a:xfrm>
           <a:prstGeom prst="line">
             <a:avLst/>
@@ -10201,8 +10694,8 @@
         </p:nvSpPr>
         <p:spPr>
           <a:xfrm>
-            <a:off x="9555480" y="1600200"/>
-            <a:ext cx="1691640" cy="658368"/>
+            <a:off x="8110728" y="1463040"/>
+            <a:ext cx="1444752" cy="621792"/>
           </a:xfrm>
           <a:prstGeom prst="roundRect">
             <a:avLst/>
@@ -10238,25 +10731,128 @@
             <a:r>
               <a:rPr sz="1200" b="1">
                 <a:solidFill>
+                  <a:srgbClr val="4E817C"/>
+                </a:solidFill>
+                <a:latin typeface="Aptos"/>
+              </a:rPr>
+              <a:t>project to
+8×8 cells</a:t>
+            </a:r>
+            <a:endParaRPr sz="1200" b="1">
+              <a:solidFill>
+                <a:srgbClr val="4E817C"/>
+              </a:solidFill>
+              <a:latin typeface="Aptos"/>
+            </a:endParaRPr>
+          </a:p>
+        </p:txBody>
+      </p:sp>
+      <p:cxnSp>
+        <p:nvCxnSpPr>
+          <p:cNvPr id="14" name="Connector 13"/>
+          <p:cNvCxnSpPr/>
+          <p:nvPr/>
+        </p:nvCxnSpPr>
+        <p:spPr>
+          <a:xfrm>
+            <a:off x="9555480" y="1773936"/>
+            <a:ext cx="384048" cy="0"/>
+          </a:xfrm>
+          <a:prstGeom prst="line">
+            <a:avLst/>
+          </a:prstGeom>
+          <a:ln w="20320">
+            <a:solidFill>
+              <a:srgbClr val="465260"/>
+            </a:solidFill>
+          </a:ln>
+        </p:spPr>
+        <p:style>
+          <a:lnRef idx="2">
+            <a:schemeClr val="accent1"/>
+          </a:lnRef>
+          <a:fillRef idx="0">
+            <a:schemeClr val="accent1"/>
+          </a:fillRef>
+          <a:effectRef idx="1">
+            <a:schemeClr val="accent1"/>
+          </a:effectRef>
+          <a:fontRef idx="minor">
+            <a:schemeClr val="tx1"/>
+          </a:fontRef>
+        </p:style>
+      </p:cxnSp>
+      <p:sp>
+        <p:nvSpPr>
+          <p:cNvPr id="15" name="Rounded Rectangle 14"/>
+          <p:cNvSpPr/>
+          <p:nvPr/>
+        </p:nvSpPr>
+        <p:spPr>
+          <a:xfrm>
+            <a:off x="10012680" y="1463040"/>
+            <a:ext cx="1444752" cy="621792"/>
+          </a:xfrm>
+          <a:prstGeom prst="roundRect">
+            <a:avLst/>
+          </a:prstGeom>
+          <a:solidFill>
+            <a:srgbClr val="FFFFFF"/>
+          </a:solidFill>
+          <a:ln w="11430">
+            <a:solidFill>
+              <a:srgbClr val="CDD3DB"/>
+            </a:solidFill>
+          </a:ln>
+        </p:spPr>
+        <p:style>
+          <a:lnRef idx="1">
+            <a:schemeClr val="accent1"/>
+          </a:lnRef>
+          <a:fillRef idx="3">
+            <a:schemeClr val="accent1"/>
+          </a:fillRef>
+          <a:effectRef idx="2">
+            <a:schemeClr val="accent1"/>
+          </a:effectRef>
+          <a:fontRef idx="minor">
+            <a:schemeClr val="lt1"/>
+          </a:fontRef>
+        </p:style>
+        <p:txBody>
+          <a:bodyPr rtlCol="0" anchor="ctr"/>
+          <a:lstStyle/>
+          <a:p>
+            <a:pPr algn="ctr"/>
+            <a:r>
+              <a:rPr sz="1200" b="1">
+                <a:solidFill>
                   <a:srgbClr val="588760"/>
                 </a:solidFill>
                 <a:latin typeface="Aptos"/>
               </a:rPr>
-              <a:t>Locality metrics</a:t>
-            </a:r>
-          </a:p>
-        </p:txBody>
-      </p:sp>
-      <p:sp>
-        <p:nvSpPr>
-          <p:cNvPr id="14" name="Rounded Rectangle 13"/>
+              <a:t>SFT row
+JSON target</a:t>
+            </a:r>
+            <a:endParaRPr sz="1200" b="1">
+              <a:solidFill>
+                <a:srgbClr val="588760"/>
+              </a:solidFill>
+              <a:latin typeface="Aptos"/>
+            </a:endParaRPr>
+          </a:p>
+        </p:txBody>
+      </p:sp>
+      <p:sp>
+        <p:nvSpPr>
+          <p:cNvPr id="16" name="Rounded Rectangle 15"/>
           <p:cNvSpPr/>
           <p:nvPr/>
         </p:nvSpPr>
         <p:spPr>
           <a:xfrm>
-            <a:off x="777240" y="3063240"/>
-            <a:ext cx="5120640" cy="2103120"/>
+            <a:off x="731520" y="2743200"/>
+            <a:ext cx="5074920" cy="2331720"/>
           </a:xfrm>
           <a:prstGeom prst="roundRect">
             <a:avLst/>
@@ -10294,14 +10890,14 @@
       </p:sp>
       <p:sp>
         <p:nvSpPr>
-          <p:cNvPr id="15" name="Rectangle 14"/>
+          <p:cNvPr id="17" name="Rectangle 16"/>
           <p:cNvSpPr/>
           <p:nvPr/>
         </p:nvSpPr>
         <p:spPr>
           <a:xfrm>
-            <a:off x="777240" y="3063240"/>
-            <a:ext cx="73152" cy="2103120"/>
+            <a:off x="731520" y="2743200"/>
+            <a:ext cx="73152" cy="2331720"/>
           </a:xfrm>
           <a:prstGeom prst="rect">
             <a:avLst/>
@@ -10337,14 +10933,14 @@
       </p:sp>
       <p:sp>
         <p:nvSpPr>
-          <p:cNvPr id="16" name="TextBox 15"/>
+          <p:cNvPr id="18" name="TextBox 17"/>
           <p:cNvSpPr txBox="1"/>
           <p:nvPr/>
         </p:nvSpPr>
         <p:spPr>
           <a:xfrm>
-            <a:off x="978408" y="3227832"/>
-            <a:ext cx="4736592" cy="1874520"/>
+            <a:off x="932688" y="2907792"/>
+            <a:ext cx="4690872" cy="2103120"/>
           </a:xfrm>
           <a:prstGeom prst="rect">
             <a:avLst/>
@@ -10364,8 +10960,14 @@
                 </a:solidFill>
                 <a:latin typeface="Aptos"/>
               </a:rPr>
-              <a:t>Implemented</a:t>
-            </a:r>
+              <a:t>Canonical dataset row</a:t>
+            </a:r>
+            <a:endParaRPr sz="1400" b="1">
+              <a:solidFill>
+                <a:srgbClr val="203044"/>
+              </a:solidFill>
+              <a:latin typeface="Aptos"/>
+            </a:endParaRPr>
           </a:p>
           <a:p>
             <a:pPr>
@@ -10380,7 +10982,7 @@
               </a:defRPr>
             </a:pPr>
             <a:r>
-              <a:t>Corruptors: random_replace, local_shuffle, neighbor_copy, transplant</a:t>
+              <a:t>Positive: corrupted tokens + nonempty cells</a:t>
             </a:r>
           </a:p>
           <a:p>
@@ -10396,7 +10998,7 @@
               </a:defRPr>
             </a:pPr>
             <a:r>
-              <a:t>Metrics: inside energy, top-1/top-k hit, radius</a:t>
+              <a:t>Negative: same clean tokens + {"cells":[]}</a:t>
             </a:r>
           </a:p>
           <a:p>
@@ -10412,21 +11014,21 @@
               </a:defRPr>
             </a:pPr>
             <a:r>
-              <a:t>Outputs: manifest, summary, heatmaps, images, tokens</a:t>
-            </a:r>
-          </a:p>
-        </p:txBody>
-      </p:sp>
-      <p:sp>
-        <p:nvSpPr>
-          <p:cNvPr id="17" name="Rounded Rectangle 16"/>
+              <a:t>Decoded images are audit-only, not label sources</a:t>
+            </a:r>
+          </a:p>
+        </p:txBody>
+      </p:sp>
+      <p:sp>
+        <p:nvSpPr>
+          <p:cNvPr id="19" name="Rounded Rectangle 18"/>
           <p:cNvSpPr/>
           <p:nvPr/>
         </p:nvSpPr>
         <p:spPr>
           <a:xfrm>
-            <a:off x="6309360" y="3063240"/>
-            <a:ext cx="5120640" cy="2103120"/>
+            <a:off x="6263640" y="2743200"/>
+            <a:ext cx="5074920" cy="2331720"/>
           </a:xfrm>
           <a:prstGeom prst="roundRect">
             <a:avLst/>
@@ -10464,20 +11066,20 @@
       </p:sp>
       <p:sp>
         <p:nvSpPr>
-          <p:cNvPr id="18" name="Rectangle 17"/>
+          <p:cNvPr id="20" name="Rectangle 19"/>
           <p:cNvSpPr/>
           <p:nvPr/>
         </p:nvSpPr>
         <p:spPr>
           <a:xfrm>
-            <a:off x="6309360" y="3063240"/>
-            <a:ext cx="73152" cy="2103120"/>
+            <a:off x="6263640" y="2743200"/>
+            <a:ext cx="73152" cy="2331720"/>
           </a:xfrm>
           <a:prstGeom prst="rect">
             <a:avLst/>
           </a:prstGeom>
           <a:solidFill>
-            <a:srgbClr val="588760"/>
+            <a:srgbClr val="4E817C"/>
           </a:solidFill>
           <a:ln>
             <a:noFill/>
@@ -10507,14 +11109,14 @@
       </p:sp>
       <p:sp>
         <p:nvSpPr>
-          <p:cNvPr id="19" name="TextBox 18"/>
+          <p:cNvPr id="21" name="TextBox 20"/>
           <p:cNvSpPr txBox="1"/>
           <p:nvPr/>
         </p:nvSpPr>
         <p:spPr>
           <a:xfrm>
-            <a:off x="6510528" y="3227832"/>
-            <a:ext cx="4736592" cy="1874520"/>
+            <a:off x="6464808" y="2907792"/>
+            <a:ext cx="4690872" cy="2103120"/>
           </a:xfrm>
           <a:prstGeom prst="rect">
             <a:avLst/>
@@ -10534,8 +11136,14 @@
                 </a:solidFill>
                 <a:latin typeface="Aptos"/>
               </a:rPr>
-              <a:t>Recorded result</a:t>
-            </a:r>
+              <a:t>Current scale target</a:t>
+            </a:r>
+            <a:endParaRPr sz="1400" b="1">
+              <a:solidFill>
+                <a:srgbClr val="203044"/>
+              </a:solidFill>
+              <a:latin typeface="Aptos"/>
+            </a:endParaRPr>
           </a:p>
           <a:p>
             <a:pPr>
@@ -10550,7 +11158,7 @@
               </a:defRPr>
             </a:pPr>
             <a:r>
-              <a:t>Smoke: 8 prompts, 24 corruption rows</a:t>
+              <a:t>10k clean prompts / clean tokens</a:t>
             </a:r>
           </a:p>
           <a:p>
@@ -10566,7 +11174,7 @@
               </a:defRPr>
             </a:pPr>
             <a:r>
-              <a:t>Generation/decode succeeded for all rows</a:t>
+              <a:t>30k positive + 10k negative repair rows</a:t>
             </a:r>
           </a:p>
           <a:p>
@@ -10582,14 +11190,14 @@
               </a:defRPr>
             </a:pPr>
             <a:r>
-              <a:t>4×4 random replace and local_shuffle showed clear locality</a:t>
-            </a:r>
-          </a:p>
-        </p:txBody>
-      </p:sp>
-      <p:sp>
-        <p:nvSpPr>
-          <p:cNvPr id="20" name="TextBox 19"/>
+              <a:t>Group-safe SFT split by source clean sample</a:t>
+            </a:r>
+          </a:p>
+        </p:txBody>
+      </p:sp>
+      <p:sp>
+        <p:nvSpPr>
+          <p:cNvPr id="22" name="TextBox 21"/>
           <p:cNvSpPr txBox="1"/>
           <p:nvPr/>
         </p:nvSpPr>
@@ -10617,8 +11225,14 @@
                 </a:solidFill>
                 <a:latin typeface="Aptos"/>
               </a:rPr>
-              <a:t>ASCR Stage 3 weekly update | Page 5</a:t>
-            </a:r>
+              <a:t>ASCR Stage 3 weekly update | Page 6</a:t>
+            </a:r>
+            <a:endParaRPr sz="800" b="0">
+              <a:solidFill>
+                <a:srgbClr val="697380"/>
+              </a:solidFill>
+              <a:latin typeface="Aptos"/>
+            </a:endParaRPr>
           </a:p>
         </p:txBody>
       </p:sp>
@@ -10630,8 +11244,8 @@
 </p:sld>
 </file>
 
-<file path=ppt/slides/slide6.xml><?xml version="1.0" encoding="utf-8"?>
-<p:sld xmlns:a="http://schemas.openxmlformats.org/drawingml/2006/main" xmlns:p="http://schemas.openxmlformats.org/presentationml/2006/main" xmlns:r="http://schemas.openxmlformats.org/officeDocument/2006/relationships">
+<file path=ppt/slides/slide7.xml><?xml version="1.0" encoding="utf-8"?>
+<p:sld xmlns:a="http://schemas.openxmlformats.org/drawingml/2006/main" xmlns:r="http://schemas.openxmlformats.org/officeDocument/2006/relationships" xmlns:p="http://schemas.openxmlformats.org/presentationml/2006/main">
   <p:cSld>
     <p:bg>
       <p:bgPr>
@@ -10678,8 +11292,14 @@
                 </a:solidFill>
                 <a:latin typeface="Aptos"/>
               </a:rPr>
-              <a:t>Phase 2: Self-Corruption Dataset / 数据构造</a:t>
-            </a:r>
+              <a:t>Phase 3: Selector Baselines / 基线选择器</a:t>
+            </a:r>
+            <a:endParaRPr sz="2400" b="1">
+              <a:solidFill>
+                <a:srgbClr val="203044"/>
+              </a:solidFill>
+              <a:latin typeface="Aptos"/>
+            </a:endParaRPr>
           </a:p>
         </p:txBody>
       </p:sp>
@@ -10713,8 +11333,14 @@
                 </a:solidFill>
                 <a:latin typeface="Aptos"/>
               </a:rPr>
-              <a:t>Create corrupted-clean pairs with exact labels</a:t>
-            </a:r>
+              <a:t>Check learnability before training Lumina adapters</a:t>
+            </a:r>
+            <a:endParaRPr sz="1000" b="0">
+              <a:solidFill>
+                <a:srgbClr val="697380"/>
+              </a:solidFill>
+              <a:latin typeface="Aptos"/>
+            </a:endParaRPr>
           </a:p>
         </p:txBody>
       </p:sp>
@@ -10769,512 +11395,8 @@
         </p:nvSpPr>
         <p:spPr>
           <a:xfrm>
-            <a:off x="502920" y="1463040"/>
-            <a:ext cx="1444752" cy="621792"/>
-          </a:xfrm>
-          <a:prstGeom prst="roundRect">
-            <a:avLst/>
-          </a:prstGeom>
-          <a:solidFill>
-            <a:srgbClr val="FFFFFF"/>
-          </a:solidFill>
-          <a:ln w="11430">
-            <a:solidFill>
-              <a:srgbClr val="CDD3DB"/>
-            </a:solidFill>
-          </a:ln>
-        </p:spPr>
-        <p:style>
-          <a:lnRef idx="1">
-            <a:schemeClr val="accent1"/>
-          </a:lnRef>
-          <a:fillRef idx="3">
-            <a:schemeClr val="accent1"/>
-          </a:fillRef>
-          <a:effectRef idx="2">
-            <a:schemeClr val="accent1"/>
-          </a:effectRef>
-          <a:fontRef idx="minor">
-            <a:schemeClr val="lt1"/>
-          </a:fontRef>
-        </p:style>
-        <p:txBody>
-          <a:bodyPr rtlCol="0" anchor="ctr"/>
-          <a:lstStyle/>
-          <a:p>
-            <a:pPr algn="ctr"/>
-            <a:r>
-              <a:rPr sz="1200" b="1">
-                <a:solidFill>
-                  <a:srgbClr val="426792"/>
-                </a:solidFill>
-                <a:latin typeface="Aptos"/>
-              </a:rPr>
-              <a:t>clean_vq_ids
-64×64</a:t>
-            </a:r>
-          </a:p>
-        </p:txBody>
-      </p:sp>
-      <p:cxnSp>
-        <p:nvCxnSpPr>
-          <p:cNvPr id="6" name="Connector 5"/>
-          <p:cNvCxnSpPr/>
-          <p:nvPr/>
-        </p:nvCxnSpPr>
-        <p:spPr>
-          <a:xfrm>
-            <a:off x="1947672" y="1773936"/>
-            <a:ext cx="384048" cy="0"/>
-          </a:xfrm>
-          <a:prstGeom prst="line">
-            <a:avLst/>
-          </a:prstGeom>
-          <a:ln w="20320">
-            <a:solidFill>
-              <a:srgbClr val="465260"/>
-            </a:solidFill>
-          </a:ln>
-        </p:spPr>
-        <p:style>
-          <a:lnRef idx="2">
-            <a:schemeClr val="accent1"/>
-          </a:lnRef>
-          <a:fillRef idx="0">
-            <a:schemeClr val="accent1"/>
-          </a:fillRef>
-          <a:effectRef idx="1">
-            <a:schemeClr val="accent1"/>
-          </a:effectRef>
-          <a:fontRef idx="minor">
-            <a:schemeClr val="tx1"/>
-          </a:fontRef>
-        </p:style>
-      </p:cxnSp>
-      <p:sp>
-        <p:nvSpPr>
-          <p:cNvPr id="7" name="Rounded Rectangle 6"/>
-          <p:cNvSpPr/>
-          <p:nvPr/>
-        </p:nvSpPr>
-        <p:spPr>
-          <a:xfrm>
-            <a:off x="2404872" y="1463040"/>
-            <a:ext cx="1444752" cy="621792"/>
-          </a:xfrm>
-          <a:prstGeom prst="roundRect">
-            <a:avLst/>
-          </a:prstGeom>
-          <a:solidFill>
-            <a:srgbClr val="FFFFFF"/>
-          </a:solidFill>
-          <a:ln w="11430">
-            <a:solidFill>
-              <a:srgbClr val="CDD3DB"/>
-            </a:solidFill>
-          </a:ln>
-        </p:spPr>
-        <p:style>
-          <a:lnRef idx="1">
-            <a:schemeClr val="accent1"/>
-          </a:lnRef>
-          <a:fillRef idx="3">
-            <a:schemeClr val="accent1"/>
-          </a:fillRef>
-          <a:effectRef idx="2">
-            <a:schemeClr val="accent1"/>
-          </a:effectRef>
-          <a:fontRef idx="minor">
-            <a:schemeClr val="lt1"/>
-          </a:fontRef>
-        </p:style>
-        <p:txBody>
-          <a:bodyPr rtlCol="0" anchor="ctr"/>
-          <a:lstStyle/>
-          <a:p>
-            <a:pPr algn="ctr"/>
-            <a:r>
-              <a:rPr sz="1200" b="1">
-                <a:solidFill>
-                  <a:srgbClr val="9C7A3F"/>
-                </a:solidFill>
-                <a:latin typeface="Aptos"/>
-              </a:rPr>
-              <a:t>mask
-1/2/4/8</a:t>
-            </a:r>
-          </a:p>
-        </p:txBody>
-      </p:sp>
-      <p:cxnSp>
-        <p:nvCxnSpPr>
-          <p:cNvPr id="8" name="Connector 7"/>
-          <p:cNvCxnSpPr/>
-          <p:nvPr/>
-        </p:nvCxnSpPr>
-        <p:spPr>
-          <a:xfrm>
-            <a:off x="3849624" y="1773936"/>
-            <a:ext cx="384048" cy="0"/>
-          </a:xfrm>
-          <a:prstGeom prst="line">
-            <a:avLst/>
-          </a:prstGeom>
-          <a:ln w="20320">
-            <a:solidFill>
-              <a:srgbClr val="465260"/>
-            </a:solidFill>
-          </a:ln>
-        </p:spPr>
-        <p:style>
-          <a:lnRef idx="2">
-            <a:schemeClr val="accent1"/>
-          </a:lnRef>
-          <a:fillRef idx="0">
-            <a:schemeClr val="accent1"/>
-          </a:fillRef>
-          <a:effectRef idx="1">
-            <a:schemeClr val="accent1"/>
-          </a:effectRef>
-          <a:fontRef idx="minor">
-            <a:schemeClr val="tx1"/>
-          </a:fontRef>
-        </p:style>
-      </p:cxnSp>
-      <p:sp>
-        <p:nvSpPr>
-          <p:cNvPr id="9" name="Rounded Rectangle 8"/>
-          <p:cNvSpPr/>
-          <p:nvPr/>
-        </p:nvSpPr>
-        <p:spPr>
-          <a:xfrm>
-            <a:off x="4306824" y="1463040"/>
-            <a:ext cx="1444752" cy="621792"/>
-          </a:xfrm>
-          <a:prstGeom prst="roundRect">
-            <a:avLst/>
-          </a:prstGeom>
-          <a:solidFill>
-            <a:srgbClr val="FFFFFF"/>
-          </a:solidFill>
-          <a:ln w="11430">
-            <a:solidFill>
-              <a:srgbClr val="CDD3DB"/>
-            </a:solidFill>
-          </a:ln>
-        </p:spPr>
-        <p:style>
-          <a:lnRef idx="1">
-            <a:schemeClr val="accent1"/>
-          </a:lnRef>
-          <a:fillRef idx="3">
-            <a:schemeClr val="accent1"/>
-          </a:fillRef>
-          <a:effectRef idx="2">
-            <a:schemeClr val="accent1"/>
-          </a:effectRef>
-          <a:fontRef idx="minor">
-            <a:schemeClr val="lt1"/>
-          </a:fontRef>
-        </p:style>
-        <p:txBody>
-          <a:bodyPr rtlCol="0" anchor="ctr"/>
-          <a:lstStyle/>
-          <a:p>
-            <a:pPr algn="ctr"/>
-            <a:r>
-              <a:rPr sz="1200" b="1">
-                <a:solidFill>
-                  <a:srgbClr val="9C7A3F"/>
-                </a:solidFill>
-                <a:latin typeface="Aptos"/>
-              </a:rPr>
-              <a:t>operator
-4 choices</a:t>
-            </a:r>
-          </a:p>
-        </p:txBody>
-      </p:sp>
-      <p:cxnSp>
-        <p:nvCxnSpPr>
-          <p:cNvPr id="10" name="Connector 9"/>
-          <p:cNvCxnSpPr/>
-          <p:nvPr/>
-        </p:nvCxnSpPr>
-        <p:spPr>
-          <a:xfrm>
-            <a:off x="5751576" y="1773936"/>
-            <a:ext cx="384048" cy="0"/>
-          </a:xfrm>
-          <a:prstGeom prst="line">
-            <a:avLst/>
-          </a:prstGeom>
-          <a:ln w="20320">
-            <a:solidFill>
-              <a:srgbClr val="465260"/>
-            </a:solidFill>
-          </a:ln>
-        </p:spPr>
-        <p:style>
-          <a:lnRef idx="2">
-            <a:schemeClr val="accent1"/>
-          </a:lnRef>
-          <a:fillRef idx="0">
-            <a:schemeClr val="accent1"/>
-          </a:fillRef>
-          <a:effectRef idx="1">
-            <a:schemeClr val="accent1"/>
-          </a:effectRef>
-          <a:fontRef idx="minor">
-            <a:schemeClr val="tx1"/>
-          </a:fontRef>
-        </p:style>
-      </p:cxnSp>
-      <p:sp>
-        <p:nvSpPr>
-          <p:cNvPr id="11" name="Rounded Rectangle 10"/>
-          <p:cNvSpPr/>
-          <p:nvPr/>
-        </p:nvSpPr>
-        <p:spPr>
-          <a:xfrm>
-            <a:off x="6208776" y="1463040"/>
-            <a:ext cx="1444752" cy="621792"/>
-          </a:xfrm>
-          <a:prstGeom prst="roundRect">
-            <a:avLst/>
-          </a:prstGeom>
-          <a:solidFill>
-            <a:srgbClr val="FFFFFF"/>
-          </a:solidFill>
-          <a:ln w="11430">
-            <a:solidFill>
-              <a:srgbClr val="CDD3DB"/>
-            </a:solidFill>
-          </a:ln>
-        </p:spPr>
-        <p:style>
-          <a:lnRef idx="1">
-            <a:schemeClr val="accent1"/>
-          </a:lnRef>
-          <a:fillRef idx="3">
-            <a:schemeClr val="accent1"/>
-          </a:fillRef>
-          <a:effectRef idx="2">
-            <a:schemeClr val="accent1"/>
-          </a:effectRef>
-          <a:fontRef idx="minor">
-            <a:schemeClr val="lt1"/>
-          </a:fontRef>
-        </p:style>
-        <p:txBody>
-          <a:bodyPr rtlCol="0" anchor="ctr"/>
-          <a:lstStyle/>
-          <a:p>
-            <a:pPr algn="ctr"/>
-            <a:r>
-              <a:rPr sz="1200" b="1">
-                <a:solidFill>
-                  <a:srgbClr val="9E5B5B"/>
-                </a:solidFill>
-                <a:latin typeface="Aptos"/>
-              </a:rPr>
-              <a:t>corrupted_vq_ids</a:t>
-            </a:r>
-          </a:p>
-        </p:txBody>
-      </p:sp>
-      <p:cxnSp>
-        <p:nvCxnSpPr>
-          <p:cNvPr id="12" name="Connector 11"/>
-          <p:cNvCxnSpPr/>
-          <p:nvPr/>
-        </p:nvCxnSpPr>
-        <p:spPr>
-          <a:xfrm>
-            <a:off x="7653528" y="1773936"/>
-            <a:ext cx="384047" cy="0"/>
-          </a:xfrm>
-          <a:prstGeom prst="line">
-            <a:avLst/>
-          </a:prstGeom>
-          <a:ln w="20320">
-            <a:solidFill>
-              <a:srgbClr val="465260"/>
-            </a:solidFill>
-          </a:ln>
-        </p:spPr>
-        <p:style>
-          <a:lnRef idx="2">
-            <a:schemeClr val="accent1"/>
-          </a:lnRef>
-          <a:fillRef idx="0">
-            <a:schemeClr val="accent1"/>
-          </a:fillRef>
-          <a:effectRef idx="1">
-            <a:schemeClr val="accent1"/>
-          </a:effectRef>
-          <a:fontRef idx="minor">
-            <a:schemeClr val="tx1"/>
-          </a:fontRef>
-        </p:style>
-      </p:cxnSp>
-      <p:sp>
-        <p:nvSpPr>
-          <p:cNvPr id="13" name="Rounded Rectangle 12"/>
-          <p:cNvSpPr/>
-          <p:nvPr/>
-        </p:nvSpPr>
-        <p:spPr>
-          <a:xfrm>
-            <a:off x="8110728" y="1463040"/>
-            <a:ext cx="1444752" cy="621792"/>
-          </a:xfrm>
-          <a:prstGeom prst="roundRect">
-            <a:avLst/>
-          </a:prstGeom>
-          <a:solidFill>
-            <a:srgbClr val="FFFFFF"/>
-          </a:solidFill>
-          <a:ln w="11430">
-            <a:solidFill>
-              <a:srgbClr val="CDD3DB"/>
-            </a:solidFill>
-          </a:ln>
-        </p:spPr>
-        <p:style>
-          <a:lnRef idx="1">
-            <a:schemeClr val="accent1"/>
-          </a:lnRef>
-          <a:fillRef idx="3">
-            <a:schemeClr val="accent1"/>
-          </a:fillRef>
-          <a:effectRef idx="2">
-            <a:schemeClr val="accent1"/>
-          </a:effectRef>
-          <a:fontRef idx="minor">
-            <a:schemeClr val="lt1"/>
-          </a:fontRef>
-        </p:style>
-        <p:txBody>
-          <a:bodyPr rtlCol="0" anchor="ctr"/>
-          <a:lstStyle/>
-          <a:p>
-            <a:pPr algn="ctr"/>
-            <a:r>
-              <a:rPr sz="1200" b="1">
-                <a:solidFill>
-                  <a:srgbClr val="4E817C"/>
-                </a:solidFill>
-                <a:latin typeface="Aptos"/>
-              </a:rPr>
-              <a:t>project to
-8×8 cells</a:t>
-            </a:r>
-          </a:p>
-        </p:txBody>
-      </p:sp>
-      <p:cxnSp>
-        <p:nvCxnSpPr>
-          <p:cNvPr id="14" name="Connector 13"/>
-          <p:cNvCxnSpPr/>
-          <p:nvPr/>
-        </p:nvCxnSpPr>
-        <p:spPr>
-          <a:xfrm>
-            <a:off x="9555480" y="1773936"/>
-            <a:ext cx="384048" cy="0"/>
-          </a:xfrm>
-          <a:prstGeom prst="line">
-            <a:avLst/>
-          </a:prstGeom>
-          <a:ln w="20320">
-            <a:solidFill>
-              <a:srgbClr val="465260"/>
-            </a:solidFill>
-          </a:ln>
-        </p:spPr>
-        <p:style>
-          <a:lnRef idx="2">
-            <a:schemeClr val="accent1"/>
-          </a:lnRef>
-          <a:fillRef idx="0">
-            <a:schemeClr val="accent1"/>
-          </a:fillRef>
-          <a:effectRef idx="1">
-            <a:schemeClr val="accent1"/>
-          </a:effectRef>
-          <a:fontRef idx="minor">
-            <a:schemeClr val="tx1"/>
-          </a:fontRef>
-        </p:style>
-      </p:cxnSp>
-      <p:sp>
-        <p:nvSpPr>
-          <p:cNvPr id="15" name="Rounded Rectangle 14"/>
-          <p:cNvSpPr/>
-          <p:nvPr/>
-        </p:nvSpPr>
-        <p:spPr>
-          <a:xfrm>
-            <a:off x="10012680" y="1463040"/>
-            <a:ext cx="1444752" cy="621792"/>
-          </a:xfrm>
-          <a:prstGeom prst="roundRect">
-            <a:avLst/>
-          </a:prstGeom>
-          <a:solidFill>
-            <a:srgbClr val="FFFFFF"/>
-          </a:solidFill>
-          <a:ln w="11430">
-            <a:solidFill>
-              <a:srgbClr val="CDD3DB"/>
-            </a:solidFill>
-          </a:ln>
-        </p:spPr>
-        <p:style>
-          <a:lnRef idx="1">
-            <a:schemeClr val="accent1"/>
-          </a:lnRef>
-          <a:fillRef idx="3">
-            <a:schemeClr val="accent1"/>
-          </a:fillRef>
-          <a:effectRef idx="2">
-            <a:schemeClr val="accent1"/>
-          </a:effectRef>
-          <a:fontRef idx="minor">
-            <a:schemeClr val="lt1"/>
-          </a:fontRef>
-        </p:style>
-        <p:txBody>
-          <a:bodyPr rtlCol="0" anchor="ctr"/>
-          <a:lstStyle/>
-          <a:p>
-            <a:pPr algn="ctr"/>
-            <a:r>
-              <a:rPr sz="1200" b="1">
-                <a:solidFill>
-                  <a:srgbClr val="588760"/>
-                </a:solidFill>
-                <a:latin typeface="Aptos"/>
-              </a:rPr>
-              <a:t>SFT row
-JSON target</a:t>
-            </a:r>
-          </a:p>
-        </p:txBody>
-      </p:sp>
-      <p:sp>
-        <p:nvSpPr>
-          <p:cNvPr id="16" name="Rounded Rectangle 15"/>
-          <p:cNvSpPr/>
-          <p:nvPr/>
-        </p:nvSpPr>
-        <p:spPr>
-          <a:xfrm>
-            <a:off x="731520" y="2743200"/>
-            <a:ext cx="5074920" cy="2331720"/>
+            <a:off x="731520" y="1417320"/>
+            <a:ext cx="3383280" cy="2377440"/>
           </a:xfrm>
           <a:prstGeom prst="roundRect">
             <a:avLst/>
@@ -11312,14 +11434,14 @@
       </p:sp>
       <p:sp>
         <p:nvSpPr>
-          <p:cNvPr id="17" name="Rectangle 16"/>
+          <p:cNvPr id="6" name="Rectangle 5"/>
           <p:cNvSpPr/>
           <p:nvPr/>
         </p:nvSpPr>
         <p:spPr>
           <a:xfrm>
-            <a:off x="731520" y="2743200"/>
-            <a:ext cx="73152" cy="2331720"/>
+            <a:off x="731520" y="1417320"/>
+            <a:ext cx="73152" cy="2377440"/>
           </a:xfrm>
           <a:prstGeom prst="rect">
             <a:avLst/>
@@ -11355,14 +11477,14 @@
       </p:sp>
       <p:sp>
         <p:nvSpPr>
-          <p:cNvPr id="18" name="TextBox 17"/>
+          <p:cNvPr id="7" name="TextBox 6"/>
           <p:cNvSpPr txBox="1"/>
           <p:nvPr/>
         </p:nvSpPr>
         <p:spPr>
           <a:xfrm>
-            <a:off x="932688" y="2907792"/>
-            <a:ext cx="4690872" cy="2103120"/>
+            <a:off x="932688" y="1581912"/>
+            <a:ext cx="2999232" cy="2148840"/>
           </a:xfrm>
           <a:prstGeom prst="rect">
             <a:avLst/>
@@ -11382,8 +11504,14 @@
                 </a:solidFill>
                 <a:latin typeface="Aptos"/>
               </a:rPr>
-              <a:t>Canonical dataset row</a:t>
-            </a:r>
+              <a:t>Baselines</a:t>
+            </a:r>
+            <a:endParaRPr sz="1400" b="1">
+              <a:solidFill>
+                <a:srgbClr val="203044"/>
+              </a:solidFill>
+              <a:latin typeface="Aptos"/>
+            </a:endParaRPr>
           </a:p>
           <a:p>
             <a:pPr>
@@ -11398,7 +11526,7 @@
               </a:defRPr>
             </a:pPr>
             <a:r>
-              <a:t>Positive: corrupted tokens + nonempty cells</a:t>
+              <a:t>random</a:t>
             </a:r>
           </a:p>
           <a:p>
@@ -11414,7 +11542,7 @@
               </a:defRPr>
             </a:pPr>
             <a:r>
-              <a:t>Negative: same clean tokens + {"cells":[]}</a:t>
+              <a:t>token_prior</a:t>
             </a:r>
           </a:p>
           <a:p>
@@ -11430,21 +11558,53 @@
               </a:defRPr>
             </a:pPr>
             <a:r>
-              <a:t>Decoded images are audit-only, not label sources</a:t>
-            </a:r>
-          </a:p>
-        </p:txBody>
-      </p:sp>
-      <p:sp>
-        <p:nvSpPr>
-          <p:cNvPr id="19" name="Rounded Rectangle 18"/>
+              <a:t>RGB diff oracle</a:t>
+            </a:r>
+          </a:p>
+          <a:p>
+            <a:pPr>
+              <a:spcBef>
+                <a:spcPts val="600"/>
+              </a:spcBef>
+              <a:defRPr sz="1100">
+                <a:solidFill>
+                  <a:srgbClr val="465260"/>
+                </a:solidFill>
+                <a:latin typeface="Aptos"/>
+              </a:defRPr>
+            </a:pPr>
+            <a:r>
+              <a:t>RGB localizer</a:t>
+            </a:r>
+          </a:p>
+          <a:p>
+            <a:pPr>
+              <a:spcBef>
+                <a:spcPts val="600"/>
+              </a:spcBef>
+              <a:defRPr sz="1100">
+                <a:solidFill>
+                  <a:srgbClr val="465260"/>
+                </a:solidFill>
+                <a:latin typeface="Aptos"/>
+              </a:defRPr>
+            </a:pPr>
+            <a:r>
+              <a:t>prompt + RGB localizer</a:t>
+            </a:r>
+          </a:p>
+        </p:txBody>
+      </p:sp>
+      <p:sp>
+        <p:nvSpPr>
+          <p:cNvPr id="8" name="Rounded Rectangle 7"/>
           <p:cNvSpPr/>
           <p:nvPr/>
         </p:nvSpPr>
         <p:spPr>
           <a:xfrm>
-            <a:off x="6263640" y="2743200"/>
-            <a:ext cx="5074920" cy="2331720"/>
+            <a:off x="4434840" y="1417320"/>
+            <a:ext cx="3383280" cy="2377440"/>
           </a:xfrm>
           <a:prstGeom prst="roundRect">
             <a:avLst/>
@@ -11482,14 +11642,14 @@
       </p:sp>
       <p:sp>
         <p:nvSpPr>
-          <p:cNvPr id="20" name="Rectangle 19"/>
+          <p:cNvPr id="9" name="Rectangle 8"/>
           <p:cNvSpPr/>
           <p:nvPr/>
         </p:nvSpPr>
         <p:spPr>
           <a:xfrm>
-            <a:off x="6263640" y="2743200"/>
-            <a:ext cx="73152" cy="2331720"/>
+            <a:off x="4434840" y="1417320"/>
+            <a:ext cx="73152" cy="2377440"/>
           </a:xfrm>
           <a:prstGeom prst="rect">
             <a:avLst/>
@@ -11525,14 +11685,14 @@
       </p:sp>
       <p:sp>
         <p:nvSpPr>
-          <p:cNvPr id="21" name="TextBox 20"/>
+          <p:cNvPr id="10" name="TextBox 9"/>
           <p:cNvSpPr txBox="1"/>
           <p:nvPr/>
         </p:nvSpPr>
         <p:spPr>
           <a:xfrm>
-            <a:off x="6464808" y="2907792"/>
-            <a:ext cx="4690872" cy="2103120"/>
+            <a:off x="4636008" y="1581912"/>
+            <a:ext cx="2999232" cy="2148840"/>
           </a:xfrm>
           <a:prstGeom prst="rect">
             <a:avLst/>
@@ -11552,8 +11712,14 @@
                 </a:solidFill>
                 <a:latin typeface="Aptos"/>
               </a:rPr>
-              <a:t>Current scale target</a:t>
-            </a:r>
+              <a:t>Metrics</a:t>
+            </a:r>
+            <a:endParaRPr sz="1400" b="1">
+              <a:solidFill>
+                <a:srgbClr val="203044"/>
+              </a:solidFill>
+              <a:latin typeface="Aptos"/>
+            </a:endParaRPr>
           </a:p>
           <a:p>
             <a:pPr>
@@ -11568,7 +11734,7 @@
               </a:defRPr>
             </a:pPr>
             <a:r>
-              <a:t>10k clean prompts / clean tokens</a:t>
+              <a:t>precision / recall / F1</a:t>
             </a:r>
           </a:p>
           <a:p>
@@ -11584,7 +11750,7 @@
               </a:defRPr>
             </a:pPr>
             <a:r>
-              <a:t>30k positive + 10k negative repair rows</a:t>
+              <a:t>cell IoU</a:t>
             </a:r>
           </a:p>
           <a:p>
@@ -11600,21 +11766,125 @@
               </a:defRPr>
             </a:pPr>
             <a:r>
-              <a:t>Group-safe SFT split by source clean sample</a:t>
-            </a:r>
-          </a:p>
-        </p:txBody>
-      </p:sp>
-      <p:sp>
-        <p:nvSpPr>
-          <p:cNvPr id="22" name="TextBox 21"/>
+              <a:t>hit_any</a:t>
+            </a:r>
+          </a:p>
+          <a:p>
+            <a:pPr>
+              <a:spcBef>
+                <a:spcPts val="600"/>
+              </a:spcBef>
+              <a:defRPr sz="1100">
+                <a:solidFill>
+                  <a:srgbClr val="465260"/>
+                </a:solidFill>
+                <a:latin typeface="Aptos"/>
+              </a:defRPr>
+            </a:pPr>
+            <a:r>
+              <a:t>distance to target cells</a:t>
+            </a:r>
+          </a:p>
+        </p:txBody>
+      </p:sp>
+      <p:sp>
+        <p:nvSpPr>
+          <p:cNvPr id="11" name="Rounded Rectangle 10"/>
+          <p:cNvSpPr/>
+          <p:nvPr/>
+        </p:nvSpPr>
+        <p:spPr>
+          <a:xfrm>
+            <a:off x="8138160" y="1417320"/>
+            <a:ext cx="3383280" cy="2377440"/>
+          </a:xfrm>
+          <a:prstGeom prst="roundRect">
+            <a:avLst/>
+          </a:prstGeom>
+          <a:solidFill>
+            <a:srgbClr val="FFFFFF"/>
+          </a:solidFill>
+          <a:ln w="10160">
+            <a:solidFill>
+              <a:srgbClr val="CDD3DB"/>
+            </a:solidFill>
+          </a:ln>
+        </p:spPr>
+        <p:style>
+          <a:lnRef idx="1">
+            <a:schemeClr val="accent1"/>
+          </a:lnRef>
+          <a:fillRef idx="3">
+            <a:schemeClr val="accent1"/>
+          </a:fillRef>
+          <a:effectRef idx="2">
+            <a:schemeClr val="accent1"/>
+          </a:effectRef>
+          <a:fontRef idx="minor">
+            <a:schemeClr val="lt1"/>
+          </a:fontRef>
+        </p:style>
+        <p:txBody>
+          <a:bodyPr rtlCol="0" anchor="ctr"/>
+          <a:lstStyle/>
+          <a:p>
+            <a:pPr algn="ctr"/>
+          </a:p>
+        </p:txBody>
+      </p:sp>
+      <p:sp>
+        <p:nvSpPr>
+          <p:cNvPr id="12" name="Rectangle 11"/>
+          <p:cNvSpPr/>
+          <p:nvPr/>
+        </p:nvSpPr>
+        <p:spPr>
+          <a:xfrm>
+            <a:off x="8138160" y="1417320"/>
+            <a:ext cx="73152" cy="2377440"/>
+          </a:xfrm>
+          <a:prstGeom prst="rect">
+            <a:avLst/>
+          </a:prstGeom>
+          <a:solidFill>
+            <a:srgbClr val="588760"/>
+          </a:solidFill>
+          <a:ln>
+            <a:noFill/>
+          </a:ln>
+        </p:spPr>
+        <p:style>
+          <a:lnRef idx="1">
+            <a:schemeClr val="accent1"/>
+          </a:lnRef>
+          <a:fillRef idx="3">
+            <a:schemeClr val="accent1"/>
+          </a:fillRef>
+          <a:effectRef idx="2">
+            <a:schemeClr val="accent1"/>
+          </a:effectRef>
+          <a:fontRef idx="minor">
+            <a:schemeClr val="lt1"/>
+          </a:fontRef>
+        </p:style>
+        <p:txBody>
+          <a:bodyPr rtlCol="0" anchor="ctr"/>
+          <a:lstStyle/>
+          <a:p>
+            <a:pPr algn="ctr"/>
+          </a:p>
+        </p:txBody>
+      </p:sp>
+      <p:sp>
+        <p:nvSpPr>
+          <p:cNvPr id="13" name="TextBox 12"/>
           <p:cNvSpPr txBox="1"/>
           <p:nvPr/>
         </p:nvSpPr>
         <p:spPr>
           <a:xfrm>
-            <a:off x="502920" y="6446520"/>
-            <a:ext cx="10789920" cy="228600"/>
+            <a:off x="8339328" y="1581912"/>
+            <a:ext cx="2999232" cy="2148840"/>
           </a:xfrm>
           <a:prstGeom prst="rect">
             <a:avLst/>
@@ -11627,6 +11897,94 @@
           </a:bodyPr>
           <a:lstStyle/>
           <a:p>
+            <a:r>
+              <a:rPr sz="1400" b="1">
+                <a:solidFill>
+                  <a:srgbClr val="203044"/>
+                </a:solidFill>
+                <a:latin typeface="Aptos"/>
+              </a:rPr>
+              <a:t>Recorded gate</a:t>
+            </a:r>
+            <a:endParaRPr sz="1400" b="1">
+              <a:solidFill>
+                <a:srgbClr val="203044"/>
+              </a:solidFill>
+              <a:latin typeface="Aptos"/>
+            </a:endParaRPr>
+          </a:p>
+          <a:p>
+            <a:pPr>
+              <a:spcBef>
+                <a:spcPts val="600"/>
+              </a:spcBef>
+              <a:defRPr sz="1100">
+                <a:solidFill>
+                  <a:srgbClr val="465260"/>
+                </a:solidFill>
+                <a:latin typeface="Aptos"/>
+              </a:defRPr>
+            </a:pPr>
+            <a:r>
+              <a:t>Hard64 dataset: 128 rows</a:t>
+            </a:r>
+          </a:p>
+          <a:p>
+            <a:pPr>
+              <a:spcBef>
+                <a:spcPts val="600"/>
+              </a:spcBef>
+              <a:defRPr sz="1100">
+                <a:solidFill>
+                  <a:srgbClr val="465260"/>
+                </a:solidFill>
+                <a:latin typeface="Aptos"/>
+              </a:defRPr>
+            </a:pPr>
+            <a:r>
+              <a:t>prompt_rgb_localizer: 0.875 hit_any at 16×16</a:t>
+            </a:r>
+          </a:p>
+          <a:p>
+            <a:pPr>
+              <a:spcBef>
+                <a:spcPts val="600"/>
+              </a:spcBef>
+              <a:defRPr sz="1100">
+                <a:solidFill>
+                  <a:srgbClr val="465260"/>
+                </a:solidFill>
+                <a:latin typeface="Aptos"/>
+              </a:defRPr>
+            </a:pPr>
+            <a:r>
+              <a:t>Enough to justify Phase 4</a:t>
+            </a:r>
+          </a:p>
+        </p:txBody>
+      </p:sp>
+      <p:sp>
+        <p:nvSpPr>
+          <p:cNvPr id="15" name="TextBox 14"/>
+          <p:cNvSpPr txBox="1"/>
+          <p:nvPr/>
+        </p:nvSpPr>
+        <p:spPr>
+          <a:xfrm>
+            <a:off x="502920" y="6446520"/>
+            <a:ext cx="10789920" cy="228600"/>
+          </a:xfrm>
+          <a:prstGeom prst="rect">
+            <a:avLst/>
+          </a:prstGeom>
+          <a:noFill/>
+        </p:spPr>
+        <p:txBody>
+          <a:bodyPr wrap="none">
+            <a:spAutoFit/>
+          </a:bodyPr>
+          <a:lstStyle/>
+          <a:p>
             <a:pPr algn="l"/>
             <a:r>
               <a:rPr sz="800" b="0">
@@ -11635,8 +11993,14 @@
                 </a:solidFill>
                 <a:latin typeface="Aptos"/>
               </a:rPr>
-              <a:t>ASCR Stage 3 weekly update | Page 6</a:t>
-            </a:r>
+              <a:t>ASCR Stage 3 weekly update | Page 7</a:t>
+            </a:r>
+            <a:endParaRPr sz="800" b="0">
+              <a:solidFill>
+                <a:srgbClr val="697380"/>
+              </a:solidFill>
+              <a:latin typeface="Aptos"/>
+            </a:endParaRPr>
           </a:p>
         </p:txBody>
       </p:sp>
@@ -11648,8 +12012,8 @@
 </p:sld>
 </file>
 
-<file path=ppt/slides/slide7.xml><?xml version="1.0" encoding="utf-8"?>
-<p:sld xmlns:a="http://schemas.openxmlformats.org/drawingml/2006/main" xmlns:p="http://schemas.openxmlformats.org/presentationml/2006/main" xmlns:r="http://schemas.openxmlformats.org/officeDocument/2006/relationships">
+<file path=ppt/slides/slide8.xml><?xml version="1.0" encoding="utf-8"?>
+<p:sld xmlns:a="http://schemas.openxmlformats.org/drawingml/2006/main" xmlns:r="http://schemas.openxmlformats.org/officeDocument/2006/relationships" xmlns:p="http://schemas.openxmlformats.org/presentationml/2006/main">
   <p:cSld>
     <p:bg>
       <p:bgPr>
@@ -11696,8 +12060,14 @@
                 </a:solidFill>
                 <a:latin typeface="Aptos"/>
               </a:rPr>
-              <a:t>Phase 3: Selector Baselines / 基线选择器</a:t>
-            </a:r>
+              <a:t>Phase 4: MMU / LoRA Repair Learning</a:t>
+            </a:r>
+            <a:endParaRPr sz="2400" b="1">
+              <a:solidFill>
+                <a:srgbClr val="203044"/>
+              </a:solidFill>
+              <a:latin typeface="Aptos"/>
+            </a:endParaRPr>
           </a:p>
         </p:txBody>
       </p:sp>
@@ -11731,8 +12101,14 @@
                 </a:solidFill>
                 <a:latin typeface="Aptos"/>
               </a:rPr>
-              <a:t>Check learnability before training Lumina adapters</a:t>
-            </a:r>
+              <a:t>Train Lumina to output repair cells from corrupted token state</a:t>
+            </a:r>
+            <a:endParaRPr sz="1000" b="0">
+              <a:solidFill>
+                <a:srgbClr val="697380"/>
+              </a:solidFill>
+              <a:latin typeface="Aptos"/>
+            </a:endParaRPr>
           </a:p>
         </p:txBody>
       </p:sp>
@@ -11787,8 +12163,357 @@
         </p:nvSpPr>
         <p:spPr>
           <a:xfrm>
-            <a:off x="731520" y="1417320"/>
-            <a:ext cx="3383280" cy="2377440"/>
+            <a:off x="777240" y="1508760"/>
+            <a:ext cx="1828800" cy="658368"/>
+          </a:xfrm>
+          <a:prstGeom prst="roundRect">
+            <a:avLst/>
+          </a:prstGeom>
+          <a:solidFill>
+            <a:srgbClr val="FFFFFF"/>
+          </a:solidFill>
+          <a:ln w="11430">
+            <a:solidFill>
+              <a:srgbClr val="CDD3DB"/>
+            </a:solidFill>
+          </a:ln>
+        </p:spPr>
+        <p:style>
+          <a:lnRef idx="1">
+            <a:schemeClr val="accent1"/>
+          </a:lnRef>
+          <a:fillRef idx="3">
+            <a:schemeClr val="accent1"/>
+          </a:fillRef>
+          <a:effectRef idx="2">
+            <a:schemeClr val="accent1"/>
+          </a:effectRef>
+          <a:fontRef idx="minor">
+            <a:schemeClr val="lt1"/>
+          </a:fontRef>
+        </p:style>
+        <p:txBody>
+          <a:bodyPr rtlCol="0" anchor="ctr"/>
+          <a:lstStyle/>
+          <a:p>
+            <a:pPr algn="ctr"/>
+            <a:r>
+              <a:rPr sz="1200" b="1">
+                <a:solidFill>
+                  <a:srgbClr val="426792"/>
+                </a:solidFill>
+                <a:latin typeface="Aptos"/>
+              </a:rPr>
+              <a:t>Prompt +
+corrupted tokens</a:t>
+            </a:r>
+            <a:endParaRPr sz="1200" b="1">
+              <a:solidFill>
+                <a:srgbClr val="426792"/>
+              </a:solidFill>
+              <a:latin typeface="Aptos"/>
+            </a:endParaRPr>
+          </a:p>
+        </p:txBody>
+      </p:sp>
+      <p:sp>
+        <p:nvSpPr>
+          <p:cNvPr id="6" name="Rounded Rectangle 5"/>
+          <p:cNvSpPr/>
+          <p:nvPr/>
+        </p:nvSpPr>
+        <p:spPr>
+          <a:xfrm>
+            <a:off x="3246120" y="1508760"/>
+            <a:ext cx="1828800" cy="658368"/>
+          </a:xfrm>
+          <a:prstGeom prst="roundRect">
+            <a:avLst/>
+          </a:prstGeom>
+          <a:solidFill>
+            <a:srgbClr val="FFFFFF"/>
+          </a:solidFill>
+          <a:ln w="11430">
+            <a:solidFill>
+              <a:srgbClr val="CDD3DB"/>
+            </a:solidFill>
+          </a:ln>
+        </p:spPr>
+        <p:style>
+          <a:lnRef idx="1">
+            <a:schemeClr val="accent1"/>
+          </a:lnRef>
+          <a:fillRef idx="3">
+            <a:schemeClr val="accent1"/>
+          </a:fillRef>
+          <a:effectRef idx="2">
+            <a:schemeClr val="accent1"/>
+          </a:effectRef>
+          <a:fontRef idx="minor">
+            <a:schemeClr val="lt1"/>
+          </a:fontRef>
+        </p:style>
+        <p:txBody>
+          <a:bodyPr rtlCol="0" anchor="ctr"/>
+          <a:lstStyle/>
+          <a:p>
+            <a:pPr algn="ctr"/>
+            <a:r>
+              <a:rPr sz="1200" b="1">
+                <a:solidFill>
+                  <a:srgbClr val="4E817C"/>
+                </a:solidFill>
+                <a:latin typeface="Aptos"/>
+              </a:rPr>
+              <a:t>Lumina MMU
+answer path</a:t>
+            </a:r>
+            <a:endParaRPr sz="1200" b="1">
+              <a:solidFill>
+                <a:srgbClr val="4E817C"/>
+              </a:solidFill>
+              <a:latin typeface="Aptos"/>
+            </a:endParaRPr>
+          </a:p>
+        </p:txBody>
+      </p:sp>
+      <p:sp>
+        <p:nvSpPr>
+          <p:cNvPr id="7" name="Rounded Rectangle 6"/>
+          <p:cNvSpPr/>
+          <p:nvPr/>
+        </p:nvSpPr>
+        <p:spPr>
+          <a:xfrm>
+            <a:off x="5715000" y="1508760"/>
+            <a:ext cx="1828800" cy="658368"/>
+          </a:xfrm>
+          <a:prstGeom prst="roundRect">
+            <a:avLst/>
+          </a:prstGeom>
+          <a:solidFill>
+            <a:srgbClr val="FFFFFF"/>
+          </a:solidFill>
+          <a:ln w="11430">
+            <a:solidFill>
+              <a:srgbClr val="CDD3DB"/>
+            </a:solidFill>
+          </a:ln>
+        </p:spPr>
+        <p:style>
+          <a:lnRef idx="1">
+            <a:schemeClr val="accent1"/>
+          </a:lnRef>
+          <a:fillRef idx="3">
+            <a:schemeClr val="accent1"/>
+          </a:fillRef>
+          <a:effectRef idx="2">
+            <a:schemeClr val="accent1"/>
+          </a:effectRef>
+          <a:fontRef idx="minor">
+            <a:schemeClr val="lt1"/>
+          </a:fontRef>
+        </p:style>
+        <p:txBody>
+          <a:bodyPr rtlCol="0" anchor="ctr"/>
+          <a:lstStyle/>
+          <a:p>
+            <a:pPr algn="ctr"/>
+            <a:r>
+              <a:rPr sz="1200" b="1">
+                <a:solidFill>
+                  <a:srgbClr val="9C7A3F"/>
+                </a:solidFill>
+                <a:latin typeface="Aptos"/>
+              </a:rPr>
+              <a:t>LoRA SFT
+adapter</a:t>
+            </a:r>
+            <a:endParaRPr sz="1200" b="1">
+              <a:solidFill>
+                <a:srgbClr val="9C7A3F"/>
+              </a:solidFill>
+              <a:latin typeface="Aptos"/>
+            </a:endParaRPr>
+          </a:p>
+        </p:txBody>
+      </p:sp>
+      <p:sp>
+        <p:nvSpPr>
+          <p:cNvPr id="8" name="Rounded Rectangle 7"/>
+          <p:cNvSpPr/>
+          <p:nvPr/>
+        </p:nvSpPr>
+        <p:spPr>
+          <a:xfrm>
+            <a:off x="8183879" y="1508760"/>
+            <a:ext cx="1828800" cy="658368"/>
+          </a:xfrm>
+          <a:prstGeom prst="roundRect">
+            <a:avLst/>
+          </a:prstGeom>
+          <a:solidFill>
+            <a:srgbClr val="FFFFFF"/>
+          </a:solidFill>
+          <a:ln w="11430">
+            <a:solidFill>
+              <a:srgbClr val="CDD3DB"/>
+            </a:solidFill>
+          </a:ln>
+        </p:spPr>
+        <p:style>
+          <a:lnRef idx="1">
+            <a:schemeClr val="accent1"/>
+          </a:lnRef>
+          <a:fillRef idx="3">
+            <a:schemeClr val="accent1"/>
+          </a:fillRef>
+          <a:effectRef idx="2">
+            <a:schemeClr val="accent1"/>
+          </a:effectRef>
+          <a:fontRef idx="minor">
+            <a:schemeClr val="lt1"/>
+          </a:fontRef>
+        </p:style>
+        <p:txBody>
+          <a:bodyPr rtlCol="0" anchor="ctr"/>
+          <a:lstStyle/>
+          <a:p>
+            <a:pPr algn="ctr"/>
+            <a:r>
+              <a:rPr sz="1200" b="1">
+                <a:solidFill>
+                  <a:srgbClr val="588760"/>
+                </a:solidFill>
+                <a:latin typeface="Aptos"/>
+              </a:rPr>
+              <a:t>JSON
+{"cells":[]}</a:t>
+            </a:r>
+            <a:endParaRPr sz="1200" b="1">
+              <a:solidFill>
+                <a:srgbClr val="588760"/>
+              </a:solidFill>
+              <a:latin typeface="Aptos"/>
+            </a:endParaRPr>
+          </a:p>
+        </p:txBody>
+      </p:sp>
+      <p:cxnSp>
+        <p:nvCxnSpPr>
+          <p:cNvPr id="9" name="Connector 8"/>
+          <p:cNvCxnSpPr/>
+          <p:nvPr/>
+        </p:nvCxnSpPr>
+        <p:spPr>
+          <a:xfrm>
+            <a:off x="2606040" y="1837943"/>
+            <a:ext cx="548640" cy="0"/>
+          </a:xfrm>
+          <a:prstGeom prst="line">
+            <a:avLst/>
+          </a:prstGeom>
+          <a:ln w="20320">
+            <a:solidFill>
+              <a:srgbClr val="465260"/>
+            </a:solidFill>
+          </a:ln>
+        </p:spPr>
+        <p:style>
+          <a:lnRef idx="2">
+            <a:schemeClr val="accent1"/>
+          </a:lnRef>
+          <a:fillRef idx="0">
+            <a:schemeClr val="accent1"/>
+          </a:fillRef>
+          <a:effectRef idx="1">
+            <a:schemeClr val="accent1"/>
+          </a:effectRef>
+          <a:fontRef idx="minor">
+            <a:schemeClr val="tx1"/>
+          </a:fontRef>
+        </p:style>
+      </p:cxnSp>
+      <p:cxnSp>
+        <p:nvCxnSpPr>
+          <p:cNvPr id="10" name="Connector 9"/>
+          <p:cNvCxnSpPr/>
+          <p:nvPr/>
+        </p:nvCxnSpPr>
+        <p:spPr>
+          <a:xfrm>
+            <a:off x="5074920" y="1837943"/>
+            <a:ext cx="548640" cy="0"/>
+          </a:xfrm>
+          <a:prstGeom prst="line">
+            <a:avLst/>
+          </a:prstGeom>
+          <a:ln w="20320">
+            <a:solidFill>
+              <a:srgbClr val="465260"/>
+            </a:solidFill>
+          </a:ln>
+        </p:spPr>
+        <p:style>
+          <a:lnRef idx="2">
+            <a:schemeClr val="accent1"/>
+          </a:lnRef>
+          <a:fillRef idx="0">
+            <a:schemeClr val="accent1"/>
+          </a:fillRef>
+          <a:effectRef idx="1">
+            <a:schemeClr val="accent1"/>
+          </a:effectRef>
+          <a:fontRef idx="minor">
+            <a:schemeClr val="tx1"/>
+          </a:fontRef>
+        </p:style>
+      </p:cxnSp>
+      <p:cxnSp>
+        <p:nvCxnSpPr>
+          <p:cNvPr id="11" name="Connector 10"/>
+          <p:cNvCxnSpPr/>
+          <p:nvPr/>
+        </p:nvCxnSpPr>
+        <p:spPr>
+          <a:xfrm>
+            <a:off x="7543800" y="1837943"/>
+            <a:ext cx="548640" cy="0"/>
+          </a:xfrm>
+          <a:prstGeom prst="line">
+            <a:avLst/>
+          </a:prstGeom>
+          <a:ln w="20320">
+            <a:solidFill>
+              <a:srgbClr val="465260"/>
+            </a:solidFill>
+          </a:ln>
+        </p:spPr>
+        <p:style>
+          <a:lnRef idx="2">
+            <a:schemeClr val="accent1"/>
+          </a:lnRef>
+          <a:fillRef idx="0">
+            <a:schemeClr val="accent1"/>
+          </a:fillRef>
+          <a:effectRef idx="1">
+            <a:schemeClr val="accent1"/>
+          </a:effectRef>
+          <a:fontRef idx="minor">
+            <a:schemeClr val="tx1"/>
+          </a:fontRef>
+        </p:style>
+      </p:cxnSp>
+      <p:sp>
+        <p:nvSpPr>
+          <p:cNvPr id="12" name="Rounded Rectangle 11"/>
+          <p:cNvSpPr/>
+          <p:nvPr/>
+        </p:nvSpPr>
+        <p:spPr>
+          <a:xfrm>
+            <a:off x="731520" y="2788920"/>
+            <a:ext cx="5074920" cy="2240280"/>
           </a:xfrm>
           <a:prstGeom prst="roundRect">
             <a:avLst/>
@@ -11826,14 +12551,14 @@
       </p:sp>
       <p:sp>
         <p:nvSpPr>
-          <p:cNvPr id="6" name="Rectangle 5"/>
+          <p:cNvPr id="13" name="Rectangle 12"/>
           <p:cNvSpPr/>
           <p:nvPr/>
         </p:nvSpPr>
         <p:spPr>
           <a:xfrm>
-            <a:off x="731520" y="1417320"/>
-            <a:ext cx="73152" cy="2377440"/>
+            <a:off x="731520" y="2788920"/>
+            <a:ext cx="73152" cy="2240280"/>
           </a:xfrm>
           <a:prstGeom prst="rect">
             <a:avLst/>
@@ -11869,14 +12594,14 @@
       </p:sp>
       <p:sp>
         <p:nvSpPr>
-          <p:cNvPr id="7" name="TextBox 6"/>
+          <p:cNvPr id="14" name="TextBox 13"/>
           <p:cNvSpPr txBox="1"/>
           <p:nvPr/>
         </p:nvSpPr>
         <p:spPr>
           <a:xfrm>
-            <a:off x="932688" y="1581912"/>
-            <a:ext cx="2999232" cy="2148840"/>
+            <a:off x="932688" y="2953512"/>
+            <a:ext cx="4690872" cy="2011680"/>
           </a:xfrm>
           <a:prstGeom prst="rect">
             <a:avLst/>
@@ -11896,8 +12621,14 @@
                 </a:solidFill>
                 <a:latin typeface="Aptos"/>
               </a:rPr>
-              <a:t>Baselines</a:t>
-            </a:r>
+              <a:t>What has been implemented</a:t>
+            </a:r>
+            <a:endParaRPr sz="1400" b="1">
+              <a:solidFill>
+                <a:srgbClr val="203044"/>
+              </a:solidFill>
+              <a:latin typeface="Aptos"/>
+            </a:endParaRPr>
           </a:p>
           <a:p>
             <a:pPr>
@@ -11912,7 +12643,7 @@
               </a:defRPr>
             </a:pPr>
             <a:r>
-              <a:t>random</a:t>
+              <a:t>SFT prep + Lumina SFT conversion</a:t>
             </a:r>
           </a:p>
           <a:p>
@@ -11928,7 +12659,7 @@
               </a:defRPr>
             </a:pPr>
             <a:r>
-              <a:t>token_prior</a:t>
+              <a:t>VQ-token and decoded-image input modes</a:t>
             </a:r>
           </a:p>
           <a:p>
@@ -11944,7 +12675,7 @@
               </a:defRPr>
             </a:pPr>
             <a:r>
-              <a:t>RGB diff oracle</a:t>
+              <a:t>Single-GPU and DDP LoRA training wrappers</a:t>
             </a:r>
           </a:p>
           <a:p>
@@ -11960,37 +12691,21 @@
               </a:defRPr>
             </a:pPr>
             <a:r>
-              <a:t>RGB localizer</a:t>
-            </a:r>
-          </a:p>
-          <a:p>
-            <a:pPr>
-              <a:spcBef>
-                <a:spcPts val="600"/>
-              </a:spcBef>
-              <a:defRPr sz="1100">
-                <a:solidFill>
-                  <a:srgbClr val="465260"/>
-                </a:solidFill>
-                <a:latin typeface="Aptos"/>
-              </a:defRPr>
-            </a:pPr>
-            <a:r>
-              <a:t>prompt + RGB localizer</a:t>
-            </a:r>
-          </a:p>
-        </p:txBody>
-      </p:sp>
-      <p:sp>
-        <p:nvSpPr>
-          <p:cNvPr id="8" name="Rounded Rectangle 7"/>
+              <a:t>H200/L40S profile configs</a:t>
+            </a:r>
+          </a:p>
+        </p:txBody>
+      </p:sp>
+      <p:sp>
+        <p:nvSpPr>
+          <p:cNvPr id="15" name="Rounded Rectangle 14"/>
           <p:cNvSpPr/>
           <p:nvPr/>
         </p:nvSpPr>
         <p:spPr>
           <a:xfrm>
-            <a:off x="4434840" y="1417320"/>
-            <a:ext cx="3383280" cy="2377440"/>
+            <a:off x="6263640" y="2788920"/>
+            <a:ext cx="5074920" cy="2240280"/>
           </a:xfrm>
           <a:prstGeom prst="roundRect">
             <a:avLst/>
@@ -12028,20 +12743,20 @@
       </p:sp>
       <p:sp>
         <p:nvSpPr>
-          <p:cNvPr id="9" name="Rectangle 8"/>
+          <p:cNvPr id="16" name="Rectangle 15"/>
           <p:cNvSpPr/>
           <p:nvPr/>
         </p:nvSpPr>
         <p:spPr>
           <a:xfrm>
-            <a:off x="4434840" y="1417320"/>
-            <a:ext cx="73152" cy="2377440"/>
+            <a:off x="6263640" y="2788920"/>
+            <a:ext cx="73152" cy="2240280"/>
           </a:xfrm>
           <a:prstGeom prst="rect">
             <a:avLst/>
           </a:prstGeom>
           <a:solidFill>
-            <a:srgbClr val="4E817C"/>
+            <a:srgbClr val="9C7A3F"/>
           </a:solidFill>
           <a:ln>
             <a:noFill/>
@@ -12071,14 +12786,14 @@
       </p:sp>
       <p:sp>
         <p:nvSpPr>
-          <p:cNvPr id="10" name="TextBox 9"/>
+          <p:cNvPr id="17" name="TextBox 16"/>
           <p:cNvSpPr txBox="1"/>
           <p:nvPr/>
         </p:nvSpPr>
         <p:spPr>
           <a:xfrm>
-            <a:off x="4636008" y="1581912"/>
-            <a:ext cx="2999232" cy="2148840"/>
+            <a:off x="6464808" y="2953512"/>
+            <a:ext cx="4690872" cy="2011680"/>
           </a:xfrm>
           <a:prstGeom prst="rect">
             <a:avLst/>
@@ -12098,8 +12813,14 @@
                 </a:solidFill>
                 <a:latin typeface="Aptos"/>
               </a:rPr>
-              <a:t>Metrics</a:t>
-            </a:r>
+              <a:t>Known Phase-4 evidence</a:t>
+            </a:r>
+            <a:endParaRPr sz="1400" b="1">
+              <a:solidFill>
+                <a:srgbClr val="203044"/>
+              </a:solidFill>
+              <a:latin typeface="Aptos"/>
+            </a:endParaRPr>
           </a:p>
           <a:p>
             <a:pPr>
@@ -12114,7 +12835,7 @@
               </a:defRPr>
             </a:pPr>
             <a:r>
-              <a:t>precision / recall / F1</a:t>
+              <a:t>Zero-shot parse_rate: 0.0 on early probe</a:t>
             </a:r>
           </a:p>
           <a:p>
@@ -12130,7 +12851,7 @@
               </a:defRPr>
             </a:pPr>
             <a:r>
-              <a:t>cell IoU</a:t>
+              <a:t>Old-schema LoRA loss: 9.75 → 0.157</a:t>
             </a:r>
           </a:p>
           <a:p>
@@ -12146,125 +12867,21 @@
               </a:defRPr>
             </a:pPr>
             <a:r>
-              <a:t>hit_any</a:t>
-            </a:r>
-          </a:p>
-          <a:p>
-            <a:pPr>
-              <a:spcBef>
-                <a:spcPts val="600"/>
-              </a:spcBef>
-              <a:defRPr sz="1100">
-                <a:solidFill>
-                  <a:srgbClr val="465260"/>
-                </a:solidFill>
-                <a:latin typeface="Aptos"/>
-              </a:defRPr>
-            </a:pPr>
-            <a:r>
-              <a:t>distance to target cells</a:t>
-            </a:r>
-          </a:p>
-        </p:txBody>
-      </p:sp>
-      <p:sp>
-        <p:nvSpPr>
-          <p:cNvPr id="11" name="Rounded Rectangle 10"/>
-          <p:cNvSpPr/>
-          <p:nvPr/>
-        </p:nvSpPr>
-        <p:spPr>
-          <a:xfrm>
-            <a:off x="8138160" y="1417320"/>
-            <a:ext cx="3383280" cy="2377440"/>
-          </a:xfrm>
-          <a:prstGeom prst="roundRect">
-            <a:avLst/>
-          </a:prstGeom>
-          <a:solidFill>
-            <a:srgbClr val="FFFFFF"/>
-          </a:solidFill>
-          <a:ln w="10160">
-            <a:solidFill>
-              <a:srgbClr val="CDD3DB"/>
-            </a:solidFill>
-          </a:ln>
-        </p:spPr>
-        <p:style>
-          <a:lnRef idx="1">
-            <a:schemeClr val="accent1"/>
-          </a:lnRef>
-          <a:fillRef idx="3">
-            <a:schemeClr val="accent1"/>
-          </a:fillRef>
-          <a:effectRef idx="2">
-            <a:schemeClr val="accent1"/>
-          </a:effectRef>
-          <a:fontRef idx="minor">
-            <a:schemeClr val="lt1"/>
-          </a:fontRef>
-        </p:style>
-        <p:txBody>
-          <a:bodyPr rtlCol="0" anchor="ctr"/>
-          <a:lstStyle/>
-          <a:p>
-            <a:pPr algn="ctr"/>
-          </a:p>
-        </p:txBody>
-      </p:sp>
-      <p:sp>
-        <p:nvSpPr>
-          <p:cNvPr id="12" name="Rectangle 11"/>
-          <p:cNvSpPr/>
-          <p:nvPr/>
-        </p:nvSpPr>
-        <p:spPr>
-          <a:xfrm>
-            <a:off x="8138160" y="1417320"/>
-            <a:ext cx="73152" cy="2377440"/>
-          </a:xfrm>
-          <a:prstGeom prst="rect">
-            <a:avLst/>
-          </a:prstGeom>
-          <a:solidFill>
-            <a:srgbClr val="588760"/>
-          </a:solidFill>
-          <a:ln>
-            <a:noFill/>
-          </a:ln>
-        </p:spPr>
-        <p:style>
-          <a:lnRef idx="1">
-            <a:schemeClr val="accent1"/>
-          </a:lnRef>
-          <a:fillRef idx="3">
-            <a:schemeClr val="accent1"/>
-          </a:fillRef>
-          <a:effectRef idx="2">
-            <a:schemeClr val="accent1"/>
-          </a:effectRef>
-          <a:fontRef idx="minor">
-            <a:schemeClr val="lt1"/>
-          </a:fontRef>
-        </p:style>
-        <p:txBody>
-          <a:bodyPr rtlCol="0" anchor="ctr"/>
-          <a:lstStyle/>
-          <a:p>
-            <a:pPr algn="ctr"/>
-          </a:p>
-        </p:txBody>
-      </p:sp>
-      <p:sp>
-        <p:nvSpPr>
-          <p:cNvPr id="13" name="TextBox 12"/>
+              <a:t>Old-schema LoRA eval parse_rate: 0.156; hit_any: 0.0</a:t>
+            </a:r>
+          </a:p>
+        </p:txBody>
+      </p:sp>
+      <p:sp>
+        <p:nvSpPr>
+          <p:cNvPr id="18" name="TextBox 17"/>
           <p:cNvSpPr txBox="1"/>
           <p:nvPr/>
         </p:nvSpPr>
         <p:spPr>
           <a:xfrm>
-            <a:off x="8339328" y="1581912"/>
-            <a:ext cx="2999232" cy="2148840"/>
+            <a:off x="502920" y="6446520"/>
+            <a:ext cx="10789920" cy="228600"/>
           </a:xfrm>
           <a:prstGeom prst="rect">
             <a:avLst/>
@@ -12277,133 +12894,22 @@
           </a:bodyPr>
           <a:lstStyle/>
           <a:p>
-            <a:r>
-              <a:rPr sz="1400" b="1">
-                <a:solidFill>
-                  <a:srgbClr val="203044"/>
+            <a:pPr algn="l"/>
+            <a:r>
+              <a:rPr sz="800" b="0">
+                <a:solidFill>
+                  <a:srgbClr val="697380"/>
                 </a:solidFill>
                 <a:latin typeface="Aptos"/>
               </a:rPr>
-              <a:t>Recorded gate</a:t>
-            </a:r>
-          </a:p>
-          <a:p>
-            <a:pPr>
-              <a:spcBef>
-                <a:spcPts val="600"/>
-              </a:spcBef>
-              <a:defRPr sz="1100">
-                <a:solidFill>
-                  <a:srgbClr val="465260"/>
-                </a:solidFill>
-                <a:latin typeface="Aptos"/>
-              </a:defRPr>
-            </a:pPr>
-            <a:r>
-              <a:t>Hard64 dataset: 128 rows</a:t>
-            </a:r>
-          </a:p>
-          <a:p>
-            <a:pPr>
-              <a:spcBef>
-                <a:spcPts val="600"/>
-              </a:spcBef>
-              <a:defRPr sz="1100">
-                <a:solidFill>
-                  <a:srgbClr val="465260"/>
-                </a:solidFill>
-                <a:latin typeface="Aptos"/>
-              </a:defRPr>
-            </a:pPr>
-            <a:r>
-              <a:t>prompt_rgb_localizer: 0.875 hit_any at 16×16</a:t>
-            </a:r>
-          </a:p>
-          <a:p>
-            <a:pPr>
-              <a:spcBef>
-                <a:spcPts val="600"/>
-              </a:spcBef>
-              <a:defRPr sz="1100">
-                <a:solidFill>
-                  <a:srgbClr val="465260"/>
-                </a:solidFill>
-                <a:latin typeface="Aptos"/>
-              </a:defRPr>
-            </a:pPr>
-            <a:r>
-              <a:t>Enough to justify Phase 4</a:t>
-            </a:r>
-          </a:p>
-        </p:txBody>
-      </p:sp>
-      <p:sp>
-        <p:nvSpPr>
-          <p:cNvPr id="14" name="TextBox 13"/>
-          <p:cNvSpPr txBox="1"/>
-          <p:nvPr/>
-        </p:nvSpPr>
-        <p:spPr>
-          <a:xfrm>
-            <a:off x="914400" y="4617720"/>
-            <a:ext cx="10332720" cy="548640"/>
-          </a:xfrm>
-          <a:prstGeom prst="rect">
-            <a:avLst/>
-          </a:prstGeom>
-          <a:noFill/>
-        </p:spPr>
-        <p:txBody>
-          <a:bodyPr wrap="none">
-            <a:spAutoFit/>
-          </a:bodyPr>
-          <a:lstStyle/>
-          <a:p>
-            <a:pPr algn="ctr"/>
-            <a:r>
-              <a:rPr sz="1300" b="0">
-                <a:solidFill>
-                  <a:srgbClr val="697380"/>
-                </a:solidFill>
-                <a:latin typeface="Aptos"/>
-              </a:rPr>
-              <a:t>Important: the 24-row smoke set validates wiring only; stronger conclusions rely on expanded datasets.</a:t>
-            </a:r>
-          </a:p>
-        </p:txBody>
-      </p:sp>
-      <p:sp>
-        <p:nvSpPr>
-          <p:cNvPr id="15" name="TextBox 14"/>
-          <p:cNvSpPr txBox="1"/>
-          <p:nvPr/>
-        </p:nvSpPr>
-        <p:spPr>
-          <a:xfrm>
-            <a:off x="502920" y="6446520"/>
-            <a:ext cx="10789920" cy="228600"/>
-          </a:xfrm>
-          <a:prstGeom prst="rect">
-            <a:avLst/>
-          </a:prstGeom>
-          <a:noFill/>
-        </p:spPr>
-        <p:txBody>
-          <a:bodyPr wrap="none">
-            <a:spAutoFit/>
-          </a:bodyPr>
-          <a:lstStyle/>
-          <a:p>
-            <a:pPr algn="l"/>
-            <a:r>
-              <a:rPr sz="800" b="0">
-                <a:solidFill>
-                  <a:srgbClr val="697380"/>
-                </a:solidFill>
-                <a:latin typeface="Aptos"/>
-              </a:rPr>
-              <a:t>ASCR Stage 3 weekly update | Page 7</a:t>
-            </a:r>
+              <a:t>ASCR Stage 3 weekly update | Page 8</a:t>
+            </a:r>
+            <a:endParaRPr sz="800" b="0">
+              <a:solidFill>
+                <a:srgbClr val="697380"/>
+              </a:solidFill>
+              <a:latin typeface="Aptos"/>
+            </a:endParaRPr>
           </a:p>
         </p:txBody>
       </p:sp>
@@ -12415,8 +12921,8 @@
 </p:sld>
 </file>
 
-<file path=ppt/slides/slide8.xml><?xml version="1.0" encoding="utf-8"?>
-<p:sld xmlns:a="http://schemas.openxmlformats.org/drawingml/2006/main" xmlns:p="http://schemas.openxmlformats.org/presentationml/2006/main" xmlns:r="http://schemas.openxmlformats.org/officeDocument/2006/relationships">
+<file path=ppt/slides/slide9.xml><?xml version="1.0" encoding="utf-8"?>
+<p:sld xmlns:a="http://schemas.openxmlformats.org/drawingml/2006/main" xmlns:r="http://schemas.openxmlformats.org/officeDocument/2006/relationships" xmlns:p="http://schemas.openxmlformats.org/presentationml/2006/main">
   <p:cSld>
     <p:bg>
       <p:bgPr>
@@ -12463,8 +12969,14 @@
                 </a:solidFill>
                 <a:latin typeface="Aptos"/>
               </a:rPr>
-              <a:t>Phase 4: MMU / LoRA Repair Learning</a:t>
-            </a:r>
+              <a:t>Current Mainline Update / 当前主线</a:t>
+            </a:r>
+            <a:endParaRPr sz="2400" b="1">
+              <a:solidFill>
+                <a:srgbClr val="203044"/>
+              </a:solidFill>
+              <a:latin typeface="Aptos"/>
+            </a:endParaRPr>
           </a:p>
         </p:txBody>
       </p:sp>
@@ -12498,8 +13010,14 @@
                 </a:solidFill>
                 <a:latin typeface="Aptos"/>
               </a:rPr>
-              <a:t>Train Lumina to output repair cells from corrupted token state</a:t>
-            </a:r>
+              <a:t>Token-only 8×8 repair_cells schema</a:t>
+            </a:r>
+            <a:endParaRPr sz="1000" b="0">
+              <a:solidFill>
+                <a:srgbClr val="697380"/>
+              </a:solidFill>
+              <a:latin typeface="Aptos"/>
+            </a:endParaRPr>
           </a:p>
         </p:txBody>
       </p:sp>
@@ -12554,333 +13072,8 @@
         </p:nvSpPr>
         <p:spPr>
           <a:xfrm>
-            <a:off x="777240" y="1508760"/>
-            <a:ext cx="1828800" cy="658368"/>
-          </a:xfrm>
-          <a:prstGeom prst="roundRect">
-            <a:avLst/>
-          </a:prstGeom>
-          <a:solidFill>
-            <a:srgbClr val="FFFFFF"/>
-          </a:solidFill>
-          <a:ln w="11430">
-            <a:solidFill>
-              <a:srgbClr val="CDD3DB"/>
-            </a:solidFill>
-          </a:ln>
-        </p:spPr>
-        <p:style>
-          <a:lnRef idx="1">
-            <a:schemeClr val="accent1"/>
-          </a:lnRef>
-          <a:fillRef idx="3">
-            <a:schemeClr val="accent1"/>
-          </a:fillRef>
-          <a:effectRef idx="2">
-            <a:schemeClr val="accent1"/>
-          </a:effectRef>
-          <a:fontRef idx="minor">
-            <a:schemeClr val="lt1"/>
-          </a:fontRef>
-        </p:style>
-        <p:txBody>
-          <a:bodyPr rtlCol="0" anchor="ctr"/>
-          <a:lstStyle/>
-          <a:p>
-            <a:pPr algn="ctr"/>
-            <a:r>
-              <a:rPr sz="1200" b="1">
-                <a:solidFill>
-                  <a:srgbClr val="426792"/>
-                </a:solidFill>
-                <a:latin typeface="Aptos"/>
-              </a:rPr>
-              <a:t>Prompt +
-corrupted tokens</a:t>
-            </a:r>
-          </a:p>
-        </p:txBody>
-      </p:sp>
-      <p:sp>
-        <p:nvSpPr>
-          <p:cNvPr id="6" name="Rounded Rectangle 5"/>
-          <p:cNvSpPr/>
-          <p:nvPr/>
-        </p:nvSpPr>
-        <p:spPr>
-          <a:xfrm>
-            <a:off x="3246120" y="1508760"/>
-            <a:ext cx="1828800" cy="658368"/>
-          </a:xfrm>
-          <a:prstGeom prst="roundRect">
-            <a:avLst/>
-          </a:prstGeom>
-          <a:solidFill>
-            <a:srgbClr val="FFFFFF"/>
-          </a:solidFill>
-          <a:ln w="11430">
-            <a:solidFill>
-              <a:srgbClr val="CDD3DB"/>
-            </a:solidFill>
-          </a:ln>
-        </p:spPr>
-        <p:style>
-          <a:lnRef idx="1">
-            <a:schemeClr val="accent1"/>
-          </a:lnRef>
-          <a:fillRef idx="3">
-            <a:schemeClr val="accent1"/>
-          </a:fillRef>
-          <a:effectRef idx="2">
-            <a:schemeClr val="accent1"/>
-          </a:effectRef>
-          <a:fontRef idx="minor">
-            <a:schemeClr val="lt1"/>
-          </a:fontRef>
-        </p:style>
-        <p:txBody>
-          <a:bodyPr rtlCol="0" anchor="ctr"/>
-          <a:lstStyle/>
-          <a:p>
-            <a:pPr algn="ctr"/>
-            <a:r>
-              <a:rPr sz="1200" b="1">
-                <a:solidFill>
-                  <a:srgbClr val="4E817C"/>
-                </a:solidFill>
-                <a:latin typeface="Aptos"/>
-              </a:rPr>
-              <a:t>Lumina MMU
-answer path</a:t>
-            </a:r>
-          </a:p>
-        </p:txBody>
-      </p:sp>
-      <p:sp>
-        <p:nvSpPr>
-          <p:cNvPr id="7" name="Rounded Rectangle 6"/>
-          <p:cNvSpPr/>
-          <p:nvPr/>
-        </p:nvSpPr>
-        <p:spPr>
-          <a:xfrm>
-            <a:off x="5715000" y="1508760"/>
-            <a:ext cx="1828800" cy="658368"/>
-          </a:xfrm>
-          <a:prstGeom prst="roundRect">
-            <a:avLst/>
-          </a:prstGeom>
-          <a:solidFill>
-            <a:srgbClr val="FFFFFF"/>
-          </a:solidFill>
-          <a:ln w="11430">
-            <a:solidFill>
-              <a:srgbClr val="CDD3DB"/>
-            </a:solidFill>
-          </a:ln>
-        </p:spPr>
-        <p:style>
-          <a:lnRef idx="1">
-            <a:schemeClr val="accent1"/>
-          </a:lnRef>
-          <a:fillRef idx="3">
-            <a:schemeClr val="accent1"/>
-          </a:fillRef>
-          <a:effectRef idx="2">
-            <a:schemeClr val="accent1"/>
-          </a:effectRef>
-          <a:fontRef idx="minor">
-            <a:schemeClr val="lt1"/>
-          </a:fontRef>
-        </p:style>
-        <p:txBody>
-          <a:bodyPr rtlCol="0" anchor="ctr"/>
-          <a:lstStyle/>
-          <a:p>
-            <a:pPr algn="ctr"/>
-            <a:r>
-              <a:rPr sz="1200" b="1">
-                <a:solidFill>
-                  <a:srgbClr val="9C7A3F"/>
-                </a:solidFill>
-                <a:latin typeface="Aptos"/>
-              </a:rPr>
-              <a:t>LoRA SFT
-adapter</a:t>
-            </a:r>
-          </a:p>
-        </p:txBody>
-      </p:sp>
-      <p:sp>
-        <p:nvSpPr>
-          <p:cNvPr id="8" name="Rounded Rectangle 7"/>
-          <p:cNvSpPr/>
-          <p:nvPr/>
-        </p:nvSpPr>
-        <p:spPr>
-          <a:xfrm>
-            <a:off x="8183879" y="1508760"/>
-            <a:ext cx="1828800" cy="658368"/>
-          </a:xfrm>
-          <a:prstGeom prst="roundRect">
-            <a:avLst/>
-          </a:prstGeom>
-          <a:solidFill>
-            <a:srgbClr val="FFFFFF"/>
-          </a:solidFill>
-          <a:ln w="11430">
-            <a:solidFill>
-              <a:srgbClr val="CDD3DB"/>
-            </a:solidFill>
-          </a:ln>
-        </p:spPr>
-        <p:style>
-          <a:lnRef idx="1">
-            <a:schemeClr val="accent1"/>
-          </a:lnRef>
-          <a:fillRef idx="3">
-            <a:schemeClr val="accent1"/>
-          </a:fillRef>
-          <a:effectRef idx="2">
-            <a:schemeClr val="accent1"/>
-          </a:effectRef>
-          <a:fontRef idx="minor">
-            <a:schemeClr val="lt1"/>
-          </a:fontRef>
-        </p:style>
-        <p:txBody>
-          <a:bodyPr rtlCol="0" anchor="ctr"/>
-          <a:lstStyle/>
-          <a:p>
-            <a:pPr algn="ctr"/>
-            <a:r>
-              <a:rPr sz="1200" b="1">
-                <a:solidFill>
-                  <a:srgbClr val="588760"/>
-                </a:solidFill>
-                <a:latin typeface="Aptos"/>
-              </a:rPr>
-              <a:t>JSON
-{"cells":[]}</a:t>
-            </a:r>
-          </a:p>
-        </p:txBody>
-      </p:sp>
-      <p:cxnSp>
-        <p:nvCxnSpPr>
-          <p:cNvPr id="9" name="Connector 8"/>
-          <p:cNvCxnSpPr/>
-          <p:nvPr/>
-        </p:nvCxnSpPr>
-        <p:spPr>
-          <a:xfrm>
-            <a:off x="2606040" y="1837943"/>
-            <a:ext cx="548640" cy="0"/>
-          </a:xfrm>
-          <a:prstGeom prst="line">
-            <a:avLst/>
-          </a:prstGeom>
-          <a:ln w="20320">
-            <a:solidFill>
-              <a:srgbClr val="465260"/>
-            </a:solidFill>
-          </a:ln>
-        </p:spPr>
-        <p:style>
-          <a:lnRef idx="2">
-            <a:schemeClr val="accent1"/>
-          </a:lnRef>
-          <a:fillRef idx="0">
-            <a:schemeClr val="accent1"/>
-          </a:fillRef>
-          <a:effectRef idx="1">
-            <a:schemeClr val="accent1"/>
-          </a:effectRef>
-          <a:fontRef idx="minor">
-            <a:schemeClr val="tx1"/>
-          </a:fontRef>
-        </p:style>
-      </p:cxnSp>
-      <p:cxnSp>
-        <p:nvCxnSpPr>
-          <p:cNvPr id="10" name="Connector 9"/>
-          <p:cNvCxnSpPr/>
-          <p:nvPr/>
-        </p:nvCxnSpPr>
-        <p:spPr>
-          <a:xfrm>
-            <a:off x="5074920" y="1837943"/>
-            <a:ext cx="548640" cy="0"/>
-          </a:xfrm>
-          <a:prstGeom prst="line">
-            <a:avLst/>
-          </a:prstGeom>
-          <a:ln w="20320">
-            <a:solidFill>
-              <a:srgbClr val="465260"/>
-            </a:solidFill>
-          </a:ln>
-        </p:spPr>
-        <p:style>
-          <a:lnRef idx="2">
-            <a:schemeClr val="accent1"/>
-          </a:lnRef>
-          <a:fillRef idx="0">
-            <a:schemeClr val="accent1"/>
-          </a:fillRef>
-          <a:effectRef idx="1">
-            <a:schemeClr val="accent1"/>
-          </a:effectRef>
-          <a:fontRef idx="minor">
-            <a:schemeClr val="tx1"/>
-          </a:fontRef>
-        </p:style>
-      </p:cxnSp>
-      <p:cxnSp>
-        <p:nvCxnSpPr>
-          <p:cNvPr id="11" name="Connector 10"/>
-          <p:cNvCxnSpPr/>
-          <p:nvPr/>
-        </p:nvCxnSpPr>
-        <p:spPr>
-          <a:xfrm>
-            <a:off x="7543800" y="1837943"/>
-            <a:ext cx="548640" cy="0"/>
-          </a:xfrm>
-          <a:prstGeom prst="line">
-            <a:avLst/>
-          </a:prstGeom>
-          <a:ln w="20320">
-            <a:solidFill>
-              <a:srgbClr val="465260"/>
-            </a:solidFill>
-          </a:ln>
-        </p:spPr>
-        <p:style>
-          <a:lnRef idx="2">
-            <a:schemeClr val="accent1"/>
-          </a:lnRef>
-          <a:fillRef idx="0">
-            <a:schemeClr val="accent1"/>
-          </a:fillRef>
-          <a:effectRef idx="1">
-            <a:schemeClr val="accent1"/>
-          </a:effectRef>
-          <a:fontRef idx="minor">
-            <a:schemeClr val="tx1"/>
-          </a:fontRef>
-        </p:style>
-      </p:cxnSp>
-      <p:sp>
-        <p:nvSpPr>
-          <p:cNvPr id="12" name="Rounded Rectangle 11"/>
-          <p:cNvSpPr/>
-          <p:nvPr/>
-        </p:nvSpPr>
-        <p:spPr>
-          <a:xfrm>
-            <a:off x="731520" y="2788920"/>
-            <a:ext cx="5074920" cy="2240280"/>
+            <a:off x="731520" y="1417320"/>
+            <a:ext cx="5120640" cy="2331720"/>
           </a:xfrm>
           <a:prstGeom prst="roundRect">
             <a:avLst/>
@@ -12918,20 +13111,20 @@
       </p:sp>
       <p:sp>
         <p:nvSpPr>
-          <p:cNvPr id="13" name="Rectangle 12"/>
+          <p:cNvPr id="6" name="Rectangle 5"/>
           <p:cNvSpPr/>
           <p:nvPr/>
         </p:nvSpPr>
         <p:spPr>
           <a:xfrm>
-            <a:off x="731520" y="2788920"/>
-            <a:ext cx="73152" cy="2240280"/>
+            <a:off x="731520" y="1417320"/>
+            <a:ext cx="73152" cy="2331720"/>
           </a:xfrm>
           <a:prstGeom prst="rect">
             <a:avLst/>
           </a:prstGeom>
           <a:solidFill>
-            <a:srgbClr val="426792"/>
+            <a:srgbClr val="588760"/>
           </a:solidFill>
           <a:ln>
             <a:noFill/>
@@ -12961,14 +13154,14 @@
       </p:sp>
       <p:sp>
         <p:nvSpPr>
-          <p:cNvPr id="14" name="TextBox 13"/>
+          <p:cNvPr id="7" name="TextBox 6"/>
           <p:cNvSpPr txBox="1"/>
           <p:nvPr/>
         </p:nvSpPr>
         <p:spPr>
           <a:xfrm>
-            <a:off x="932688" y="2953512"/>
-            <a:ext cx="4690872" cy="2011680"/>
+            <a:off x="932688" y="1581912"/>
+            <a:ext cx="4736592" cy="2103120"/>
           </a:xfrm>
           <a:prstGeom prst="rect">
             <a:avLst/>
@@ -12988,8 +13181,14 @@
                 </a:solidFill>
                 <a:latin typeface="Aptos"/>
               </a:rPr>
-              <a:t>What has been implemented</a:t>
-            </a:r>
+              <a:t>Schema simplification</a:t>
+            </a:r>
+            <a:endParaRPr sz="1400" b="1">
+              <a:solidFill>
+                <a:srgbClr val="203044"/>
+              </a:solidFill>
+              <a:latin typeface="Aptos"/>
+            </a:endParaRPr>
           </a:p>
           <a:p>
             <a:pPr>
@@ -13004,7 +13203,7 @@
               </a:defRPr>
             </a:pPr>
             <a:r>
-              <a:t>SFT prep + Lumina SFT conversion</a:t>
+              <a:t>Target JSON has exactly one key: cells</a:t>
             </a:r>
           </a:p>
           <a:p>
@@ -13020,7 +13219,7 @@
               </a:defRPr>
             </a:pPr>
             <a:r>
-              <a:t>VQ-token and decoded-image input modes</a:t>
+              <a:t>Positive example: {"cells":["D4","D5"]}</a:t>
             </a:r>
           </a:p>
           <a:p>
@@ -13036,37 +13235,21 @@
               </a:defRPr>
             </a:pPr>
             <a:r>
-              <a:t>Single-GPU and DDP LoRA training wrappers</a:t>
-            </a:r>
-          </a:p>
-          <a:p>
-            <a:pPr>
-              <a:spcBef>
-                <a:spcPts val="600"/>
-              </a:spcBef>
-              <a:defRPr sz="1100">
-                <a:solidFill>
-                  <a:srgbClr val="465260"/>
-                </a:solidFill>
-                <a:latin typeface="Aptos"/>
-              </a:defRPr>
-            </a:pPr>
-            <a:r>
-              <a:t>H200/L40S profile configs</a:t>
-            </a:r>
-          </a:p>
-        </p:txBody>
-      </p:sp>
-      <p:sp>
-        <p:nvSpPr>
-          <p:cNvPr id="15" name="Rounded Rectangle 14"/>
+              <a:t>Negative example: {"cells":[]}</a:t>
+            </a:r>
+          </a:p>
+        </p:txBody>
+      </p:sp>
+      <p:sp>
+        <p:nvSpPr>
+          <p:cNvPr id="8" name="Rounded Rectangle 7"/>
           <p:cNvSpPr/>
           <p:nvPr/>
         </p:nvSpPr>
         <p:spPr>
           <a:xfrm>
-            <a:off x="6263640" y="2788920"/>
-            <a:ext cx="5074920" cy="2240280"/>
+            <a:off x="6309360" y="1417320"/>
+            <a:ext cx="5120640" cy="2331720"/>
           </a:xfrm>
           <a:prstGeom prst="roundRect">
             <a:avLst/>
@@ -13104,20 +13287,20 @@
       </p:sp>
       <p:sp>
         <p:nvSpPr>
-          <p:cNvPr id="16" name="Rectangle 15"/>
+          <p:cNvPr id="9" name="Rectangle 8"/>
           <p:cNvSpPr/>
           <p:nvPr/>
         </p:nvSpPr>
         <p:spPr>
           <a:xfrm>
-            <a:off x="6263640" y="2788920"/>
-            <a:ext cx="73152" cy="2240280"/>
+            <a:off x="6309360" y="1417320"/>
+            <a:ext cx="73152" cy="2331720"/>
           </a:xfrm>
           <a:prstGeom prst="rect">
             <a:avLst/>
           </a:prstGeom>
           <a:solidFill>
-            <a:srgbClr val="9C7A3F"/>
+            <a:srgbClr val="426792"/>
           </a:solidFill>
           <a:ln>
             <a:noFill/>
@@ -13147,14 +13330,14 @@
       </p:sp>
       <p:sp>
         <p:nvSpPr>
-          <p:cNvPr id="17" name="TextBox 16"/>
+          <p:cNvPr id="10" name="TextBox 9"/>
           <p:cNvSpPr txBox="1"/>
           <p:nvPr/>
         </p:nvSpPr>
         <p:spPr>
           <a:xfrm>
-            <a:off x="6464808" y="2953512"/>
-            <a:ext cx="4690872" cy="2011680"/>
+            <a:off x="6510528" y="1581912"/>
+            <a:ext cx="4736592" cy="2103120"/>
           </a:xfrm>
           <a:prstGeom prst="rect">
             <a:avLst/>
@@ -13174,8 +13357,14 @@
                 </a:solidFill>
                 <a:latin typeface="Aptos"/>
               </a:rPr>
-              <a:t>Known Phase-4 evidence</a:t>
-            </a:r>
+              <a:t>Why this matters</a:t>
+            </a:r>
+            <a:endParaRPr sz="1400" b="1">
+              <a:solidFill>
+                <a:srgbClr val="203044"/>
+              </a:solidFill>
+              <a:latin typeface="Aptos"/>
+            </a:endParaRPr>
           </a:p>
           <a:p>
             <a:pPr>
@@ -13190,7 +13379,7 @@
               </a:defRPr>
             </a:pPr>
             <a:r>
-              <a:t>Zero-shot parse_rate: 0.0 on early probe</a:t>
+              <a:t>Removes legacy key mismatch</a:t>
             </a:r>
           </a:p>
           <a:p>
@@ -13206,7 +13395,7 @@
               </a:defRPr>
             </a:pPr>
             <a:r>
-              <a:t>Old-schema LoRA loss: 9.75 → 0.157</a:t>
+              <a:t>Directly matches reopen decision</a:t>
             </a:r>
           </a:p>
           <a:p>
@@ -13222,195 +13411,21 @@
               </a:defRPr>
             </a:pPr>
             <a:r>
-              <a:t>Old-schema LoRA eval parse_rate: 0.156; hit_any: 0.0</a:t>
-            </a:r>
-          </a:p>
-        </p:txBody>
-      </p:sp>
-      <p:sp>
-        <p:nvSpPr>
-          <p:cNvPr id="18" name="TextBox 17"/>
-          <p:cNvSpPr txBox="1"/>
-          <p:nvPr/>
-        </p:nvSpPr>
-        <p:spPr>
-          <a:xfrm>
-            <a:off x="502920" y="6446520"/>
-            <a:ext cx="10789920" cy="228600"/>
-          </a:xfrm>
-          <a:prstGeom prst="rect">
-            <a:avLst/>
-          </a:prstGeom>
-          <a:noFill/>
-        </p:spPr>
-        <p:txBody>
-          <a:bodyPr wrap="none">
-            <a:spAutoFit/>
-          </a:bodyPr>
-          <a:lstStyle/>
-          <a:p>
-            <a:pPr algn="l"/>
-            <a:r>
-              <a:rPr sz="800" b="0">
-                <a:solidFill>
-                  <a:srgbClr val="697380"/>
-                </a:solidFill>
-                <a:latin typeface="Aptos"/>
-              </a:rPr>
-              <a:t>ASCR Stage 3 weekly update | Page 8</a:t>
-            </a:r>
-          </a:p>
-        </p:txBody>
-      </p:sp>
-    </p:spTree>
-  </p:cSld>
-  <p:clrMapOvr>
-    <a:masterClrMapping/>
-  </p:clrMapOvr>
-</p:sld>
-</file>
-
-<file path=ppt/slides/slide9.xml><?xml version="1.0" encoding="utf-8"?>
-<p:sld xmlns:a="http://schemas.openxmlformats.org/drawingml/2006/main" xmlns:p="http://schemas.openxmlformats.org/presentationml/2006/main" xmlns:r="http://schemas.openxmlformats.org/officeDocument/2006/relationships">
-  <p:cSld>
-    <p:bg>
-      <p:bgPr>
-        <a:solidFill>
-          <a:srgbClr val="F7F8FA"/>
-        </a:solidFill>
-        <a:effectLst/>
-      </p:bgPr>
-    </p:bg>
-    <p:spTree>
-      <p:nvGrpSpPr>
-        <p:cNvPr id="1" name=""/>
-        <p:cNvGrpSpPr/>
-        <p:nvPr/>
-      </p:nvGrpSpPr>
-      <p:grpSpPr/>
-      <p:sp>
-        <p:nvSpPr>
-          <p:cNvPr id="2" name="TextBox 1"/>
-          <p:cNvSpPr txBox="1"/>
-          <p:nvPr/>
-        </p:nvSpPr>
-        <p:spPr>
-          <a:xfrm>
-            <a:off x="502920" y="320040"/>
-            <a:ext cx="11155680" cy="548640"/>
-          </a:xfrm>
-          <a:prstGeom prst="rect">
-            <a:avLst/>
-          </a:prstGeom>
-          <a:noFill/>
-        </p:spPr>
-        <p:txBody>
-          <a:bodyPr wrap="none">
-            <a:spAutoFit/>
-          </a:bodyPr>
-          <a:lstStyle/>
-          <a:p>
-            <a:pPr algn="l"/>
-            <a:r>
-              <a:rPr sz="2400" b="1">
-                <a:solidFill>
-                  <a:srgbClr val="203044"/>
-                </a:solidFill>
-                <a:latin typeface="Aptos"/>
-              </a:rPr>
-              <a:t>Current Mainline Update / 当前主线</a:t>
-            </a:r>
-          </a:p>
-        </p:txBody>
-      </p:sp>
-      <p:sp>
-        <p:nvSpPr>
-          <p:cNvPr id="3" name="TextBox 2"/>
-          <p:cNvSpPr txBox="1"/>
-          <p:nvPr/>
-        </p:nvSpPr>
-        <p:spPr>
-          <a:xfrm>
-            <a:off x="521207" y="804672"/>
-            <a:ext cx="11064240" cy="292608"/>
-          </a:xfrm>
-          <a:prstGeom prst="rect">
-            <a:avLst/>
-          </a:prstGeom>
-          <a:noFill/>
-        </p:spPr>
-        <p:txBody>
-          <a:bodyPr wrap="none">
-            <a:spAutoFit/>
-          </a:bodyPr>
-          <a:lstStyle/>
-          <a:p>
-            <a:pPr algn="l"/>
-            <a:r>
-              <a:rPr sz="1000" b="0">
-                <a:solidFill>
-                  <a:srgbClr val="697380"/>
-                </a:solidFill>
-                <a:latin typeface="Aptos"/>
-              </a:rPr>
-              <a:t>Token-only 8×8 repair_cells schema</a:t>
-            </a:r>
-          </a:p>
-        </p:txBody>
-      </p:sp>
-      <p:sp>
-        <p:nvSpPr>
-          <p:cNvPr id="4" name="Rectangle 3"/>
+              <a:t>Parse rate must be near 1 before localization metrics matter</a:t>
+            </a:r>
+          </a:p>
+        </p:txBody>
+      </p:sp>
+      <p:sp>
+        <p:nvSpPr>
+          <p:cNvPr id="11" name="Rounded Rectangle 10"/>
           <p:cNvSpPr/>
           <p:nvPr/>
         </p:nvSpPr>
         <p:spPr>
           <a:xfrm>
-            <a:off x="502920" y="1097280"/>
-            <a:ext cx="11155680" cy="18288"/>
-          </a:xfrm>
-          <a:prstGeom prst="rect">
-            <a:avLst/>
-          </a:prstGeom>
-          <a:solidFill>
-            <a:srgbClr val="CDD3DB"/>
-          </a:solidFill>
-          <a:ln>
-            <a:noFill/>
-          </a:ln>
-        </p:spPr>
-        <p:style>
-          <a:lnRef idx="1">
-            <a:schemeClr val="accent1"/>
-          </a:lnRef>
-          <a:fillRef idx="3">
-            <a:schemeClr val="accent1"/>
-          </a:fillRef>
-          <a:effectRef idx="2">
-            <a:schemeClr val="accent1"/>
-          </a:effectRef>
-          <a:fontRef idx="minor">
-            <a:schemeClr val="lt1"/>
-          </a:fontRef>
-        </p:style>
-        <p:txBody>
-          <a:bodyPr rtlCol="0" anchor="ctr"/>
-          <a:lstStyle/>
-          <a:p>
-            <a:pPr algn="ctr"/>
-          </a:p>
-        </p:txBody>
-      </p:sp>
-      <p:sp>
-        <p:nvSpPr>
-          <p:cNvPr id="5" name="Rounded Rectangle 4"/>
-          <p:cNvSpPr/>
-          <p:nvPr/>
-        </p:nvSpPr>
-        <p:spPr>
-          <a:xfrm>
-            <a:off x="731520" y="1417320"/>
-            <a:ext cx="5120640" cy="2331720"/>
+            <a:off x="731520" y="4160520"/>
+            <a:ext cx="10698480" cy="960120"/>
           </a:xfrm>
           <a:prstGeom prst="roundRect">
             <a:avLst/>
@@ -13448,346 +13463,6 @@
       </p:sp>
       <p:sp>
         <p:nvSpPr>
-          <p:cNvPr id="6" name="Rectangle 5"/>
-          <p:cNvSpPr/>
-          <p:nvPr/>
-        </p:nvSpPr>
-        <p:spPr>
-          <a:xfrm>
-            <a:off x="731520" y="1417320"/>
-            <a:ext cx="73152" cy="2331720"/>
-          </a:xfrm>
-          <a:prstGeom prst="rect">
-            <a:avLst/>
-          </a:prstGeom>
-          <a:solidFill>
-            <a:srgbClr val="588760"/>
-          </a:solidFill>
-          <a:ln>
-            <a:noFill/>
-          </a:ln>
-        </p:spPr>
-        <p:style>
-          <a:lnRef idx="1">
-            <a:schemeClr val="accent1"/>
-          </a:lnRef>
-          <a:fillRef idx="3">
-            <a:schemeClr val="accent1"/>
-          </a:fillRef>
-          <a:effectRef idx="2">
-            <a:schemeClr val="accent1"/>
-          </a:effectRef>
-          <a:fontRef idx="minor">
-            <a:schemeClr val="lt1"/>
-          </a:fontRef>
-        </p:style>
-        <p:txBody>
-          <a:bodyPr rtlCol="0" anchor="ctr"/>
-          <a:lstStyle/>
-          <a:p>
-            <a:pPr algn="ctr"/>
-          </a:p>
-        </p:txBody>
-      </p:sp>
-      <p:sp>
-        <p:nvSpPr>
-          <p:cNvPr id="7" name="TextBox 6"/>
-          <p:cNvSpPr txBox="1"/>
-          <p:nvPr/>
-        </p:nvSpPr>
-        <p:spPr>
-          <a:xfrm>
-            <a:off x="932688" y="1581912"/>
-            <a:ext cx="4736592" cy="2103120"/>
-          </a:xfrm>
-          <a:prstGeom prst="rect">
-            <a:avLst/>
-          </a:prstGeom>
-          <a:noFill/>
-        </p:spPr>
-        <p:txBody>
-          <a:bodyPr wrap="none">
-            <a:spAutoFit/>
-          </a:bodyPr>
-          <a:lstStyle/>
-          <a:p>
-            <a:r>
-              <a:rPr sz="1400" b="1">
-                <a:solidFill>
-                  <a:srgbClr val="203044"/>
-                </a:solidFill>
-                <a:latin typeface="Aptos"/>
-              </a:rPr>
-              <a:t>Schema simplification</a:t>
-            </a:r>
-          </a:p>
-          <a:p>
-            <a:pPr>
-              <a:spcBef>
-                <a:spcPts val="600"/>
-              </a:spcBef>
-              <a:defRPr sz="1100">
-                <a:solidFill>
-                  <a:srgbClr val="465260"/>
-                </a:solidFill>
-                <a:latin typeface="Aptos"/>
-              </a:defRPr>
-            </a:pPr>
-            <a:r>
-              <a:t>Target JSON has exactly one key: cells</a:t>
-            </a:r>
-          </a:p>
-          <a:p>
-            <a:pPr>
-              <a:spcBef>
-                <a:spcPts val="600"/>
-              </a:spcBef>
-              <a:defRPr sz="1100">
-                <a:solidFill>
-                  <a:srgbClr val="465260"/>
-                </a:solidFill>
-                <a:latin typeface="Aptos"/>
-              </a:defRPr>
-            </a:pPr>
-            <a:r>
-              <a:t>Positive example: {"cells":["D4","D5"]}</a:t>
-            </a:r>
-          </a:p>
-          <a:p>
-            <a:pPr>
-              <a:spcBef>
-                <a:spcPts val="600"/>
-              </a:spcBef>
-              <a:defRPr sz="1100">
-                <a:solidFill>
-                  <a:srgbClr val="465260"/>
-                </a:solidFill>
-                <a:latin typeface="Aptos"/>
-              </a:defRPr>
-            </a:pPr>
-            <a:r>
-              <a:t>Negative example: {"cells":[]}</a:t>
-            </a:r>
-          </a:p>
-        </p:txBody>
-      </p:sp>
-      <p:sp>
-        <p:nvSpPr>
-          <p:cNvPr id="8" name="Rounded Rectangle 7"/>
-          <p:cNvSpPr/>
-          <p:nvPr/>
-        </p:nvSpPr>
-        <p:spPr>
-          <a:xfrm>
-            <a:off x="6309360" y="1417320"/>
-            <a:ext cx="5120640" cy="2331720"/>
-          </a:xfrm>
-          <a:prstGeom prst="roundRect">
-            <a:avLst/>
-          </a:prstGeom>
-          <a:solidFill>
-            <a:srgbClr val="FFFFFF"/>
-          </a:solidFill>
-          <a:ln w="10160">
-            <a:solidFill>
-              <a:srgbClr val="CDD3DB"/>
-            </a:solidFill>
-          </a:ln>
-        </p:spPr>
-        <p:style>
-          <a:lnRef idx="1">
-            <a:schemeClr val="accent1"/>
-          </a:lnRef>
-          <a:fillRef idx="3">
-            <a:schemeClr val="accent1"/>
-          </a:fillRef>
-          <a:effectRef idx="2">
-            <a:schemeClr val="accent1"/>
-          </a:effectRef>
-          <a:fontRef idx="minor">
-            <a:schemeClr val="lt1"/>
-          </a:fontRef>
-        </p:style>
-        <p:txBody>
-          <a:bodyPr rtlCol="0" anchor="ctr"/>
-          <a:lstStyle/>
-          <a:p>
-            <a:pPr algn="ctr"/>
-          </a:p>
-        </p:txBody>
-      </p:sp>
-      <p:sp>
-        <p:nvSpPr>
-          <p:cNvPr id="9" name="Rectangle 8"/>
-          <p:cNvSpPr/>
-          <p:nvPr/>
-        </p:nvSpPr>
-        <p:spPr>
-          <a:xfrm>
-            <a:off x="6309360" y="1417320"/>
-            <a:ext cx="73152" cy="2331720"/>
-          </a:xfrm>
-          <a:prstGeom prst="rect">
-            <a:avLst/>
-          </a:prstGeom>
-          <a:solidFill>
-            <a:srgbClr val="426792"/>
-          </a:solidFill>
-          <a:ln>
-            <a:noFill/>
-          </a:ln>
-        </p:spPr>
-        <p:style>
-          <a:lnRef idx="1">
-            <a:schemeClr val="accent1"/>
-          </a:lnRef>
-          <a:fillRef idx="3">
-            <a:schemeClr val="accent1"/>
-          </a:fillRef>
-          <a:effectRef idx="2">
-            <a:schemeClr val="accent1"/>
-          </a:effectRef>
-          <a:fontRef idx="minor">
-            <a:schemeClr val="lt1"/>
-          </a:fontRef>
-        </p:style>
-        <p:txBody>
-          <a:bodyPr rtlCol="0" anchor="ctr"/>
-          <a:lstStyle/>
-          <a:p>
-            <a:pPr algn="ctr"/>
-          </a:p>
-        </p:txBody>
-      </p:sp>
-      <p:sp>
-        <p:nvSpPr>
-          <p:cNvPr id="10" name="TextBox 9"/>
-          <p:cNvSpPr txBox="1"/>
-          <p:nvPr/>
-        </p:nvSpPr>
-        <p:spPr>
-          <a:xfrm>
-            <a:off x="6510528" y="1581912"/>
-            <a:ext cx="4736592" cy="2103120"/>
-          </a:xfrm>
-          <a:prstGeom prst="rect">
-            <a:avLst/>
-          </a:prstGeom>
-          <a:noFill/>
-        </p:spPr>
-        <p:txBody>
-          <a:bodyPr wrap="none">
-            <a:spAutoFit/>
-          </a:bodyPr>
-          <a:lstStyle/>
-          <a:p>
-            <a:r>
-              <a:rPr sz="1400" b="1">
-                <a:solidFill>
-                  <a:srgbClr val="203044"/>
-                </a:solidFill>
-                <a:latin typeface="Aptos"/>
-              </a:rPr>
-              <a:t>Why this matters</a:t>
-            </a:r>
-          </a:p>
-          <a:p>
-            <a:pPr>
-              <a:spcBef>
-                <a:spcPts val="600"/>
-              </a:spcBef>
-              <a:defRPr sz="1100">
-                <a:solidFill>
-                  <a:srgbClr val="465260"/>
-                </a:solidFill>
-                <a:latin typeface="Aptos"/>
-              </a:defRPr>
-            </a:pPr>
-            <a:r>
-              <a:t>Removes legacy key mismatch</a:t>
-            </a:r>
-          </a:p>
-          <a:p>
-            <a:pPr>
-              <a:spcBef>
-                <a:spcPts val="600"/>
-              </a:spcBef>
-              <a:defRPr sz="1100">
-                <a:solidFill>
-                  <a:srgbClr val="465260"/>
-                </a:solidFill>
-                <a:latin typeface="Aptos"/>
-              </a:defRPr>
-            </a:pPr>
-            <a:r>
-              <a:t>Directly matches reopen decision</a:t>
-            </a:r>
-          </a:p>
-          <a:p>
-            <a:pPr>
-              <a:spcBef>
-                <a:spcPts val="600"/>
-              </a:spcBef>
-              <a:defRPr sz="1100">
-                <a:solidFill>
-                  <a:srgbClr val="465260"/>
-                </a:solidFill>
-                <a:latin typeface="Aptos"/>
-              </a:defRPr>
-            </a:pPr>
-            <a:r>
-              <a:t>Parse rate must be near 1 before localization metrics matter</a:t>
-            </a:r>
-          </a:p>
-        </p:txBody>
-      </p:sp>
-      <p:sp>
-        <p:nvSpPr>
-          <p:cNvPr id="11" name="Rounded Rectangle 10"/>
-          <p:cNvSpPr/>
-          <p:nvPr/>
-        </p:nvSpPr>
-        <p:spPr>
-          <a:xfrm>
-            <a:off x="731520" y="4160520"/>
-            <a:ext cx="10698480" cy="960120"/>
-          </a:xfrm>
-          <a:prstGeom prst="roundRect">
-            <a:avLst/>
-          </a:prstGeom>
-          <a:solidFill>
-            <a:srgbClr val="FFFFFF"/>
-          </a:solidFill>
-          <a:ln w="10160">
-            <a:solidFill>
-              <a:srgbClr val="CDD3DB"/>
-            </a:solidFill>
-          </a:ln>
-        </p:spPr>
-        <p:style>
-          <a:lnRef idx="1">
-            <a:schemeClr val="accent1"/>
-          </a:lnRef>
-          <a:fillRef idx="3">
-            <a:schemeClr val="accent1"/>
-          </a:fillRef>
-          <a:effectRef idx="2">
-            <a:schemeClr val="accent1"/>
-          </a:effectRef>
-          <a:fontRef idx="minor">
-            <a:schemeClr val="lt1"/>
-          </a:fontRef>
-        </p:style>
-        <p:txBody>
-          <a:bodyPr rtlCol="0" anchor="ctr"/>
-          <a:lstStyle/>
-          <a:p>
-            <a:pPr algn="ctr"/>
-          </a:p>
-        </p:txBody>
-      </p:sp>
-      <p:sp>
-        <p:nvSpPr>
           <p:cNvPr id="12" name="Rectangle 11"/>
           <p:cNvSpPr/>
           <p:nvPr/>
@@ -13860,6 +13535,12 @@
               </a:rPr>
               <a:t>Resource note</a:t>
             </a:r>
+            <a:endParaRPr sz="1400" b="1">
+              <a:solidFill>
+                <a:srgbClr val="203044"/>
+              </a:solidFill>
+              <a:latin typeface="Aptos"/>
+            </a:endParaRPr>
           </a:p>
           <a:p>
             <a:pPr>
@@ -13911,6 +13592,12 @@
               </a:rPr>
               <a:t>ASCR Stage 3 weekly update | Page 9</a:t>
             </a:r>
+            <a:endParaRPr sz="800" b="0">
+              <a:solidFill>
+                <a:srgbClr val="697380"/>
+              </a:solidFill>
+              <a:latin typeface="Aptos"/>
+            </a:endParaRPr>
           </a:p>
         </p:txBody>
       </p:sp>
@@ -14238,6 +13925,10 @@
       </a:style>
     </a:lnDef>
   </a:objectDefaults>
-  <a:extraClrSchemeLst/>
+  <a:extLst>
+    <a:ext uri="{05A4C25C-085E-4340-85A3-A5531E510DB2}">
+      <thm15:themeFamily xmlns:thm15="http://schemas.microsoft.com/office/thememl/2012/main" name="Office Theme" id="{62F939B6-93AF-4DB8-9C6B-D6C7DFDC589F}" vid="{4A3C46E8-61CC-4603-A589-7422A47A8E4A}"/>
+    </a:ext>
+  </a:extLst>
 </a:theme>
 </file>